--- a/docs/研究応用/執筆/システムフロー解説(M1~M7).pptx
+++ b/docs/研究応用/執筆/システムフロー解説(M1~M7).pptx
@@ -34,6 +34,12 @@
     <p:sldId id="279" r:id="rId29"/>
     <p:sldId id="280" r:id="rId30"/>
     <p:sldId id="281" r:id="rId31"/>
+    <p:sldId id="282" r:id="rId32"/>
+    <p:sldId id="283" r:id="rId33"/>
+    <p:sldId id="284" r:id="rId34"/>
+    <p:sldId id="285" r:id="rId35"/>
+    <p:sldId id="286" r:id="rId36"/>
+    <p:sldId id="287" r:id="rId37"/>
   </p:sldIdLst>
   <p:sldSz cy="5143500" cx="9144000"/>
   <p:notesSz cx="6858000" cy="9144000"/>
@@ -815,7 +821,7 @@
   <p:cSld>
     <p:spTree>
       <p:nvGrpSpPr>
-        <p:cNvPr id="109" name="Shape 109"/>
+        <p:cNvPr id="111" name="Shape 111"/>
         <p:cNvGrpSpPr/>
         <p:nvPr/>
       </p:nvGrpSpPr>
@@ -829,7 +835,7 @@
       </p:grpSpPr>
       <p:sp>
         <p:nvSpPr>
-          <p:cNvPr id="110" name="Google Shape;110;h411edbbbcdea00d4_0_74:notes"/>
+          <p:cNvPr id="112" name="Google Shape;112;h411edbbbcdea00d4_0_32:notes"/>
           <p:cNvSpPr/>
           <p:nvPr>
             <p:ph idx="2" type="sldImg"/>
@@ -864,7 +870,7 @@
       </p:sp>
       <p:sp>
         <p:nvSpPr>
-          <p:cNvPr id="111" name="Google Shape;111;h411edbbbcdea00d4_0_74:notes"/>
+          <p:cNvPr id="113" name="Google Shape;113;h411edbbbcdea00d4_0_32:notes"/>
           <p:cNvSpPr txBox="1"/>
           <p:nvPr>
             <p:ph idx="1" type="body"/>
@@ -885,9 +891,262 @@
           </a:bodyPr>
           <a:lstStyle/>
           <a:p>
+            <a:pPr indent="-292100" lvl="0" marL="457200" rtl="0" algn="l">
+              <a:lnSpc>
+                <a:spcPct val="115000"/>
+              </a:lnSpc>
+              <a:spcBef>
+                <a:spcPts val="1000"/>
+              </a:spcBef>
+              <a:spcAft>
+                <a:spcPts val="0"/>
+              </a:spcAft>
+              <a:buClr>
+                <a:srgbClr val="CCCCCC"/>
+              </a:buClr>
+              <a:buSzPts val="1000"/>
+              <a:buChar char="●"/>
+            </a:pPr>
+            <a:r>
+              <a:rPr lang="ja" sz="900">
+                <a:solidFill>
+                  <a:srgbClr val="D0D0D0"/>
+                </a:solidFill>
+                <a:highlight>
+                  <a:srgbClr val="3C3C3C"/>
+                </a:highlight>
+                <a:latin typeface="Courier New"/>
+                <a:ea typeface="Courier New"/>
+                <a:cs typeface="Courier New"/>
+                <a:sym typeface="Courier New"/>
+              </a:rPr>
+              <a:t>data/test/A3</a:t>
+            </a:r>
+            <a:r>
+              <a:rPr lang="ja" sz="1000">
+                <a:solidFill>
+                  <a:srgbClr val="CCCCCC"/>
+                </a:solidFill>
+                <a:highlight>
+                  <a:srgbClr val="181818"/>
+                </a:highlight>
+              </a:rPr>
+              <a:t> です。</a:t>
+            </a:r>
+            <a:endParaRPr sz="1000">
+              <a:solidFill>
+                <a:srgbClr val="CCCCCC"/>
+              </a:solidFill>
+              <a:highlight>
+                <a:srgbClr val="181818"/>
+              </a:highlight>
+            </a:endParaRPr>
+          </a:p>
+          <a:p>
+            <a:pPr indent="-292100" lvl="1" marL="914400" rtl="0" algn="l">
+              <a:lnSpc>
+                <a:spcPct val="115000"/>
+              </a:lnSpc>
+              <a:spcBef>
+                <a:spcPts val="0"/>
+              </a:spcBef>
+              <a:spcAft>
+                <a:spcPts val="0"/>
+              </a:spcAft>
+              <a:buClr>
+                <a:srgbClr val="CCCCCC"/>
+              </a:buClr>
+              <a:buSzPts val="1000"/>
+              <a:buChar char="○"/>
+            </a:pPr>
+            <a:r>
+              <a:rPr lang="ja" sz="1000">
+                <a:solidFill>
+                  <a:srgbClr val="CCCCCC"/>
+                </a:solidFill>
+                <a:highlight>
+                  <a:srgbClr val="181818"/>
+                </a:highlight>
+              </a:rPr>
+              <a:t>手描き: </a:t>
+            </a:r>
+            <a:r>
+              <a:rPr lang="ja" sz="900">
+                <a:solidFill>
+                  <a:srgbClr val="D0D0D0"/>
+                </a:solidFill>
+                <a:highlight>
+                  <a:srgbClr val="3C3C3C"/>
+                </a:highlight>
+                <a:latin typeface="Courier New"/>
+                <a:ea typeface="Courier New"/>
+                <a:cs typeface="Courier New"/>
+                <a:sym typeface="Courier New"/>
+              </a:rPr>
+              <a:t>sketch/A3_hand.webp</a:t>
+            </a:r>
+            <a:endParaRPr sz="900">
+              <a:solidFill>
+                <a:srgbClr val="D0D0D0"/>
+              </a:solidFill>
+              <a:highlight>
+                <a:srgbClr val="3C3C3C"/>
+              </a:highlight>
+              <a:latin typeface="Courier New"/>
+              <a:ea typeface="Courier New"/>
+              <a:cs typeface="Courier New"/>
+              <a:sym typeface="Courier New"/>
+            </a:endParaRPr>
+          </a:p>
+          <a:p>
+            <a:pPr indent="-292100" lvl="1" marL="914400" rtl="0" algn="l">
+              <a:lnSpc>
+                <a:spcPct val="115000"/>
+              </a:lnSpc>
+              <a:spcBef>
+                <a:spcPts val="0"/>
+              </a:spcBef>
+              <a:spcAft>
+                <a:spcPts val="0"/>
+              </a:spcAft>
+              <a:buClr>
+                <a:srgbClr val="CCCCCC"/>
+              </a:buClr>
+              <a:buSzPts val="1000"/>
+              <a:buChar char="○"/>
+            </a:pPr>
+            <a:r>
+              <a:rPr lang="ja" sz="1000">
+                <a:solidFill>
+                  <a:srgbClr val="CCCCCC"/>
+                </a:solidFill>
+                <a:highlight>
+                  <a:srgbClr val="181818"/>
+                </a:highlight>
+              </a:rPr>
+              <a:t>Gemini の出力: </a:t>
+            </a:r>
+            <a:r>
+              <a:rPr lang="ja" sz="900">
+                <a:solidFill>
+                  <a:srgbClr val="D0D0D0"/>
+                </a:solidFill>
+                <a:highlight>
+                  <a:srgbClr val="3C3C3C"/>
+                </a:highlight>
+                <a:latin typeface="Courier New"/>
+                <a:ea typeface="Courier New"/>
+                <a:cs typeface="Courier New"/>
+                <a:sym typeface="Courier New"/>
+              </a:rPr>
+              <a:t>sketch/A3_m1.jpeg</a:t>
+            </a:r>
+            <a:endParaRPr sz="900">
+              <a:solidFill>
+                <a:srgbClr val="D0D0D0"/>
+              </a:solidFill>
+              <a:highlight>
+                <a:srgbClr val="3C3C3C"/>
+              </a:highlight>
+              <a:latin typeface="Courier New"/>
+              <a:ea typeface="Courier New"/>
+              <a:cs typeface="Courier New"/>
+              <a:sym typeface="Courier New"/>
+            </a:endParaRPr>
+          </a:p>
+          <a:p>
+            <a:pPr indent="-292100" lvl="1" marL="914400" rtl="0" algn="l">
+              <a:lnSpc>
+                <a:spcPct val="115000"/>
+              </a:lnSpc>
+              <a:spcBef>
+                <a:spcPts val="0"/>
+              </a:spcBef>
+              <a:spcAft>
+                <a:spcPts val="0"/>
+              </a:spcAft>
+              <a:buClr>
+                <a:srgbClr val="CCCCCC"/>
+              </a:buClr>
+              <a:buSzPts val="1000"/>
+              <a:buChar char="○"/>
+            </a:pPr>
+            <a:r>
+              <a:rPr lang="ja" sz="1000">
+                <a:solidFill>
+                  <a:srgbClr val="CCCCCC"/>
+                </a:solidFill>
+                <a:highlight>
+                  <a:srgbClr val="181818"/>
+                </a:highlight>
+              </a:rPr>
+              <a:t>3D: </a:t>
+            </a:r>
+            <a:r>
+              <a:rPr lang="ja" sz="900">
+                <a:solidFill>
+                  <a:srgbClr val="D0D0D0"/>
+                </a:solidFill>
+                <a:highlight>
+                  <a:srgbClr val="3C3C3C"/>
+                </a:highlight>
+                <a:latin typeface="Courier New"/>
+                <a:ea typeface="Courier New"/>
+                <a:cs typeface="Courier New"/>
+                <a:sym typeface="Courier New"/>
+              </a:rPr>
+              <a:t>3D/A3.glb</a:t>
+            </a:r>
+            <a:r>
+              <a:rPr lang="ja" sz="1000">
+                <a:solidFill>
+                  <a:srgbClr val="CCCCCC"/>
+                </a:solidFill>
+                <a:highlight>
+                  <a:srgbClr val="181818"/>
+                </a:highlight>
+              </a:rPr>
+              <a:t> と </a:t>
+            </a:r>
+            <a:r>
+              <a:rPr lang="ja" sz="900">
+                <a:solidFill>
+                  <a:srgbClr val="D0D0D0"/>
+                </a:solidFill>
+                <a:highlight>
+                  <a:srgbClr val="3C3C3C"/>
+                </a:highlight>
+                <a:latin typeface="Courier New"/>
+                <a:ea typeface="Courier New"/>
+                <a:cs typeface="Courier New"/>
+                <a:sym typeface="Courier New"/>
+              </a:rPr>
+              <a:t>A3_2.glb</a:t>
+            </a:r>
+            <a:r>
+              <a:rPr lang="ja" sz="1000">
+                <a:solidFill>
+                  <a:srgbClr val="CCCCCC"/>
+                </a:solidFill>
+                <a:highlight>
+                  <a:srgbClr val="181818"/>
+                </a:highlight>
+              </a:rPr>
+              <a:t>。この 2 回が「0/2」です。</a:t>
+            </a:r>
+            <a:endParaRPr sz="1000">
+              <a:solidFill>
+                <a:srgbClr val="CCCCCC"/>
+              </a:solidFill>
+              <a:highlight>
+                <a:srgbClr val="181818"/>
+              </a:highlight>
+            </a:endParaRPr>
+          </a:p>
+          <a:p>
             <a:pPr indent="0" lvl="0" marL="0" rtl="0" algn="l">
               <a:spcBef>
-                <a:spcPts val="0"/>
+                <a:spcPts val="1000"/>
               </a:spcBef>
               <a:spcAft>
                 <a:spcPts val="0"/>
@@ -914,7 +1173,7 @@
   <p:cSld>
     <p:spTree>
       <p:nvGrpSpPr>
-        <p:cNvPr id="115" name="Shape 115"/>
+        <p:cNvPr id="117" name="Shape 117"/>
         <p:cNvGrpSpPr/>
         <p:nvPr/>
       </p:nvGrpSpPr>
@@ -928,7 +1187,7 @@
       </p:grpSpPr>
       <p:sp>
         <p:nvSpPr>
-          <p:cNvPr id="116" name="Google Shape;116;h411edbbbcdea00d4_0_48:notes"/>
+          <p:cNvPr id="118" name="Google Shape;118;h411edbbbcdea00d4_0_42:notes"/>
           <p:cNvSpPr/>
           <p:nvPr>
             <p:ph idx="2" type="sldImg"/>
@@ -963,7 +1222,7 @@
       </p:sp>
       <p:sp>
         <p:nvSpPr>
-          <p:cNvPr id="117" name="Google Shape;117;h411edbbbcdea00d4_0_48:notes"/>
+          <p:cNvPr id="119" name="Google Shape;119;h411edbbbcdea00d4_0_42:notes"/>
           <p:cNvSpPr txBox="1"/>
           <p:nvPr>
             <p:ph idx="1" type="body"/>
@@ -995,35 +1254,54 @@
             </a:pPr>
             <a:r>
               <a:rPr lang="ja"/>
-              <a:t>この後のスライドで太さと長さを求めた後色々しているから何をする工程かっていうのはこれはちょっと違う？</a:t>
-            </a:r>
-            <a:endParaRPr/>
-          </a:p>
-          <a:p>
-            <a:pPr indent="0" lvl="0" marL="0" rtl="0" algn="l">
-              <a:spcBef>
-                <a:spcPts val="0"/>
-              </a:spcBef>
-              <a:spcAft>
-                <a:spcPts val="0"/>
-              </a:spcAft>
-              <a:buNone/>
-            </a:pPr>
-            <a:r>
-              <a:rPr lang="ja"/>
-              <a:t>topology.json</a:t>
-            </a:r>
-            <a:r>
-              <a:rPr lang="ja"/>
-              <a:t>とは？</a:t>
+              <a:t>stl</a:t>
+            </a:r>
+            <a:r>
+              <a:rPr lang="ja"/>
+              <a:t>ファイルには</a:t>
+            </a:r>
+            <a:r>
+              <a:rPr lang="ja" sz="1300">
+                <a:solidFill>
+                  <a:srgbClr val="1F1F1F"/>
+                </a:solidFill>
+                <a:highlight>
+                  <a:srgbClr val="F2F0F0"/>
+                </a:highlight>
+              </a:rPr>
+              <a:t>三角形をした各ポリゴンの三次元座標が入っている</a:t>
             </a:r>
             <a:br>
-              <a:rPr lang="ja"/>
+              <a:rPr lang="ja" sz="1300">
+                <a:solidFill>
+                  <a:srgbClr val="1F1F1F"/>
+                </a:solidFill>
+                <a:highlight>
+                  <a:srgbClr val="F2F0F0"/>
+                </a:highlight>
+              </a:rPr>
             </a:br>
             <a:r>
-              <a:rPr lang="ja"/>
-              <a:t>どういう形式のデータ？</a:t>
-            </a:r>
+              <a:rPr lang="ja" sz="1300">
+                <a:solidFill>
+                  <a:srgbClr val="1F1F1F"/>
+                </a:solidFill>
+                <a:highlight>
+                  <a:srgbClr val="F2F0F0"/>
+                </a:highlight>
+              </a:rPr>
+              <a:t>関節の中心座標はマゼンタの重心によって求めている</a:t>
+            </a:r>
+            <a:br>
+              <a:rPr lang="ja" sz="1300">
+                <a:solidFill>
+                  <a:srgbClr val="1F1F1F"/>
+                </a:solidFill>
+                <a:highlight>
+                  <a:srgbClr val="F2F0F0"/>
+                </a:highlight>
+              </a:rPr>
+            </a:br>
             <a:endParaRPr/>
           </a:p>
         </p:txBody>
@@ -1041,7 +1319,7 @@
   <p:cSld>
     <p:spTree>
       <p:nvGrpSpPr>
-        <p:cNvPr id="121" name="Shape 121"/>
+        <p:cNvPr id="124" name="Shape 124"/>
         <p:cNvGrpSpPr/>
         <p:nvPr/>
       </p:nvGrpSpPr>
@@ -1055,7 +1333,7 @@
       </p:grpSpPr>
       <p:sp>
         <p:nvSpPr>
-          <p:cNvPr id="122" name="Google Shape;122;h411edbbbcdea00d4_0_79:notes"/>
+          <p:cNvPr id="125" name="Google Shape;125;h411edbbbcdea00d4_0_56:notes"/>
           <p:cNvSpPr/>
           <p:nvPr>
             <p:ph idx="2" type="sldImg"/>
@@ -1090,7 +1368,7 @@
       </p:sp>
       <p:sp>
         <p:nvSpPr>
-          <p:cNvPr id="123" name="Google Shape;123;h411edbbbcdea00d4_0_79:notes"/>
+          <p:cNvPr id="126" name="Google Shape;126;h411edbbbcdea00d4_0_56:notes"/>
           <p:cNvSpPr txBox="1"/>
           <p:nvPr>
             <p:ph idx="1" type="body"/>
@@ -1140,7 +1418,7 @@
   <p:cSld>
     <p:spTree>
       <p:nvGrpSpPr>
-        <p:cNvPr id="127" name="Shape 127"/>
+        <p:cNvPr id="130" name="Shape 130"/>
         <p:cNvGrpSpPr/>
         <p:nvPr/>
       </p:nvGrpSpPr>
@@ -1154,7 +1432,7 @@
       </p:grpSpPr>
       <p:sp>
         <p:nvSpPr>
-          <p:cNvPr id="128" name="Google Shape;128;h411edbbbcdea00d4_0_87:notes"/>
+          <p:cNvPr id="131" name="Google Shape;131;h411edbbbcdea00d4_0_187:notes"/>
           <p:cNvSpPr/>
           <p:nvPr>
             <p:ph idx="2" type="sldImg"/>
@@ -1189,7 +1467,7 @@
       </p:sp>
       <p:sp>
         <p:nvSpPr>
-          <p:cNvPr id="129" name="Google Shape;129;h411edbbbcdea00d4_0_87:notes"/>
+          <p:cNvPr id="132" name="Google Shape;132;h411edbbbcdea00d4_0_187:notes"/>
           <p:cNvSpPr txBox="1"/>
           <p:nvPr>
             <p:ph idx="1" type="body"/>
@@ -1220,8 +1498,7 @@
               <a:buNone/>
             </a:pPr>
             <a:r>
-              <a:rPr lang="ja"/>
-              <a:t>全体的によくわからないので、後でclaudeにきく</a:t>
+              <a:t/>
             </a:r>
             <a:endParaRPr/>
           </a:p>
@@ -1240,7 +1517,7 @@
   <p:cSld>
     <p:spTree>
       <p:nvGrpSpPr>
-        <p:cNvPr id="133" name="Shape 133"/>
+        <p:cNvPr id="137" name="Shape 137"/>
         <p:cNvGrpSpPr/>
         <p:nvPr/>
       </p:nvGrpSpPr>
@@ -1254,7 +1531,7 @@
       </p:grpSpPr>
       <p:sp>
         <p:nvSpPr>
-          <p:cNvPr id="134" name="Google Shape;134;h411edbbbcdea00d4_0_92:notes"/>
+          <p:cNvPr id="138" name="Google Shape;138;h411edbbbcdea00d4_0_74:notes"/>
           <p:cNvSpPr/>
           <p:nvPr>
             <p:ph idx="2" type="sldImg"/>
@@ -1289,7 +1566,7 @@
       </p:sp>
       <p:sp>
         <p:nvSpPr>
-          <p:cNvPr id="135" name="Google Shape;135;h411edbbbcdea00d4_0_92:notes"/>
+          <p:cNvPr id="139" name="Google Shape;139;h411edbbbcdea00d4_0_74:notes"/>
           <p:cNvSpPr txBox="1"/>
           <p:nvPr>
             <p:ph idx="1" type="body"/>
@@ -1320,8 +1597,7 @@
               <a:buNone/>
             </a:pPr>
             <a:r>
-              <a:rPr lang="ja"/>
-              <a:t>ここの変換するってのは、XMLをchoreonoidが読むときにurdfにするっていう意味であってる？</a:t>
+              <a:t/>
             </a:r>
             <a:endParaRPr/>
           </a:p>
@@ -1340,7 +1616,7 @@
   <p:cSld>
     <p:spTree>
       <p:nvGrpSpPr>
-        <p:cNvPr id="139" name="Shape 139"/>
+        <p:cNvPr id="143" name="Shape 143"/>
         <p:cNvGrpSpPr/>
         <p:nvPr/>
       </p:nvGrpSpPr>
@@ -1354,7 +1630,7 @@
       </p:grpSpPr>
       <p:sp>
         <p:nvSpPr>
-          <p:cNvPr id="140" name="Google Shape;140;h411edbbbcdea00d4_0_97:notes"/>
+          <p:cNvPr id="144" name="Google Shape;144;h411edbbbcdea00d4_0_48:notes"/>
           <p:cNvSpPr/>
           <p:nvPr>
             <p:ph idx="2" type="sldImg"/>
@@ -1389,7 +1665,7 @@
       </p:sp>
       <p:sp>
         <p:nvSpPr>
-          <p:cNvPr id="141" name="Google Shape;141;h411edbbbcdea00d4_0_97:notes"/>
+          <p:cNvPr id="145" name="Google Shape;145;h411edbbbcdea00d4_0_48:notes"/>
           <p:cNvSpPr txBox="1"/>
           <p:nvPr>
             <p:ph idx="1" type="body"/>
@@ -1410,18 +1686,370 @@
           </a:bodyPr>
           <a:lstStyle/>
           <a:p>
+            <a:pPr indent="-292100" lvl="0" marL="457200" rtl="0" algn="l">
+              <a:lnSpc>
+                <a:spcPct val="115000"/>
+              </a:lnSpc>
+              <a:spcBef>
+                <a:spcPts val="1000"/>
+              </a:spcBef>
+              <a:spcAft>
+                <a:spcPts val="0"/>
+              </a:spcAft>
+              <a:buClr>
+                <a:srgbClr val="CCCCCC"/>
+              </a:buClr>
+              <a:buSzPts val="1000"/>
+              <a:buChar char="●"/>
+            </a:pPr>
+            <a:r>
+              <a:rPr lang="ja" sz="1000">
+                <a:solidFill>
+                  <a:srgbClr val="CCCCCC"/>
+                </a:solidFill>
+                <a:highlight>
+                  <a:srgbClr val="181818"/>
+                </a:highlight>
+              </a:rPr>
+              <a:t>topology.json はテキストの JSON で、リンクごとに次の 1 項目を持ちます。</a:t>
+            </a:r>
+            <a:endParaRPr sz="1000">
+              <a:solidFill>
+                <a:srgbClr val="CCCCCC"/>
+              </a:solidFill>
+              <a:highlight>
+                <a:srgbClr val="181818"/>
+              </a:highlight>
+            </a:endParaRPr>
+          </a:p>
+          <a:p>
+            <a:pPr indent="-292100" lvl="1" marL="914400" rtl="0" algn="l">
+              <a:lnSpc>
+                <a:spcPct val="115000"/>
+              </a:lnSpc>
+              <a:spcBef>
+                <a:spcPts val="0"/>
+              </a:spcBef>
+              <a:spcAft>
+                <a:spcPts val="0"/>
+              </a:spcAft>
+              <a:buClr>
+                <a:srgbClr val="CCCCCC"/>
+              </a:buClr>
+              <a:buSzPts val="1000"/>
+              <a:buChar char="○"/>
+            </a:pPr>
+            <a:r>
+              <a:rPr lang="ja" sz="1000">
+                <a:solidFill>
+                  <a:srgbClr val="CCCCCC"/>
+                </a:solidFill>
+                <a:highlight>
+                  <a:srgbClr val="181818"/>
+                </a:highlight>
+              </a:rPr>
+              <a:t>名前・親リンク</a:t>
+            </a:r>
+            <a:endParaRPr sz="1000">
+              <a:solidFill>
+                <a:srgbClr val="CCCCCC"/>
+              </a:solidFill>
+              <a:highlight>
+                <a:srgbClr val="181818"/>
+              </a:highlight>
+            </a:endParaRPr>
+          </a:p>
+          <a:p>
+            <a:pPr indent="-292100" lvl="1" marL="914400" rtl="0" algn="l">
+              <a:lnSpc>
+                <a:spcPct val="115000"/>
+              </a:lnSpc>
+              <a:spcBef>
+                <a:spcPts val="0"/>
+              </a:spcBef>
+              <a:spcAft>
+                <a:spcPts val="0"/>
+              </a:spcAft>
+              <a:buClr>
+                <a:srgbClr val="CCCCCC"/>
+              </a:buClr>
+              <a:buSzPts val="1000"/>
+              <a:buChar char="○"/>
+            </a:pPr>
+            <a:r>
+              <a:rPr lang="ja" sz="1000">
+                <a:solidFill>
+                  <a:srgbClr val="CCCCCC"/>
+                </a:solidFill>
+                <a:highlight>
+                  <a:srgbClr val="181818"/>
+                </a:highlight>
+              </a:rPr>
+              <a:t>関節（種類・軸・可動域）</a:t>
+            </a:r>
+            <a:endParaRPr sz="1000">
+              <a:solidFill>
+                <a:srgbClr val="CCCCCC"/>
+              </a:solidFill>
+              <a:highlight>
+                <a:srgbClr val="181818"/>
+              </a:highlight>
+            </a:endParaRPr>
+          </a:p>
+          <a:p>
+            <a:pPr indent="-292100" lvl="1" marL="914400" rtl="0" algn="l">
+              <a:lnSpc>
+                <a:spcPct val="115000"/>
+              </a:lnSpc>
+              <a:spcBef>
+                <a:spcPts val="0"/>
+              </a:spcBef>
+              <a:spcAft>
+                <a:spcPts val="0"/>
+              </a:spcAft>
+              <a:buClr>
+                <a:srgbClr val="CCCCCC"/>
+              </a:buClr>
+              <a:buSzPts val="1000"/>
+              <a:buChar char="○"/>
+            </a:pPr>
+            <a:r>
+              <a:rPr lang="ja" sz="1000">
+                <a:solidFill>
+                  <a:srgbClr val="CCCCCC"/>
+                </a:solidFill>
+                <a:highlight>
+                  <a:srgbClr val="181818"/>
+                </a:highlight>
+              </a:rPr>
+              <a:t>骨の長さ（</a:t>
+            </a:r>
+            <a:r>
+              <a:rPr lang="ja" sz="900">
+                <a:solidFill>
+                  <a:srgbClr val="D0D0D0"/>
+                </a:solidFill>
+                <a:highlight>
+                  <a:srgbClr val="3C3C3C"/>
+                </a:highlight>
+                <a:latin typeface="Courier New"/>
+                <a:ea typeface="Courier New"/>
+                <a:cs typeface="Courier New"/>
+                <a:sym typeface="Courier New"/>
+              </a:rPr>
+              <a:t>bone_offset</a:t>
+            </a:r>
+            <a:r>
+              <a:rPr lang="ja" sz="1000">
+                <a:solidFill>
+                  <a:srgbClr val="CCCCCC"/>
+                </a:solidFill>
+                <a:highlight>
+                  <a:srgbClr val="181818"/>
+                </a:highlight>
+              </a:rPr>
+              <a:t>）</a:t>
+            </a:r>
+            <a:endParaRPr sz="1000">
+              <a:solidFill>
+                <a:srgbClr val="CCCCCC"/>
+              </a:solidFill>
+              <a:highlight>
+                <a:srgbClr val="181818"/>
+              </a:highlight>
+            </a:endParaRPr>
+          </a:p>
+          <a:p>
+            <a:pPr indent="-292100" lvl="1" marL="914400" rtl="0" algn="l">
+              <a:lnSpc>
+                <a:spcPct val="115000"/>
+              </a:lnSpc>
+              <a:spcBef>
+                <a:spcPts val="0"/>
+              </a:spcBef>
+              <a:spcAft>
+                <a:spcPts val="0"/>
+              </a:spcAft>
+              <a:buClr>
+                <a:srgbClr val="CCCCCC"/>
+              </a:buClr>
+              <a:buSzPts val="1000"/>
+              <a:buChar char="○"/>
+            </a:pPr>
+            <a:r>
+              <a:rPr lang="ja" sz="1000">
+                <a:solidFill>
+                  <a:srgbClr val="CCCCCC"/>
+                </a:solidFill>
+                <a:highlight>
+                  <a:srgbClr val="181818"/>
+                </a:highlight>
+              </a:rPr>
+              <a:t>カプセルの半径（</a:t>
+            </a:r>
+            <a:r>
+              <a:rPr lang="ja" sz="900">
+                <a:solidFill>
+                  <a:srgbClr val="D0D0D0"/>
+                </a:solidFill>
+                <a:highlight>
+                  <a:srgbClr val="3C3C3C"/>
+                </a:highlight>
+                <a:latin typeface="Courier New"/>
+                <a:ea typeface="Courier New"/>
+                <a:cs typeface="Courier New"/>
+                <a:sym typeface="Courier New"/>
+              </a:rPr>
+              <a:t>size</a:t>
+            </a:r>
+            <a:r>
+              <a:rPr lang="ja" sz="1000">
+                <a:solidFill>
+                  <a:srgbClr val="CCCCCC"/>
+                </a:solidFill>
+                <a:highlight>
+                  <a:srgbClr val="181818"/>
+                </a:highlight>
+              </a:rPr>
+              <a:t>）</a:t>
+            </a:r>
+            <a:endParaRPr sz="1000">
+              <a:solidFill>
+                <a:srgbClr val="CCCCCC"/>
+              </a:solidFill>
+              <a:highlight>
+                <a:srgbClr val="181818"/>
+              </a:highlight>
+            </a:endParaRPr>
+          </a:p>
+          <a:p>
+            <a:pPr indent="-292100" lvl="1" marL="914400" rtl="0" algn="l">
+              <a:lnSpc>
+                <a:spcPct val="115000"/>
+              </a:lnSpc>
+              <a:spcBef>
+                <a:spcPts val="0"/>
+              </a:spcBef>
+              <a:spcAft>
+                <a:spcPts val="0"/>
+              </a:spcAft>
+              <a:buClr>
+                <a:srgbClr val="CCCCCC"/>
+              </a:buClr>
+              <a:buSzPts val="1000"/>
+              <a:buChar char="○"/>
+            </a:pPr>
+            <a:r>
+              <a:rPr lang="ja" sz="1000">
+                <a:solidFill>
+                  <a:srgbClr val="CCCCCC"/>
+                </a:solidFill>
+                <a:highlight>
+                  <a:srgbClr val="181818"/>
+                </a:highlight>
+              </a:rPr>
+              <a:t>ギア比</a:t>
+            </a:r>
+            <a:endParaRPr sz="1000">
+              <a:solidFill>
+                <a:srgbClr val="CCCCCC"/>
+              </a:solidFill>
+              <a:highlight>
+                <a:srgbClr val="181818"/>
+              </a:highlight>
+            </a:endParaRPr>
+          </a:p>
+          <a:p>
             <a:pPr indent="0" lvl="0" marL="0" rtl="0" algn="l">
               <a:spcBef>
-                <a:spcPts val="0"/>
-              </a:spcBef>
-              <a:spcAft>
-                <a:spcPts val="0"/>
-              </a:spcAft>
-              <a:buNone/>
-            </a:pPr>
-            <a:r>
-              <a:rPr lang="ja"/>
-              <a:t>取り付けるとは具体的にどういう操作をしている？</a:t>
+                <a:spcPts val="1000"/>
+              </a:spcBef>
+              <a:spcAft>
+                <a:spcPts val="0"/>
+              </a:spcAft>
+              <a:buNone/>
+            </a:pPr>
+            <a:r>
+              <a:rPr lang="ja"/>
+              <a:t>{"name": "upper_arm", "parent": "base",</a:t>
+            </a:r>
+            <a:endParaRPr/>
+          </a:p>
+          <a:p>
+            <a:pPr indent="0" lvl="0" marL="0" rtl="0" algn="l">
+              <a:spcBef>
+                <a:spcPts val="0"/>
+              </a:spcBef>
+              <a:spcAft>
+                <a:spcPts val="0"/>
+              </a:spcAft>
+              <a:buNone/>
+            </a:pPr>
+            <a:r>
+              <a:rPr lang="ja"/>
+              <a:t> "joint": {"type": "hinge", "axis": [0,1,0], "range": [-90,90]},</a:t>
+            </a:r>
+            <a:endParaRPr/>
+          </a:p>
+          <a:p>
+            <a:pPr indent="0" lvl="0" marL="0" rtl="0" algn="l">
+              <a:spcBef>
+                <a:spcPts val="0"/>
+              </a:spcBef>
+              <a:spcAft>
+                <a:spcPts val="0"/>
+              </a:spcAft>
+              <a:buNone/>
+            </a:pPr>
+            <a:r>
+              <a:rPr lang="ja"/>
+              <a:t> "bone_offset": [0,0,0.4031], "geom": {"type": "capsule", "size": 0.0516},</a:t>
+            </a:r>
+            <a:endParaRPr/>
+          </a:p>
+          <a:p>
+            <a:pPr indent="0" lvl="0" marL="0" rtl="0" algn="l">
+              <a:spcBef>
+                <a:spcPts val="0"/>
+              </a:spcBef>
+              <a:spcAft>
+                <a:spcPts val="0"/>
+              </a:spcAft>
+              <a:buNone/>
+            </a:pPr>
+            <a:r>
+              <a:rPr lang="ja"/>
+              <a:t> "actuator": {"gear": 100.0}}</a:t>
+            </a:r>
+            <a:endParaRPr/>
+          </a:p>
+          <a:p>
+            <a:pPr indent="0" lvl="0" marL="0" rtl="0" algn="l">
+              <a:spcBef>
+                <a:spcPts val="0"/>
+              </a:spcBef>
+              <a:spcAft>
+                <a:spcPts val="0"/>
+              </a:spcAft>
+              <a:buNone/>
+            </a:pPr>
+            <a:r>
+              <a:t/>
+            </a:r>
+            <a:endParaRPr/>
+          </a:p>
+          <a:p>
+            <a:pPr indent="0" lvl="0" marL="0" rtl="0" algn="l">
+              <a:spcBef>
+                <a:spcPts val="0"/>
+              </a:spcBef>
+              <a:spcAft>
+                <a:spcPts val="0"/>
+              </a:spcAft>
+              <a:buNone/>
+            </a:pPr>
+            <a:r>
+              <a:t/>
             </a:r>
             <a:endParaRPr/>
           </a:p>
@@ -1440,7 +2068,7 @@
   <p:cSld>
     <p:spTree>
       <p:nvGrpSpPr>
-        <p:cNvPr id="145" name="Shape 145"/>
+        <p:cNvPr id="150" name="Shape 150"/>
         <p:cNvGrpSpPr/>
         <p:nvPr/>
       </p:nvGrpSpPr>
@@ -1454,7 +2082,7 @@
       </p:grpSpPr>
       <p:sp>
         <p:nvSpPr>
-          <p:cNvPr id="146" name="Google Shape;146;h411edbbbcdea00d4_0_102:notes"/>
+          <p:cNvPr id="151" name="Google Shape;151;h411edbbbcdea00d4_0_79:notes"/>
           <p:cNvSpPr/>
           <p:nvPr>
             <p:ph idx="2" type="sldImg"/>
@@ -1489,7 +2117,7 @@
       </p:sp>
       <p:sp>
         <p:nvSpPr>
-          <p:cNvPr id="147" name="Google Shape;147;h411edbbbcdea00d4_0_102:notes"/>
+          <p:cNvPr id="152" name="Google Shape;152;h411edbbbcdea00d4_0_79:notes"/>
           <p:cNvSpPr txBox="1"/>
           <p:nvPr>
             <p:ph idx="1" type="body"/>
@@ -1520,89 +2148,7 @@
               <a:buNone/>
             </a:pPr>
             <a:r>
-              <a:rPr lang="ja"/>
-              <a:t>なんか確認したことに当たり前だよねみたいな話もあるし、でも当たり前ができているかも確認するのが検証だし...</a:t>
-            </a:r>
-            <a:br>
-              <a:rPr lang="ja"/>
-            </a:br>
-            <a:r>
-              <a:rPr lang="ja"/>
-              <a:t>あと、「</a:t>
-            </a:r>
-            <a:r>
-              <a:rPr lang="ja" sz="1000">
-                <a:solidFill>
-                  <a:srgbClr val="CCCCCC"/>
-                </a:solidFill>
-                <a:highlight>
-                  <a:srgbClr val="181818"/>
-                </a:highlight>
-              </a:rPr>
-              <a:t>表示用モデルと物理モデルのずれを無くした」とかも、デモを再生するために〜の部分が抜けているせいで「？」って感じだから説明の粒度を揃えたいね</a:t>
-            </a:r>
-            <a:br>
-              <a:rPr lang="ja" sz="1000">
-                <a:solidFill>
-                  <a:srgbClr val="CCCCCC"/>
-                </a:solidFill>
-                <a:highlight>
-                  <a:srgbClr val="181818"/>
-                </a:highlight>
-              </a:rPr>
-            </a:br>
-            <a:r>
-              <a:rPr lang="ja" sz="1000">
-                <a:solidFill>
-                  <a:srgbClr val="CCCCCC"/>
-                </a:solidFill>
-                <a:highlight>
-                  <a:srgbClr val="181818"/>
-                </a:highlight>
-              </a:rPr>
-              <a:t>①基本機能の検証</a:t>
-            </a:r>
-            <a:br>
-              <a:rPr lang="ja" sz="1000">
-                <a:solidFill>
-                  <a:srgbClr val="CCCCCC"/>
-                </a:solidFill>
-                <a:highlight>
-                  <a:srgbClr val="181818"/>
-                </a:highlight>
-              </a:rPr>
-            </a:br>
-            <a:r>
-              <a:rPr lang="ja" sz="1000">
-                <a:solidFill>
-                  <a:srgbClr val="CCCCCC"/>
-                </a:solidFill>
-                <a:highlight>
-                  <a:srgbClr val="181818"/>
-                </a:highlight>
-              </a:rPr>
-              <a:t>②実装した発展機能の検証</a:t>
-            </a:r>
-            <a:br>
-              <a:rPr lang="ja" sz="1000">
-                <a:solidFill>
-                  <a:srgbClr val="CCCCCC"/>
-                </a:solidFill>
-                <a:highlight>
-                  <a:srgbClr val="181818"/>
-                </a:highlight>
-              </a:rPr>
-            </a:br>
-            <a:r>
-              <a:rPr lang="ja" sz="1000">
-                <a:solidFill>
-                  <a:srgbClr val="CCCCCC"/>
-                </a:solidFill>
-                <a:highlight>
-                  <a:srgbClr val="181818"/>
-                </a:highlight>
-              </a:rPr>
-              <a:t>そんで論文に書くのはあくまで①だけとかね</a:t>
+              <a:t/>
             </a:r>
             <a:endParaRPr/>
           </a:p>
@@ -1621,7 +2167,7 @@
   <p:cSld>
     <p:spTree>
       <p:nvGrpSpPr>
-        <p:cNvPr id="151" name="Shape 151"/>
+        <p:cNvPr id="156" name="Shape 156"/>
         <p:cNvGrpSpPr/>
         <p:nvPr/>
       </p:nvGrpSpPr>
@@ -1635,7 +2181,7 @@
       </p:grpSpPr>
       <p:sp>
         <p:nvSpPr>
-          <p:cNvPr id="152" name="Google Shape;152;h411edbbbcdea00d4_0_108:notes"/>
+          <p:cNvPr id="157" name="Google Shape;157;h411edbbbcdea00d4_0_194:notes"/>
           <p:cNvSpPr/>
           <p:nvPr>
             <p:ph idx="2" type="sldImg"/>
@@ -1670,7 +2216,7 @@
       </p:sp>
       <p:sp>
         <p:nvSpPr>
-          <p:cNvPr id="153" name="Google Shape;153;h411edbbbcdea00d4_0_108:notes"/>
+          <p:cNvPr id="158" name="Google Shape;158;h411edbbbcdea00d4_0_194:notes"/>
           <p:cNvSpPr txBox="1"/>
           <p:nvPr>
             <p:ph idx="1" type="body"/>
@@ -1698,11 +2244,71 @@
               <a:spcAft>
                 <a:spcPts val="0"/>
               </a:spcAft>
-              <a:buNone/>
-            </a:pPr>
-            <a:r>
-              <a:rPr lang="ja"/>
-              <a:t>ここの変換するってのは、XMLをchoreonoidが読むときにurdfにするっていう意味であってる？</a:t>
+              <a:buClr>
+                <a:schemeClr val="dk1"/>
+              </a:buClr>
+              <a:buSzPts val="1100"/>
+              <a:buFont typeface="Arial"/>
+              <a:buNone/>
+            </a:pPr>
+            <a:r>
+              <a:rPr lang="ja">
+                <a:solidFill>
+                  <a:schemeClr val="dk1"/>
+                </a:solidFill>
+              </a:rPr>
+              <a:t>この画像は同じくA1に対して行ったもの</a:t>
+            </a:r>
+            <a:br>
+              <a:rPr lang="ja">
+                <a:solidFill>
+                  <a:schemeClr val="dk1"/>
+                </a:solidFill>
+              </a:rPr>
+            </a:br>
+            <a:r>
+              <a:rPr lang="ja">
+                <a:solidFill>
+                  <a:schemeClr val="dk1"/>
+                </a:solidFill>
+              </a:rPr>
+              <a:t>先程のスライドの画像には前腕の下端は斜めに切られているが、このスライドの切られ方だと、下端がきれいな半円なのが謎。</a:t>
+            </a:r>
+            <a:br>
+              <a:rPr lang="ja">
+                <a:solidFill>
+                  <a:schemeClr val="dk1"/>
+                </a:solidFill>
+              </a:rPr>
+            </a:br>
+            <a:endParaRPr>
+              <a:solidFill>
+                <a:schemeClr val="dk1"/>
+              </a:solidFill>
+            </a:endParaRPr>
+          </a:p>
+          <a:p>
+            <a:pPr indent="0" lvl="0" marL="0" rtl="0" algn="l">
+              <a:spcBef>
+                <a:spcPts val="0"/>
+              </a:spcBef>
+              <a:spcAft>
+                <a:spcPts val="0"/>
+              </a:spcAft>
+              <a:buClr>
+                <a:schemeClr val="dk1"/>
+              </a:buClr>
+              <a:buSzPts val="1100"/>
+              <a:buFont typeface="Arial"/>
+              <a:buNone/>
+            </a:pPr>
+            <a:r>
+              <a:rPr lang="ja">
+                <a:solidFill>
+                  <a:schemeClr val="dk1"/>
+                </a:solidFill>
+              </a:rPr>
+              <a:t>おそらくカプセル形状の黒線が近似した形、黒色はメッシュの頂点が近似した形から漏れてしまった実際の形状。ピンクの三角が関節座標</a:t>
             </a:r>
             <a:endParaRPr/>
           </a:p>
@@ -1721,7 +2327,7 @@
   <p:cSld>
     <p:spTree>
       <p:nvGrpSpPr>
-        <p:cNvPr id="158" name="Shape 158"/>
+        <p:cNvPr id="166" name="Shape 166"/>
         <p:cNvGrpSpPr/>
         <p:nvPr/>
       </p:nvGrpSpPr>
@@ -1735,7 +2341,7 @@
       </p:grpSpPr>
       <p:sp>
         <p:nvSpPr>
-          <p:cNvPr id="159" name="Google Shape;159;h411edbbbcdea00d4_0_113:notes"/>
+          <p:cNvPr id="167" name="Google Shape;167;h411edbbbcdea00d4_0_87:notes"/>
           <p:cNvSpPr/>
           <p:nvPr>
             <p:ph idx="2" type="sldImg"/>
@@ -1770,7 +2376,7 @@
       </p:sp>
       <p:sp>
         <p:nvSpPr>
-          <p:cNvPr id="160" name="Google Shape;160;h411edbbbcdea00d4_0_113:notes"/>
+          <p:cNvPr id="168" name="Google Shape;168;h411edbbbcdea00d4_0_87:notes"/>
           <p:cNvSpPr txBox="1"/>
           <p:nvPr>
             <p:ph idx="1" type="body"/>
@@ -1790,22 +2396,6 @@
             <a:noAutofit/>
           </a:bodyPr>
           <a:lstStyle/>
-          <a:p>
-            <a:pPr indent="0" lvl="0" marL="0" rtl="0" algn="l">
-              <a:spcBef>
-                <a:spcPts val="0"/>
-              </a:spcBef>
-              <a:spcAft>
-                <a:spcPts val="0"/>
-              </a:spcAft>
-              <a:buNone/>
-            </a:pPr>
-            <a:r>
-              <a:rPr lang="ja"/>
-              <a:t>前のスライドの出力の部分がコア（学習曲線）・学習後の形(XML?)・方策とかいてあるならフローの最後もそれらを示すべき。</a:t>
-            </a:r>
-            <a:endParaRPr/>
-          </a:p>
           <a:p>
             <a:pPr indent="0" lvl="0" marL="0" rtl="0" algn="l">
               <a:spcBef>
@@ -1836,7 +2426,7 @@
   <p:cSld>
     <p:spTree>
       <p:nvGrpSpPr>
-        <p:cNvPr id="164" name="Shape 164"/>
+        <p:cNvPr id="174" name="Shape 174"/>
         <p:cNvGrpSpPr/>
         <p:nvPr/>
       </p:nvGrpSpPr>
@@ -1850,7 +2440,7 @@
       </p:grpSpPr>
       <p:sp>
         <p:nvSpPr>
-          <p:cNvPr id="165" name="Google Shape;165;h411edbbbcdea00d4_0_119:notes"/>
+          <p:cNvPr id="175" name="Google Shape;175;h411edbbbcdea00d4_0_92:notes"/>
           <p:cNvSpPr/>
           <p:nvPr>
             <p:ph idx="2" type="sldImg"/>
@@ -1885,7 +2475,7 @@
       </p:sp>
       <p:sp>
         <p:nvSpPr>
-          <p:cNvPr id="166" name="Google Shape;166;h411edbbbcdea00d4_0_119:notes"/>
+          <p:cNvPr id="176" name="Google Shape;176;h411edbbbcdea00d4_0_92:notes"/>
           <p:cNvSpPr txBox="1"/>
           <p:nvPr>
             <p:ph idx="1" type="body"/>
@@ -1917,8 +2507,11 @@
             </a:pPr>
             <a:r>
               <a:rPr lang="ja"/>
-              <a:t>これらって検証ってよりは実験でわかった傾向じゃない？</a:t>
-            </a:r>
+              <a:t>ここの変換するってのは読み込むときにchorenoidがbodyにするってこと。</a:t>
+            </a:r>
+            <a:br>
+              <a:rPr lang="ja"/>
+            </a:br>
             <a:endParaRPr/>
           </a:p>
         </p:txBody>
@@ -1950,7 +2543,7 @@
       </p:grpSpPr>
       <p:sp>
         <p:nvSpPr>
-          <p:cNvPr id="57" name="Google Shape;57;h411edbbbcdea00d4_0_0:notes"/>
+          <p:cNvPr id="57" name="Google Shape;57;h678fe0b7a829e5b7_0_16:notes"/>
           <p:cNvSpPr/>
           <p:nvPr>
             <p:ph idx="2" type="sldImg"/>
@@ -1985,7 +2578,7 @@
       </p:sp>
       <p:sp>
         <p:nvSpPr>
-          <p:cNvPr id="58" name="Google Shape;58;h411edbbbcdea00d4_0_0:notes"/>
+          <p:cNvPr id="58" name="Google Shape;58;h678fe0b7a829e5b7_0_16:notes"/>
           <p:cNvSpPr txBox="1"/>
           <p:nvPr>
             <p:ph idx="1" type="body"/>
@@ -2035,7 +2628,7 @@
   <p:cSld>
     <p:spTree>
       <p:nvGrpSpPr>
-        <p:cNvPr id="170" name="Shape 170"/>
+        <p:cNvPr id="180" name="Shape 180"/>
         <p:cNvGrpSpPr/>
         <p:nvPr/>
       </p:nvGrpSpPr>
@@ -2049,7 +2642,7 @@
       </p:grpSpPr>
       <p:sp>
         <p:nvSpPr>
-          <p:cNvPr id="171" name="Google Shape;171;h411edbbbcdea00d4_0_125:notes"/>
+          <p:cNvPr id="181" name="Google Shape;181;h411edbbbcdea00d4_0_97:notes"/>
           <p:cNvSpPr/>
           <p:nvPr>
             <p:ph idx="2" type="sldImg"/>
@@ -2084,7 +2677,7 @@
       </p:sp>
       <p:sp>
         <p:nvSpPr>
-          <p:cNvPr id="172" name="Google Shape;172;h411edbbbcdea00d4_0_125:notes"/>
+          <p:cNvPr id="182" name="Google Shape;182;h411edbbbcdea00d4_0_97:notes"/>
           <p:cNvSpPr txBox="1"/>
           <p:nvPr>
             <p:ph idx="1" type="body"/>
@@ -2105,9 +2698,250 @@
           </a:bodyPr>
           <a:lstStyle/>
           <a:p>
+            <a:pPr indent="-292100" lvl="0" marL="457200" rtl="0" algn="l">
+              <a:lnSpc>
+                <a:spcPct val="115000"/>
+              </a:lnSpc>
+              <a:spcBef>
+                <a:spcPts val="1000"/>
+              </a:spcBef>
+              <a:spcAft>
+                <a:spcPts val="0"/>
+              </a:spcAft>
+              <a:buClr>
+                <a:srgbClr val="CCCCCC"/>
+              </a:buClr>
+              <a:buSzPts val="1000"/>
+              <a:buChar char="●"/>
+            </a:pPr>
+            <a:r>
+              <a:rPr lang="ja" sz="1000">
+                <a:solidFill>
+                  <a:srgbClr val="CCCCCC"/>
+                </a:solidFill>
+                <a:highlight>
+                  <a:srgbClr val="181818"/>
+                </a:highlight>
+              </a:rPr>
+              <a:t>XML で、子リンクの </a:t>
+            </a:r>
+            <a:r>
+              <a:rPr lang="ja" sz="900">
+                <a:solidFill>
+                  <a:srgbClr val="D0D0D0"/>
+                </a:solidFill>
+                <a:highlight>
+                  <a:srgbClr val="3C3C3C"/>
+                </a:highlight>
+                <a:latin typeface="Courier New"/>
+                <a:ea typeface="Courier New"/>
+                <a:cs typeface="Courier New"/>
+                <a:sym typeface="Courier New"/>
+              </a:rPr>
+              <a:t>&lt;body&gt;</a:t>
+            </a:r>
+            <a:r>
+              <a:rPr lang="ja" sz="1000">
+                <a:solidFill>
+                  <a:srgbClr val="CCCCCC"/>
+                </a:solidFill>
+                <a:highlight>
+                  <a:srgbClr val="181818"/>
+                </a:highlight>
+              </a:rPr>
+              <a:t> を親リンクの </a:t>
+            </a:r>
+            <a:r>
+              <a:rPr lang="ja" sz="900">
+                <a:solidFill>
+                  <a:srgbClr val="D0D0D0"/>
+                </a:solidFill>
+                <a:highlight>
+                  <a:srgbClr val="3C3C3C"/>
+                </a:highlight>
+                <a:latin typeface="Courier New"/>
+                <a:ea typeface="Courier New"/>
+                <a:cs typeface="Courier New"/>
+                <a:sym typeface="Courier New"/>
+              </a:rPr>
+              <a:t>&lt;body&gt;</a:t>
+            </a:r>
+            <a:r>
+              <a:rPr lang="ja" sz="1000">
+                <a:solidFill>
+                  <a:srgbClr val="CCCCCC"/>
+                </a:solidFill>
+                <a:highlight>
+                  <a:srgbClr val="181818"/>
+                </a:highlight>
+              </a:rPr>
+              <a:t> の中に入れ子にします。そのうえで、子の位置 </a:t>
+            </a:r>
+            <a:r>
+              <a:rPr lang="ja" sz="900">
+                <a:solidFill>
+                  <a:srgbClr val="D0D0D0"/>
+                </a:solidFill>
+                <a:highlight>
+                  <a:srgbClr val="3C3C3C"/>
+                </a:highlight>
+                <a:latin typeface="Courier New"/>
+                <a:ea typeface="Courier New"/>
+                <a:cs typeface="Courier New"/>
+                <a:sym typeface="Courier New"/>
+              </a:rPr>
+              <a:t>pos</a:t>
+            </a:r>
+            <a:r>
+              <a:rPr lang="ja" sz="1000">
+                <a:solidFill>
+                  <a:srgbClr val="CCCCCC"/>
+                </a:solidFill>
+                <a:highlight>
+                  <a:srgbClr val="181818"/>
+                </a:highlight>
+              </a:rPr>
+              <a:t> を「親の骨の長さ」（例 </a:t>
+            </a:r>
+            <a:r>
+              <a:rPr lang="ja" sz="900">
+                <a:solidFill>
+                  <a:srgbClr val="D0D0D0"/>
+                </a:solidFill>
+                <a:highlight>
+                  <a:srgbClr val="3C3C3C"/>
+                </a:highlight>
+                <a:latin typeface="Courier New"/>
+                <a:ea typeface="Courier New"/>
+                <a:cs typeface="Courier New"/>
+                <a:sym typeface="Courier New"/>
+              </a:rPr>
+              <a:t>0 0 0.2195</a:t>
+            </a:r>
+            <a:r>
+              <a:rPr lang="ja" sz="1000">
+                <a:solidFill>
+                  <a:srgbClr val="CCCCCC"/>
+                </a:solidFill>
+                <a:highlight>
+                  <a:srgbClr val="181818"/>
+                </a:highlight>
+              </a:rPr>
+              <a:t>）にします。</a:t>
+            </a:r>
+            <a:endParaRPr sz="1000">
+              <a:solidFill>
+                <a:srgbClr val="CCCCCC"/>
+              </a:solidFill>
+              <a:highlight>
+                <a:srgbClr val="181818"/>
+              </a:highlight>
+            </a:endParaRPr>
+          </a:p>
+          <a:p>
+            <a:pPr indent="-292100" lvl="0" marL="457200" rtl="0" algn="l">
+              <a:lnSpc>
+                <a:spcPct val="115000"/>
+              </a:lnSpc>
+              <a:spcBef>
+                <a:spcPts val="0"/>
+              </a:spcBef>
+              <a:spcAft>
+                <a:spcPts val="0"/>
+              </a:spcAft>
+              <a:buClr>
+                <a:srgbClr val="CCCCCC"/>
+              </a:buClr>
+              <a:buSzPts val="1000"/>
+              <a:buChar char="●"/>
+            </a:pPr>
+            <a:r>
+              <a:rPr lang="ja" sz="1000">
+                <a:solidFill>
+                  <a:srgbClr val="CCCCCC"/>
+                </a:solidFill>
+                <a:highlight>
+                  <a:srgbClr val="181818"/>
+                </a:highlight>
+              </a:rPr>
+              <a:t>子の関節は子の原点にあるので、結果として関節が親の先端に来ます（図 </a:t>
+            </a:r>
+            <a:r>
+              <a:rPr lang="ja" sz="900">
+                <a:solidFill>
+                  <a:srgbClr val="D0D0D0"/>
+                </a:solidFill>
+                <a:highlight>
+                  <a:srgbClr val="3C3C3C"/>
+                </a:highlight>
+                <a:latin typeface="Courier New"/>
+                <a:ea typeface="Courier New"/>
+                <a:cs typeface="Courier New"/>
+                <a:sym typeface="Courier New"/>
+              </a:rPr>
+              <a:t>pipeline_m5.png</a:t>
+            </a:r>
+            <a:r>
+              <a:rPr lang="ja" sz="1000">
+                <a:solidFill>
+                  <a:srgbClr val="CCCCCC"/>
+                </a:solidFill>
+                <a:highlight>
+                  <a:srgbClr val="181818"/>
+                </a:highlight>
+              </a:rPr>
+              <a:t> の右側）。</a:t>
+            </a:r>
+            <a:endParaRPr sz="1000">
+              <a:solidFill>
+                <a:srgbClr val="CCCCCC"/>
+              </a:solidFill>
+              <a:highlight>
+                <a:srgbClr val="181818"/>
+              </a:highlight>
+            </a:endParaRPr>
+          </a:p>
+          <a:p>
+            <a:pPr indent="-292100" lvl="0" marL="457200" rtl="0" algn="l">
+              <a:lnSpc>
+                <a:spcPct val="115000"/>
+              </a:lnSpc>
+              <a:spcBef>
+                <a:spcPts val="0"/>
+              </a:spcBef>
+              <a:spcAft>
+                <a:spcPts val="0"/>
+              </a:spcAft>
+              <a:buClr>
+                <a:srgbClr val="CCCCCC"/>
+              </a:buClr>
+              <a:buSzPts val="1000"/>
+              <a:buChar char="●"/>
+            </a:pPr>
+            <a:r>
+              <a:rPr lang="ja" sz="1000">
+                <a:solidFill>
+                  <a:srgbClr val="CCCCCC"/>
+                </a:solidFill>
+                <a:highlight>
+                  <a:srgbClr val="181818"/>
+                </a:highlight>
+              </a:rPr>
+              <a:t>初期姿勢はまっすぐ縦に積んだ形です。描いた角度は持ち込まず、長さと太さだけを使います。</a:t>
+            </a:r>
+            <a:endParaRPr sz="1000">
+              <a:solidFill>
+                <a:srgbClr val="CCCCCC"/>
+              </a:solidFill>
+              <a:highlight>
+                <a:srgbClr val="181818"/>
+              </a:highlight>
+            </a:endParaRPr>
+          </a:p>
+          <a:p>
             <a:pPr indent="0" lvl="0" marL="0" rtl="0" algn="l">
               <a:spcBef>
-                <a:spcPts val="0"/>
+                <a:spcPts val="1000"/>
               </a:spcBef>
               <a:spcAft>
                 <a:spcPts val="0"/>
@@ -2134,7 +2968,7 @@
   <p:cSld>
     <p:spTree>
       <p:nvGrpSpPr>
-        <p:cNvPr id="176" name="Shape 176"/>
+        <p:cNvPr id="187" name="Shape 187"/>
         <p:cNvGrpSpPr/>
         <p:nvPr/>
       </p:nvGrpSpPr>
@@ -2148,7 +2982,7 @@
       </p:grpSpPr>
       <p:sp>
         <p:nvSpPr>
-          <p:cNvPr id="177" name="Google Shape;177;h411edbbbcdea00d4_0_132:notes"/>
+          <p:cNvPr id="188" name="Google Shape;188;h411edbbbcdea00d4_0_200:notes"/>
           <p:cNvSpPr/>
           <p:nvPr>
             <p:ph idx="2" type="sldImg"/>
@@ -2183,7 +3017,7 @@
       </p:sp>
       <p:sp>
         <p:nvSpPr>
-          <p:cNvPr id="178" name="Google Shape;178;h411edbbbcdea00d4_0_132:notes"/>
+          <p:cNvPr id="189" name="Google Shape;189;h411edbbbcdea00d4_0_200:notes"/>
           <p:cNvSpPr txBox="1"/>
           <p:nvPr>
             <p:ph idx="1" type="body"/>
@@ -2214,19 +3048,8 @@
               <a:buNone/>
             </a:pPr>
             <a:r>
-              <a:rPr lang="ja"/>
-              <a:t>切り上げ、余裕なしって何？</a:t>
-            </a:r>
-            <a:br>
-              <a:rPr lang="ja"/>
-            </a:br>
-            <a:r>
-              <a:rPr lang="ja"/>
-              <a:t>なんで張り付いていたら(探索範囲の上限と下限にいたら　)だめなんだっけ？</a:t>
-            </a:r>
-            <a:br>
-              <a:rPr lang="ja"/>
-            </a:br>
+              <a:t/>
+            </a:r>
             <a:endParaRPr/>
           </a:p>
         </p:txBody>
@@ -2244,7 +3067,7 @@
   <p:cSld>
     <p:spTree>
       <p:nvGrpSpPr>
-        <p:cNvPr id="182" name="Shape 182"/>
+        <p:cNvPr id="194" name="Shape 194"/>
         <p:cNvGrpSpPr/>
         <p:nvPr/>
       </p:nvGrpSpPr>
@@ -2258,7 +3081,7 @@
       </p:grpSpPr>
       <p:sp>
         <p:nvSpPr>
-          <p:cNvPr id="183" name="Google Shape;183;h411edbbbcdea00d4_0_138:notes"/>
+          <p:cNvPr id="195" name="Google Shape;195;h411edbbbcdea00d4_0_102:notes"/>
           <p:cNvSpPr/>
           <p:nvPr>
             <p:ph idx="2" type="sldImg"/>
@@ -2293,7 +3116,7 @@
       </p:sp>
       <p:sp>
         <p:nvSpPr>
-          <p:cNvPr id="184" name="Google Shape;184;h411edbbbcdea00d4_0_138:notes"/>
+          <p:cNvPr id="196" name="Google Shape;196;h411edbbbcdea00d4_0_102:notes"/>
           <p:cNvSpPr txBox="1"/>
           <p:nvPr>
             <p:ph idx="1" type="body"/>
@@ -2325,7 +3148,88 @@
             </a:pPr>
             <a:r>
               <a:rPr lang="ja"/>
-              <a:t>これらって検証ってよりは実験でわかった傾向じゃない？</a:t>
+              <a:t>なんか確認したことに当たり前だよねみたいな話もあるし、でも当たり前ができているかも確認するのが検証だし...</a:t>
+            </a:r>
+            <a:br>
+              <a:rPr lang="ja"/>
+            </a:br>
+            <a:r>
+              <a:rPr lang="ja"/>
+              <a:t>あと、「</a:t>
+            </a:r>
+            <a:r>
+              <a:rPr lang="ja" sz="1000">
+                <a:solidFill>
+                  <a:srgbClr val="CCCCCC"/>
+                </a:solidFill>
+                <a:highlight>
+                  <a:srgbClr val="181818"/>
+                </a:highlight>
+              </a:rPr>
+              <a:t>表示用モデルと物理モデルのずれを無くした」とかも、デモを再生するために〜の部分が抜けているせいで「？」って感じだから説明の粒度を揃えたいね</a:t>
+            </a:r>
+            <a:br>
+              <a:rPr lang="ja" sz="1000">
+                <a:solidFill>
+                  <a:srgbClr val="CCCCCC"/>
+                </a:solidFill>
+                <a:highlight>
+                  <a:srgbClr val="181818"/>
+                </a:highlight>
+              </a:rPr>
+            </a:br>
+            <a:r>
+              <a:rPr lang="ja" sz="1000">
+                <a:solidFill>
+                  <a:srgbClr val="CCCCCC"/>
+                </a:solidFill>
+                <a:highlight>
+                  <a:srgbClr val="181818"/>
+                </a:highlight>
+              </a:rPr>
+              <a:t>①基本機能の検証</a:t>
+            </a:r>
+            <a:br>
+              <a:rPr lang="ja" sz="1000">
+                <a:solidFill>
+                  <a:srgbClr val="CCCCCC"/>
+                </a:solidFill>
+                <a:highlight>
+                  <a:srgbClr val="181818"/>
+                </a:highlight>
+              </a:rPr>
+            </a:br>
+            <a:r>
+              <a:rPr lang="ja" sz="1000">
+                <a:solidFill>
+                  <a:srgbClr val="CCCCCC"/>
+                </a:solidFill>
+                <a:highlight>
+                  <a:srgbClr val="181818"/>
+                </a:highlight>
+              </a:rPr>
+              <a:t>②実装した発展機能の検証</a:t>
+            </a:r>
+            <a:br>
+              <a:rPr lang="ja" sz="1000">
+                <a:solidFill>
+                  <a:srgbClr val="CCCCCC"/>
+                </a:solidFill>
+                <a:highlight>
+                  <a:srgbClr val="181818"/>
+                </a:highlight>
+              </a:rPr>
+            </a:br>
+            <a:r>
+              <a:rPr lang="ja" sz="1000">
+                <a:solidFill>
+                  <a:srgbClr val="CCCCCC"/>
+                </a:solidFill>
+                <a:highlight>
+                  <a:srgbClr val="181818"/>
+                </a:highlight>
+              </a:rPr>
+              <a:t>そんで論文に書くのはあくまで①だけとかね</a:t>
             </a:r>
             <a:endParaRPr/>
           </a:p>
@@ -2344,7 +3248,7 @@
   <p:cSld>
     <p:spTree>
       <p:nvGrpSpPr>
-        <p:cNvPr id="188" name="Shape 188"/>
+        <p:cNvPr id="200" name="Shape 200"/>
         <p:cNvGrpSpPr/>
         <p:nvPr/>
       </p:nvGrpSpPr>
@@ -2358,7 +3262,7 @@
       </p:grpSpPr>
       <p:sp>
         <p:nvSpPr>
-          <p:cNvPr id="189" name="Google Shape;189;h411edbbbcdea00d4_0_145:notes"/>
+          <p:cNvPr id="201" name="Google Shape;201;h411edbbbcdea00d4_0_108:notes"/>
           <p:cNvSpPr/>
           <p:nvPr>
             <p:ph idx="2" type="sldImg"/>
@@ -2393,7 +3297,7 @@
       </p:sp>
       <p:sp>
         <p:nvSpPr>
-          <p:cNvPr id="190" name="Google Shape;190;h411edbbbcdea00d4_0_145:notes"/>
+          <p:cNvPr id="202" name="Google Shape;202;h411edbbbcdea00d4_0_108:notes"/>
           <p:cNvSpPr txBox="1"/>
           <p:nvPr>
             <p:ph idx="1" type="body"/>
@@ -2424,7 +3328,8 @@
               <a:buNone/>
             </a:pPr>
             <a:r>
-              <a:t/>
+              <a:rPr lang="ja"/>
+              <a:t>方策と形は学習で掴むかけだからこの2つが(best.p)になるっていう認識であっている？</a:t>
             </a:r>
             <a:endParaRPr/>
           </a:p>
@@ -2443,7 +3348,7 @@
   <p:cSld>
     <p:spTree>
       <p:nvGrpSpPr>
-        <p:cNvPr id="195" name="Shape 195"/>
+        <p:cNvPr id="207" name="Shape 207"/>
         <p:cNvGrpSpPr/>
         <p:nvPr/>
       </p:nvGrpSpPr>
@@ -2457,7 +3362,7 @@
       </p:grpSpPr>
       <p:sp>
         <p:nvSpPr>
-          <p:cNvPr id="196" name="Google Shape;196;h411edbbbcdea00d4_0_151:notes"/>
+          <p:cNvPr id="208" name="Google Shape;208;h411edbbbcdea00d4_0_113:notes"/>
           <p:cNvSpPr/>
           <p:nvPr>
             <p:ph idx="2" type="sldImg"/>
@@ -2492,7 +3397,7 @@
       </p:sp>
       <p:sp>
         <p:nvSpPr>
-          <p:cNvPr id="197" name="Google Shape;197;h411edbbbcdea00d4_0_151:notes"/>
+          <p:cNvPr id="209" name="Google Shape;209;h411edbbbcdea00d4_0_113:notes"/>
           <p:cNvSpPr txBox="1"/>
           <p:nvPr>
             <p:ph idx="1" type="body"/>
@@ -2512,6 +3417,22 @@
             <a:noAutofit/>
           </a:bodyPr>
           <a:lstStyle/>
+          <a:p>
+            <a:pPr indent="0" lvl="0" marL="0" rtl="0" algn="l">
+              <a:spcBef>
+                <a:spcPts val="0"/>
+              </a:spcBef>
+              <a:spcAft>
+                <a:spcPts val="0"/>
+              </a:spcAft>
+              <a:buNone/>
+            </a:pPr>
+            <a:r>
+              <a:rPr lang="ja"/>
+              <a:t>前のスライドの出力の部分がコア（学習曲線）・学習後の形(XML?)・方策とかいてあるならフローの最後もそれらを示すべき。</a:t>
+            </a:r>
+            <a:endParaRPr/>
+          </a:p>
           <a:p>
             <a:pPr indent="0" lvl="0" marL="0" rtl="0" algn="l">
               <a:spcBef>
@@ -2542,7 +3463,7 @@
   <p:cSld>
     <p:spTree>
       <p:nvGrpSpPr>
-        <p:cNvPr id="202" name="Shape 202"/>
+        <p:cNvPr id="213" name="Shape 213"/>
         <p:cNvGrpSpPr/>
         <p:nvPr/>
       </p:nvGrpSpPr>
@@ -2556,7 +3477,7 @@
       </p:grpSpPr>
       <p:sp>
         <p:nvSpPr>
-          <p:cNvPr id="203" name="Google Shape;203;h411edbbbcdea00d4_0_157:notes"/>
+          <p:cNvPr id="214" name="Google Shape;214;h411edbbbcdea00d4_0_119:notes"/>
           <p:cNvSpPr/>
           <p:nvPr>
             <p:ph idx="2" type="sldImg"/>
@@ -2591,7 +3512,7 @@
       </p:sp>
       <p:sp>
         <p:nvSpPr>
-          <p:cNvPr id="204" name="Google Shape;204;h411edbbbcdea00d4_0_157:notes"/>
+          <p:cNvPr id="215" name="Google Shape;215;h411edbbbcdea00d4_0_119:notes"/>
           <p:cNvSpPr txBox="1"/>
           <p:nvPr>
             <p:ph idx="1" type="body"/>
@@ -2622,7 +3543,8 @@
               <a:buNone/>
             </a:pPr>
             <a:r>
-              <a:t/>
+              <a:rPr lang="ja"/>
+              <a:t>これらって検証ってよりは実験でわかった傾向じゃない？</a:t>
             </a:r>
             <a:endParaRPr/>
           </a:p>
@@ -2641,7 +3563,7 @@
   <p:cSld>
     <p:spTree>
       <p:nvGrpSpPr>
-        <p:cNvPr id="209" name="Shape 209"/>
+        <p:cNvPr id="219" name="Shape 219"/>
         <p:cNvGrpSpPr/>
         <p:nvPr/>
       </p:nvGrpSpPr>
@@ -2655,7 +3577,7 @@
       </p:grpSpPr>
       <p:sp>
         <p:nvSpPr>
-          <p:cNvPr id="210" name="Google Shape;210;h411edbbbcdea00d4_0_163:notes"/>
+          <p:cNvPr id="220" name="Google Shape;220;h411edbbbcdea00d4_0_125:notes"/>
           <p:cNvSpPr/>
           <p:nvPr>
             <p:ph idx="2" type="sldImg"/>
@@ -2690,7 +3612,366 @@
       </p:sp>
       <p:sp>
         <p:nvSpPr>
-          <p:cNvPr id="211" name="Google Shape;211;h411edbbbcdea00d4_0_163:notes"/>
+          <p:cNvPr id="221" name="Google Shape;221;h411edbbbcdea00d4_0_125:notes"/>
+          <p:cNvSpPr txBox="1"/>
+          <p:nvPr>
+            <p:ph idx="1" type="body"/>
+          </p:nvPr>
+        </p:nvSpPr>
+        <p:spPr>
+          <a:xfrm>
+            <a:off x="685800" y="4343400"/>
+            <a:ext cx="5486400" cy="4114800"/>
+          </a:xfrm>
+          <a:prstGeom prst="rect">
+            <a:avLst/>
+          </a:prstGeom>
+        </p:spPr>
+        <p:txBody>
+          <a:bodyPr anchorCtr="0" anchor="t" bIns="91425" lIns="91425" spcFirstLastPara="1" rIns="91425" wrap="square" tIns="91425">
+            <a:noAutofit/>
+          </a:bodyPr>
+          <a:lstStyle/>
+          <a:p>
+            <a:pPr indent="0" lvl="0" marL="0" rtl="0" algn="l">
+              <a:spcBef>
+                <a:spcPts val="0"/>
+              </a:spcBef>
+              <a:spcAft>
+                <a:spcPts val="0"/>
+              </a:spcAft>
+              <a:buNone/>
+            </a:pPr>
+            <a:r>
+              <a:t/>
+            </a:r>
+            <a:endParaRPr/>
+          </a:p>
+        </p:txBody>
+      </p:sp>
+    </p:spTree>
+  </p:cSld>
+  <p:clrMapOvr>
+    <a:masterClrMapping/>
+  </p:clrMapOvr>
+</p:notes>
+</file>
+
+<file path=ppt/notesSlides/notesSlide27.xml><?xml version="1.0" encoding="utf-8"?>
+<p:notes xmlns:a="http://schemas.openxmlformats.org/drawingml/2006/main" xmlns:r="http://schemas.openxmlformats.org/officeDocument/2006/relationships" xmlns:mc="http://schemas.openxmlformats.org/markup-compatibility/2006" xmlns:mv="urn:schemas-microsoft-com:mac:vml" xmlns:p="http://schemas.openxmlformats.org/presentationml/2006/main" xmlns:c="http://schemas.openxmlformats.org/drawingml/2006/chart" xmlns:dgm="http://schemas.openxmlformats.org/drawingml/2006/diagram" xmlns:o="urn:schemas-microsoft-com:office:office" xmlns:v="urn:schemas-microsoft-com:vml" xmlns:pvml="urn:schemas-microsoft-com:office:powerpoint" xmlns:com="http://schemas.openxmlformats.org/drawingml/2006/compatibility" xmlns:p14="http://schemas.microsoft.com/office/powerpoint/2010/main" xmlns:p15="http://schemas.microsoft.com/office/powerpoint/2012/main" xmlns:ahyp="http://schemas.microsoft.com/office/drawing/2018/hyperlinkcolor" showMasterPhAnim="0" showMasterSp="0">
+  <p:cSld>
+    <p:spTree>
+      <p:nvGrpSpPr>
+        <p:cNvPr id="225" name="Shape 225"/>
+        <p:cNvGrpSpPr/>
+        <p:nvPr/>
+      </p:nvGrpSpPr>
+      <p:grpSpPr>
+        <a:xfrm>
+          <a:off x="0" y="0"/>
+          <a:ext cx="0" cy="0"/>
+          <a:chOff x="0" y="0"/>
+          <a:chExt cx="0" cy="0"/>
+        </a:xfrm>
+      </p:grpSpPr>
+      <p:sp>
+        <p:nvSpPr>
+          <p:cNvPr id="226" name="Google Shape;226;h411edbbbcdea00d4_0_132:notes"/>
+          <p:cNvSpPr/>
+          <p:nvPr>
+            <p:ph idx="2" type="sldImg"/>
+          </p:nvPr>
+        </p:nvSpPr>
+        <p:spPr>
+          <a:xfrm>
+            <a:off x="381300" y="685800"/>
+            <a:ext cx="6096000" cy="3429000"/>
+          </a:xfrm>
+          <a:custGeom>
+            <a:rect b="b" l="l" r="r" t="t"/>
+            <a:pathLst>
+              <a:path extrusionOk="0" h="120000" w="120000">
+                <a:moveTo>
+                  <a:pt x="0" y="0"/>
+                </a:moveTo>
+                <a:lnTo>
+                  <a:pt x="120000" y="0"/>
+                </a:lnTo>
+                <a:lnTo>
+                  <a:pt x="120000" y="120000"/>
+                </a:lnTo>
+                <a:lnTo>
+                  <a:pt x="0" y="120000"/>
+                </a:lnTo>
+                <a:close/>
+              </a:path>
+            </a:pathLst>
+          </a:custGeom>
+        </p:spPr>
+      </p:sp>
+      <p:sp>
+        <p:nvSpPr>
+          <p:cNvPr id="227" name="Google Shape;227;h411edbbbcdea00d4_0_132:notes"/>
+          <p:cNvSpPr txBox="1"/>
+          <p:nvPr>
+            <p:ph idx="1" type="body"/>
+          </p:nvPr>
+        </p:nvSpPr>
+        <p:spPr>
+          <a:xfrm>
+            <a:off x="685800" y="4343400"/>
+            <a:ext cx="5486400" cy="4114800"/>
+          </a:xfrm>
+          <a:prstGeom prst="rect">
+            <a:avLst/>
+          </a:prstGeom>
+        </p:spPr>
+        <p:txBody>
+          <a:bodyPr anchorCtr="0" anchor="t" bIns="91425" lIns="91425" spcFirstLastPara="1" rIns="91425" wrap="square" tIns="91425">
+            <a:noAutofit/>
+          </a:bodyPr>
+          <a:lstStyle/>
+          <a:p>
+            <a:pPr indent="0" lvl="0" marL="0" rtl="0" algn="l">
+              <a:spcBef>
+                <a:spcPts val="0"/>
+              </a:spcBef>
+              <a:spcAft>
+                <a:spcPts val="0"/>
+              </a:spcAft>
+              <a:buNone/>
+            </a:pPr>
+            <a:r>
+              <a:rPr lang="ja"/>
+              <a:t>①切り上げ＝必要倍率が 1.9846 なら 1.99 と返す。（1.98 にすると 2 mm 足りず、助言どおり直しても再び棄却された背景があるため）</a:t>
+            </a:r>
+            <a:br>
+              <a:rPr lang="ja"/>
+            </a:br>
+            <a:r>
+              <a:rPr lang="ja"/>
+              <a:t>①余裕なし＝「念のため +10 %」を上乗せしません。余裕を足すほど到達精度が悪くなると測れたから</a:t>
+            </a:r>
+            <a:br>
+              <a:rPr lang="ja"/>
+            </a:br>
+            <a:r>
+              <a:rPr lang="ja"/>
+              <a:t>③の意味は「上限と下限にいるならそもそももっと良い形態と制御が探索空間の外にあるんじゃないか」という可能性があるため(reachはタスク上下限に張り付くのでその限りではない)</a:t>
+            </a:r>
+            <a:br>
+              <a:rPr lang="ja"/>
+            </a:br>
+            <a:endParaRPr/>
+          </a:p>
+        </p:txBody>
+      </p:sp>
+    </p:spTree>
+  </p:cSld>
+  <p:clrMapOvr>
+    <a:masterClrMapping/>
+  </p:clrMapOvr>
+</p:notes>
+</file>
+
+<file path=ppt/notesSlides/notesSlide28.xml><?xml version="1.0" encoding="utf-8"?>
+<p:notes xmlns:a="http://schemas.openxmlformats.org/drawingml/2006/main" xmlns:r="http://schemas.openxmlformats.org/officeDocument/2006/relationships" xmlns:mc="http://schemas.openxmlformats.org/markup-compatibility/2006" xmlns:mv="urn:schemas-microsoft-com:mac:vml" xmlns:p="http://schemas.openxmlformats.org/presentationml/2006/main" xmlns:c="http://schemas.openxmlformats.org/drawingml/2006/chart" xmlns:dgm="http://schemas.openxmlformats.org/drawingml/2006/diagram" xmlns:o="urn:schemas-microsoft-com:office:office" xmlns:v="urn:schemas-microsoft-com:vml" xmlns:pvml="urn:schemas-microsoft-com:office:powerpoint" xmlns:com="http://schemas.openxmlformats.org/drawingml/2006/compatibility" xmlns:p14="http://schemas.microsoft.com/office/powerpoint/2010/main" xmlns:p15="http://schemas.microsoft.com/office/powerpoint/2012/main" xmlns:ahyp="http://schemas.microsoft.com/office/drawing/2018/hyperlinkcolor" showMasterPhAnim="0" showMasterSp="0">
+  <p:cSld>
+    <p:spTree>
+      <p:nvGrpSpPr>
+        <p:cNvPr id="231" name="Shape 231"/>
+        <p:cNvGrpSpPr/>
+        <p:nvPr/>
+      </p:nvGrpSpPr>
+      <p:grpSpPr>
+        <a:xfrm>
+          <a:off x="0" y="0"/>
+          <a:ext cx="0" cy="0"/>
+          <a:chOff x="0" y="0"/>
+          <a:chExt cx="0" cy="0"/>
+        </a:xfrm>
+      </p:grpSpPr>
+      <p:sp>
+        <p:nvSpPr>
+          <p:cNvPr id="232" name="Google Shape;232;h411edbbbcdea00d4_0_138:notes"/>
+          <p:cNvSpPr/>
+          <p:nvPr>
+            <p:ph idx="2" type="sldImg"/>
+          </p:nvPr>
+        </p:nvSpPr>
+        <p:spPr>
+          <a:xfrm>
+            <a:off x="381300" y="685800"/>
+            <a:ext cx="6096000" cy="3429000"/>
+          </a:xfrm>
+          <a:custGeom>
+            <a:rect b="b" l="l" r="r" t="t"/>
+            <a:pathLst>
+              <a:path extrusionOk="0" h="120000" w="120000">
+                <a:moveTo>
+                  <a:pt x="0" y="0"/>
+                </a:moveTo>
+                <a:lnTo>
+                  <a:pt x="120000" y="0"/>
+                </a:lnTo>
+                <a:lnTo>
+                  <a:pt x="120000" y="120000"/>
+                </a:lnTo>
+                <a:lnTo>
+                  <a:pt x="0" y="120000"/>
+                </a:lnTo>
+                <a:close/>
+              </a:path>
+            </a:pathLst>
+          </a:custGeom>
+        </p:spPr>
+      </p:sp>
+      <p:sp>
+        <p:nvSpPr>
+          <p:cNvPr id="233" name="Google Shape;233;h411edbbbcdea00d4_0_138:notes"/>
+          <p:cNvSpPr txBox="1"/>
+          <p:nvPr>
+            <p:ph idx="1" type="body"/>
+          </p:nvPr>
+        </p:nvSpPr>
+        <p:spPr>
+          <a:xfrm>
+            <a:off x="685800" y="4343400"/>
+            <a:ext cx="5486400" cy="4114800"/>
+          </a:xfrm>
+          <a:prstGeom prst="rect">
+            <a:avLst/>
+          </a:prstGeom>
+        </p:spPr>
+        <p:txBody>
+          <a:bodyPr anchorCtr="0" anchor="t" bIns="91425" lIns="91425" spcFirstLastPara="1" rIns="91425" wrap="square" tIns="91425">
+            <a:noAutofit/>
+          </a:bodyPr>
+          <a:lstStyle/>
+          <a:p>
+            <a:pPr indent="0" lvl="0" marL="0" rtl="0" algn="l">
+              <a:spcBef>
+                <a:spcPts val="0"/>
+              </a:spcBef>
+              <a:spcAft>
+                <a:spcPts val="0"/>
+              </a:spcAft>
+              <a:buNone/>
+            </a:pPr>
+            <a:r>
+              <a:rPr lang="ja"/>
+              <a:t>提案された倍率に対して、余裕を(+5%,+10%)もたせるとどうなるか⇒性能が悪化したので余裕は持たせない、という実験はまじでやりたいことの道の小石を取るような実験なのであえて書かない。</a:t>
+            </a:r>
+            <a:br>
+              <a:rPr lang="ja"/>
+            </a:br>
+            <a:r>
+              <a:rPr lang="ja" sz="1000">
+                <a:solidFill>
+                  <a:srgbClr val="CCCCCC"/>
+                </a:solidFill>
+                <a:highlight>
+                  <a:srgbClr val="181818"/>
+                </a:highlight>
+              </a:rPr>
+              <a:t>報酬の値と距離が混ざらないように→スライドの指摘に報酬とタスクの結果である距離を一緒にしないようにとあるが、違うの？</a:t>
+            </a:r>
+            <a:endParaRPr sz="1000">
+              <a:solidFill>
+                <a:srgbClr val="CCCCCC"/>
+              </a:solidFill>
+              <a:highlight>
+                <a:srgbClr val="181818"/>
+              </a:highlight>
+            </a:endParaRPr>
+          </a:p>
+          <a:p>
+            <a:pPr indent="0" lvl="0" marL="0" rtl="0" algn="l">
+              <a:spcBef>
+                <a:spcPts val="0"/>
+              </a:spcBef>
+              <a:spcAft>
+                <a:spcPts val="0"/>
+              </a:spcAft>
+              <a:buNone/>
+            </a:pPr>
+            <a:r>
+              <a:t/>
+            </a:r>
+            <a:endParaRPr sz="1000">
+              <a:solidFill>
+                <a:srgbClr val="CCCCCC"/>
+              </a:solidFill>
+              <a:highlight>
+                <a:srgbClr val="181818"/>
+              </a:highlight>
+            </a:endParaRPr>
+          </a:p>
+        </p:txBody>
+      </p:sp>
+    </p:spTree>
+  </p:cSld>
+  <p:clrMapOvr>
+    <a:masterClrMapping/>
+  </p:clrMapOvr>
+</p:notes>
+</file>
+
+<file path=ppt/notesSlides/notesSlide29.xml><?xml version="1.0" encoding="utf-8"?>
+<p:notes xmlns:a="http://schemas.openxmlformats.org/drawingml/2006/main" xmlns:r="http://schemas.openxmlformats.org/officeDocument/2006/relationships" xmlns:mc="http://schemas.openxmlformats.org/markup-compatibility/2006" xmlns:mv="urn:schemas-microsoft-com:mac:vml" xmlns:p="http://schemas.openxmlformats.org/presentationml/2006/main" xmlns:c="http://schemas.openxmlformats.org/drawingml/2006/chart" xmlns:dgm="http://schemas.openxmlformats.org/drawingml/2006/diagram" xmlns:o="urn:schemas-microsoft-com:office:office" xmlns:v="urn:schemas-microsoft-com:vml" xmlns:pvml="urn:schemas-microsoft-com:office:powerpoint" xmlns:com="http://schemas.openxmlformats.org/drawingml/2006/compatibility" xmlns:p14="http://schemas.microsoft.com/office/powerpoint/2010/main" xmlns:p15="http://schemas.microsoft.com/office/powerpoint/2012/main" xmlns:ahyp="http://schemas.microsoft.com/office/drawing/2018/hyperlinkcolor" showMasterPhAnim="0" showMasterSp="0">
+  <p:cSld>
+    <p:spTree>
+      <p:nvGrpSpPr>
+        <p:cNvPr id="238" name="Shape 238"/>
+        <p:cNvGrpSpPr/>
+        <p:nvPr/>
+      </p:nvGrpSpPr>
+      <p:grpSpPr>
+        <a:xfrm>
+          <a:off x="0" y="0"/>
+          <a:ext cx="0" cy="0"/>
+          <a:chOff x="0" y="0"/>
+          <a:chExt cx="0" cy="0"/>
+        </a:xfrm>
+      </p:grpSpPr>
+      <p:sp>
+        <p:nvSpPr>
+          <p:cNvPr id="239" name="Google Shape;239;h411edbbbcdea00d4_0_145:notes"/>
+          <p:cNvSpPr/>
+          <p:nvPr>
+            <p:ph idx="2" type="sldImg"/>
+          </p:nvPr>
+        </p:nvSpPr>
+        <p:spPr>
+          <a:xfrm>
+            <a:off x="381300" y="685800"/>
+            <a:ext cx="6096000" cy="3429000"/>
+          </a:xfrm>
+          <a:custGeom>
+            <a:rect b="b" l="l" r="r" t="t"/>
+            <a:pathLst>
+              <a:path extrusionOk="0" h="120000" w="120000">
+                <a:moveTo>
+                  <a:pt x="0" y="0"/>
+                </a:moveTo>
+                <a:lnTo>
+                  <a:pt x="120000" y="0"/>
+                </a:lnTo>
+                <a:lnTo>
+                  <a:pt x="120000" y="120000"/>
+                </a:lnTo>
+                <a:lnTo>
+                  <a:pt x="0" y="120000"/>
+                </a:lnTo>
+                <a:close/>
+              </a:path>
+            </a:pathLst>
+          </a:custGeom>
+        </p:spPr>
+      </p:sp>
+      <p:sp>
+        <p:nvSpPr>
+          <p:cNvPr id="240" name="Google Shape;240;h411edbbbcdea00d4_0_145:notes"/>
           <p:cNvSpPr txBox="1"/>
           <p:nvPr>
             <p:ph idx="1" type="body"/>
@@ -2754,7 +4035,7 @@
       </p:grpSpPr>
       <p:sp>
         <p:nvSpPr>
-          <p:cNvPr id="64" name="Google Shape;64;h411edbbbcdea00d4_0_5:notes"/>
+          <p:cNvPr id="64" name="Google Shape;64;h678fe0b7a829e5b7_0_22:notes"/>
           <p:cNvSpPr/>
           <p:nvPr>
             <p:ph idx="2" type="sldImg"/>
@@ -2789,7 +4070,305 @@
       </p:sp>
       <p:sp>
         <p:nvSpPr>
-          <p:cNvPr id="65" name="Google Shape;65;h411edbbbcdea00d4_0_5:notes"/>
+          <p:cNvPr id="65" name="Google Shape;65;h678fe0b7a829e5b7_0_22:notes"/>
+          <p:cNvSpPr txBox="1"/>
+          <p:nvPr>
+            <p:ph idx="1" type="body"/>
+          </p:nvPr>
+        </p:nvSpPr>
+        <p:spPr>
+          <a:xfrm>
+            <a:off x="685800" y="4343400"/>
+            <a:ext cx="5486400" cy="4114800"/>
+          </a:xfrm>
+          <a:prstGeom prst="rect">
+            <a:avLst/>
+          </a:prstGeom>
+        </p:spPr>
+        <p:txBody>
+          <a:bodyPr anchorCtr="0" anchor="t" bIns="91425" lIns="91425" spcFirstLastPara="1" rIns="91425" wrap="square" tIns="91425">
+            <a:noAutofit/>
+          </a:bodyPr>
+          <a:lstStyle/>
+          <a:p>
+            <a:pPr indent="0" lvl="0" marL="0" rtl="0" algn="l">
+              <a:spcBef>
+                <a:spcPts val="0"/>
+              </a:spcBef>
+              <a:spcAft>
+                <a:spcPts val="0"/>
+              </a:spcAft>
+              <a:buNone/>
+            </a:pPr>
+            <a:r>
+              <a:rPr lang="ja"/>
+              <a:t>フェーズごとに灰色の大枠を分けたい感はあるよね</a:t>
+            </a:r>
+            <a:endParaRPr/>
+          </a:p>
+        </p:txBody>
+      </p:sp>
+    </p:spTree>
+  </p:cSld>
+  <p:clrMapOvr>
+    <a:masterClrMapping/>
+  </p:clrMapOvr>
+</p:notes>
+</file>
+
+<file path=ppt/notesSlides/notesSlide30.xml><?xml version="1.0" encoding="utf-8"?>
+<p:notes xmlns:a="http://schemas.openxmlformats.org/drawingml/2006/main" xmlns:r="http://schemas.openxmlformats.org/officeDocument/2006/relationships" xmlns:mc="http://schemas.openxmlformats.org/markup-compatibility/2006" xmlns:mv="urn:schemas-microsoft-com:mac:vml" xmlns:p="http://schemas.openxmlformats.org/presentationml/2006/main" xmlns:c="http://schemas.openxmlformats.org/drawingml/2006/chart" xmlns:dgm="http://schemas.openxmlformats.org/drawingml/2006/diagram" xmlns:o="urn:schemas-microsoft-com:office:office" xmlns:v="urn:schemas-microsoft-com:vml" xmlns:pvml="urn:schemas-microsoft-com:office:powerpoint" xmlns:com="http://schemas.openxmlformats.org/drawingml/2006/compatibility" xmlns:p14="http://schemas.microsoft.com/office/powerpoint/2010/main" xmlns:p15="http://schemas.microsoft.com/office/powerpoint/2012/main" xmlns:ahyp="http://schemas.microsoft.com/office/drawing/2018/hyperlinkcolor" showMasterPhAnim="0" showMasterSp="0">
+  <p:cSld>
+    <p:spTree>
+      <p:nvGrpSpPr>
+        <p:cNvPr id="245" name="Shape 245"/>
+        <p:cNvGrpSpPr/>
+        <p:nvPr/>
+      </p:nvGrpSpPr>
+      <p:grpSpPr>
+        <a:xfrm>
+          <a:off x="0" y="0"/>
+          <a:ext cx="0" cy="0"/>
+          <a:chOff x="0" y="0"/>
+          <a:chExt cx="0" cy="0"/>
+        </a:xfrm>
+      </p:grpSpPr>
+      <p:sp>
+        <p:nvSpPr>
+          <p:cNvPr id="246" name="Google Shape;246;h411edbbbcdea00d4_0_151:notes"/>
+          <p:cNvSpPr/>
+          <p:nvPr>
+            <p:ph idx="2" type="sldImg"/>
+          </p:nvPr>
+        </p:nvSpPr>
+        <p:spPr>
+          <a:xfrm>
+            <a:off x="381300" y="685800"/>
+            <a:ext cx="6096000" cy="3429000"/>
+          </a:xfrm>
+          <a:custGeom>
+            <a:rect b="b" l="l" r="r" t="t"/>
+            <a:pathLst>
+              <a:path extrusionOk="0" h="120000" w="120000">
+                <a:moveTo>
+                  <a:pt x="0" y="0"/>
+                </a:moveTo>
+                <a:lnTo>
+                  <a:pt x="120000" y="0"/>
+                </a:lnTo>
+                <a:lnTo>
+                  <a:pt x="120000" y="120000"/>
+                </a:lnTo>
+                <a:lnTo>
+                  <a:pt x="0" y="120000"/>
+                </a:lnTo>
+                <a:close/>
+              </a:path>
+            </a:pathLst>
+          </a:custGeom>
+        </p:spPr>
+      </p:sp>
+      <p:sp>
+        <p:nvSpPr>
+          <p:cNvPr id="247" name="Google Shape;247;h411edbbbcdea00d4_0_151:notes"/>
+          <p:cNvSpPr txBox="1"/>
+          <p:nvPr>
+            <p:ph idx="1" type="body"/>
+          </p:nvPr>
+        </p:nvSpPr>
+        <p:spPr>
+          <a:xfrm>
+            <a:off x="685800" y="4343400"/>
+            <a:ext cx="5486400" cy="4114800"/>
+          </a:xfrm>
+          <a:prstGeom prst="rect">
+            <a:avLst/>
+          </a:prstGeom>
+        </p:spPr>
+        <p:txBody>
+          <a:bodyPr anchorCtr="0" anchor="t" bIns="91425" lIns="91425" spcFirstLastPara="1" rIns="91425" wrap="square" tIns="91425">
+            <a:noAutofit/>
+          </a:bodyPr>
+          <a:lstStyle/>
+          <a:p>
+            <a:pPr indent="0" lvl="0" marL="0" rtl="0" algn="l">
+              <a:spcBef>
+                <a:spcPts val="0"/>
+              </a:spcBef>
+              <a:spcAft>
+                <a:spcPts val="0"/>
+              </a:spcAft>
+              <a:buNone/>
+            </a:pPr>
+            <a:r>
+              <a:t/>
+            </a:r>
+            <a:endParaRPr/>
+          </a:p>
+        </p:txBody>
+      </p:sp>
+    </p:spTree>
+  </p:cSld>
+  <p:clrMapOvr>
+    <a:masterClrMapping/>
+  </p:clrMapOvr>
+</p:notes>
+</file>
+
+<file path=ppt/notesSlides/notesSlide31.xml><?xml version="1.0" encoding="utf-8"?>
+<p:notes xmlns:a="http://schemas.openxmlformats.org/drawingml/2006/main" xmlns:r="http://schemas.openxmlformats.org/officeDocument/2006/relationships" xmlns:mc="http://schemas.openxmlformats.org/markup-compatibility/2006" xmlns:mv="urn:schemas-microsoft-com:mac:vml" xmlns:p="http://schemas.openxmlformats.org/presentationml/2006/main" xmlns:c="http://schemas.openxmlformats.org/drawingml/2006/chart" xmlns:dgm="http://schemas.openxmlformats.org/drawingml/2006/diagram" xmlns:o="urn:schemas-microsoft-com:office:office" xmlns:v="urn:schemas-microsoft-com:vml" xmlns:pvml="urn:schemas-microsoft-com:office:powerpoint" xmlns:com="http://schemas.openxmlformats.org/drawingml/2006/compatibility" xmlns:p14="http://schemas.microsoft.com/office/powerpoint/2010/main" xmlns:p15="http://schemas.microsoft.com/office/powerpoint/2012/main" xmlns:ahyp="http://schemas.microsoft.com/office/drawing/2018/hyperlinkcolor" showMasterPhAnim="0" showMasterSp="0">
+  <p:cSld>
+    <p:spTree>
+      <p:nvGrpSpPr>
+        <p:cNvPr id="252" name="Shape 252"/>
+        <p:cNvGrpSpPr/>
+        <p:nvPr/>
+      </p:nvGrpSpPr>
+      <p:grpSpPr>
+        <a:xfrm>
+          <a:off x="0" y="0"/>
+          <a:ext cx="0" cy="0"/>
+          <a:chOff x="0" y="0"/>
+          <a:chExt cx="0" cy="0"/>
+        </a:xfrm>
+      </p:grpSpPr>
+      <p:sp>
+        <p:nvSpPr>
+          <p:cNvPr id="253" name="Google Shape;253;h411edbbbcdea00d4_0_157:notes"/>
+          <p:cNvSpPr/>
+          <p:nvPr>
+            <p:ph idx="2" type="sldImg"/>
+          </p:nvPr>
+        </p:nvSpPr>
+        <p:spPr>
+          <a:xfrm>
+            <a:off x="381300" y="685800"/>
+            <a:ext cx="6096000" cy="3429000"/>
+          </a:xfrm>
+          <a:custGeom>
+            <a:rect b="b" l="l" r="r" t="t"/>
+            <a:pathLst>
+              <a:path extrusionOk="0" h="120000" w="120000">
+                <a:moveTo>
+                  <a:pt x="0" y="0"/>
+                </a:moveTo>
+                <a:lnTo>
+                  <a:pt x="120000" y="0"/>
+                </a:lnTo>
+                <a:lnTo>
+                  <a:pt x="120000" y="120000"/>
+                </a:lnTo>
+                <a:lnTo>
+                  <a:pt x="0" y="120000"/>
+                </a:lnTo>
+                <a:close/>
+              </a:path>
+            </a:pathLst>
+          </a:custGeom>
+        </p:spPr>
+      </p:sp>
+      <p:sp>
+        <p:nvSpPr>
+          <p:cNvPr id="254" name="Google Shape;254;h411edbbbcdea00d4_0_157:notes"/>
+          <p:cNvSpPr txBox="1"/>
+          <p:nvPr>
+            <p:ph idx="1" type="body"/>
+          </p:nvPr>
+        </p:nvSpPr>
+        <p:spPr>
+          <a:xfrm>
+            <a:off x="685800" y="4343400"/>
+            <a:ext cx="5486400" cy="4114800"/>
+          </a:xfrm>
+          <a:prstGeom prst="rect">
+            <a:avLst/>
+          </a:prstGeom>
+        </p:spPr>
+        <p:txBody>
+          <a:bodyPr anchorCtr="0" anchor="t" bIns="91425" lIns="91425" spcFirstLastPara="1" rIns="91425" wrap="square" tIns="91425">
+            <a:noAutofit/>
+          </a:bodyPr>
+          <a:lstStyle/>
+          <a:p>
+            <a:pPr indent="0" lvl="0" marL="0" rtl="0" algn="l">
+              <a:spcBef>
+                <a:spcPts val="0"/>
+              </a:spcBef>
+              <a:spcAft>
+                <a:spcPts val="0"/>
+              </a:spcAft>
+              <a:buNone/>
+            </a:pPr>
+            <a:r>
+              <a:t/>
+            </a:r>
+            <a:endParaRPr/>
+          </a:p>
+        </p:txBody>
+      </p:sp>
+    </p:spTree>
+  </p:cSld>
+  <p:clrMapOvr>
+    <a:masterClrMapping/>
+  </p:clrMapOvr>
+</p:notes>
+</file>
+
+<file path=ppt/notesSlides/notesSlide32.xml><?xml version="1.0" encoding="utf-8"?>
+<p:notes xmlns:a="http://schemas.openxmlformats.org/drawingml/2006/main" xmlns:r="http://schemas.openxmlformats.org/officeDocument/2006/relationships" xmlns:mc="http://schemas.openxmlformats.org/markup-compatibility/2006" xmlns:mv="urn:schemas-microsoft-com:mac:vml" xmlns:p="http://schemas.openxmlformats.org/presentationml/2006/main" xmlns:c="http://schemas.openxmlformats.org/drawingml/2006/chart" xmlns:dgm="http://schemas.openxmlformats.org/drawingml/2006/diagram" xmlns:o="urn:schemas-microsoft-com:office:office" xmlns:v="urn:schemas-microsoft-com:vml" xmlns:pvml="urn:schemas-microsoft-com:office:powerpoint" xmlns:com="http://schemas.openxmlformats.org/drawingml/2006/compatibility" xmlns:p14="http://schemas.microsoft.com/office/powerpoint/2010/main" xmlns:p15="http://schemas.microsoft.com/office/powerpoint/2012/main" xmlns:ahyp="http://schemas.microsoft.com/office/drawing/2018/hyperlinkcolor" showMasterPhAnim="0" showMasterSp="0">
+  <p:cSld>
+    <p:spTree>
+      <p:nvGrpSpPr>
+        <p:cNvPr id="259" name="Shape 259"/>
+        <p:cNvGrpSpPr/>
+        <p:nvPr/>
+      </p:nvGrpSpPr>
+      <p:grpSpPr>
+        <a:xfrm>
+          <a:off x="0" y="0"/>
+          <a:ext cx="0" cy="0"/>
+          <a:chOff x="0" y="0"/>
+          <a:chExt cx="0" cy="0"/>
+        </a:xfrm>
+      </p:grpSpPr>
+      <p:sp>
+        <p:nvSpPr>
+          <p:cNvPr id="260" name="Google Shape;260;h411edbbbcdea00d4_0_163:notes"/>
+          <p:cNvSpPr/>
+          <p:nvPr>
+            <p:ph idx="2" type="sldImg"/>
+          </p:nvPr>
+        </p:nvSpPr>
+        <p:spPr>
+          <a:xfrm>
+            <a:off x="381300" y="685800"/>
+            <a:ext cx="6096000" cy="3429000"/>
+          </a:xfrm>
+          <a:custGeom>
+            <a:rect b="b" l="l" r="r" t="t"/>
+            <a:pathLst>
+              <a:path extrusionOk="0" h="120000" w="120000">
+                <a:moveTo>
+                  <a:pt x="0" y="0"/>
+                </a:moveTo>
+                <a:lnTo>
+                  <a:pt x="120000" y="0"/>
+                </a:lnTo>
+                <a:lnTo>
+                  <a:pt x="120000" y="120000"/>
+                </a:lnTo>
+                <a:lnTo>
+                  <a:pt x="0" y="120000"/>
+                </a:lnTo>
+                <a:close/>
+              </a:path>
+            </a:pathLst>
+          </a:custGeom>
+        </p:spPr>
+      </p:sp>
+      <p:sp>
+        <p:nvSpPr>
+          <p:cNvPr id="261" name="Google Shape;261;h411edbbbcdea00d4_0_163:notes"/>
           <p:cNvSpPr txBox="1"/>
           <p:nvPr>
             <p:ph idx="1" type="body"/>
@@ -2853,7 +4432,7 @@
       </p:grpSpPr>
       <p:sp>
         <p:nvSpPr>
-          <p:cNvPr id="71" name="Google Shape;71;h411edbbbcdea00d4_0_10:notes"/>
+          <p:cNvPr id="71" name="Google Shape;71;h411edbbbcdea00d4_0_0:notes"/>
           <p:cNvSpPr/>
           <p:nvPr>
             <p:ph idx="2" type="sldImg"/>
@@ -2888,7 +4467,7 @@
       </p:sp>
       <p:sp>
         <p:nvSpPr>
-          <p:cNvPr id="72" name="Google Shape;72;h411edbbbcdea00d4_0_10:notes"/>
+          <p:cNvPr id="72" name="Google Shape;72;h411edbbbcdea00d4_0_0:notes"/>
           <p:cNvSpPr txBox="1"/>
           <p:nvPr>
             <p:ph idx="1" type="body"/>
@@ -2938,7 +4517,7 @@
   <p:cSld>
     <p:spTree>
       <p:nvGrpSpPr>
-        <p:cNvPr id="76" name="Shape 76"/>
+        <p:cNvPr id="77" name="Shape 77"/>
         <p:cNvGrpSpPr/>
         <p:nvPr/>
       </p:nvGrpSpPr>
@@ -2952,7 +4531,7 @@
       </p:grpSpPr>
       <p:sp>
         <p:nvSpPr>
-          <p:cNvPr id="77" name="Google Shape;77;h411edbbbcdea00d4_0_23:notes"/>
+          <p:cNvPr id="78" name="Google Shape;78;h411edbbbcdea00d4_0_5:notes"/>
           <p:cNvSpPr/>
           <p:nvPr>
             <p:ph idx="2" type="sldImg"/>
@@ -2987,7 +4566,7 @@
       </p:sp>
       <p:sp>
         <p:nvSpPr>
-          <p:cNvPr id="78" name="Google Shape;78;h411edbbbcdea00d4_0_23:notes"/>
+          <p:cNvPr id="79" name="Google Shape;79;h411edbbbcdea00d4_0_5:notes"/>
           <p:cNvSpPr txBox="1"/>
           <p:nvPr>
             <p:ph idx="1" type="body"/>
@@ -3018,246 +4597,8 @@
               <a:buNone/>
             </a:pPr>
             <a:r>
-              <a:rPr lang="ja"/>
-              <a:t>glb</a:t>
-            </a:r>
-            <a:r>
-              <a:rPr lang="ja"/>
-              <a:t>ファイルとは3D界隈のjpegぐらいの標準形式</a:t>
-            </a:r>
-            <a:br>
-              <a:rPr lang="ja"/>
-            </a:br>
-            <a:r>
-              <a:rPr lang="ja">
-                <a:solidFill>
-                  <a:schemeClr val="dk1"/>
-                </a:solidFill>
-              </a:rPr>
-              <a:t>STLファイルが「表面の三角形の座標だけ」を持っていたのに対し、GLBファイルは</a:t>
-            </a:r>
-            <a:r>
-              <a:rPr b="1" lang="ja">
-                <a:solidFill>
-                  <a:schemeClr val="dk1"/>
-                </a:solidFill>
-              </a:rPr>
-              <a:t>1つのファイルの中に3D表示に必要なすべての情報</a:t>
-            </a:r>
-            <a:r>
-              <a:rPr lang="ja">
-                <a:solidFill>
-                  <a:schemeClr val="dk1"/>
-                </a:solidFill>
-              </a:rPr>
-              <a:t>を含めることができます。</a:t>
-            </a:r>
-            <a:endParaRPr>
-              <a:solidFill>
-                <a:schemeClr val="dk1"/>
-              </a:solidFill>
-            </a:endParaRPr>
-          </a:p>
-          <a:p>
-            <a:pPr indent="-298450" lvl="0" marL="457200" rtl="0" algn="l">
-              <a:lnSpc>
-                <a:spcPct val="115000"/>
-              </a:lnSpc>
-              <a:spcBef>
-                <a:spcPts val="1200"/>
-              </a:spcBef>
-              <a:spcAft>
-                <a:spcPts val="0"/>
-              </a:spcAft>
-              <a:buClr>
-                <a:schemeClr val="dk1"/>
-              </a:buClr>
-              <a:buSzPts val="1100"/>
-              <a:buChar char="●"/>
-            </a:pPr>
-            <a:r>
-              <a:rPr b="1" lang="ja">
-                <a:solidFill>
-                  <a:schemeClr val="dk1"/>
-                </a:solidFill>
-              </a:rPr>
-              <a:t>形状データ（メッシュ・頂点座標・法線）</a:t>
-            </a:r>
-            <a:endParaRPr b="1">
-              <a:solidFill>
-                <a:schemeClr val="dk1"/>
-              </a:solidFill>
-            </a:endParaRPr>
-          </a:p>
-          <a:p>
-            <a:pPr indent="-298450" lvl="0" marL="457200" rtl="0" algn="l">
-              <a:lnSpc>
-                <a:spcPct val="115000"/>
-              </a:lnSpc>
-              <a:spcBef>
-                <a:spcPts val="0"/>
-              </a:spcBef>
-              <a:spcAft>
-                <a:spcPts val="0"/>
-              </a:spcAft>
-              <a:buClr>
-                <a:schemeClr val="dk1"/>
-              </a:buClr>
-              <a:buSzPts val="1100"/>
-              <a:buChar char="●"/>
-            </a:pPr>
-            <a:r>
-              <a:rPr b="1" lang="ja">
-                <a:solidFill>
-                  <a:schemeClr val="dk1"/>
-                </a:solidFill>
-              </a:rPr>
-              <a:t>見た目の質感（マテリアル・PBR）</a:t>
-            </a:r>
-            <a:r>
-              <a:rPr lang="ja">
-                <a:solidFill>
-                  <a:schemeClr val="dk1"/>
-                </a:solidFill>
-              </a:rPr>
-              <a:t>：金属感（Roughness/Metallic）や透明度など</a:t>
-            </a:r>
-            <a:endParaRPr>
-              <a:solidFill>
-                <a:schemeClr val="dk1"/>
-              </a:solidFill>
-            </a:endParaRPr>
-          </a:p>
-          <a:p>
-            <a:pPr indent="-298450" lvl="0" marL="457200" rtl="0" algn="l">
-              <a:lnSpc>
-                <a:spcPct val="115000"/>
-              </a:lnSpc>
-              <a:spcBef>
-                <a:spcPts val="0"/>
-              </a:spcBef>
-              <a:spcAft>
-                <a:spcPts val="0"/>
-              </a:spcAft>
-              <a:buClr>
-                <a:schemeClr val="dk1"/>
-              </a:buClr>
-              <a:buSzPts val="1100"/>
-              <a:buChar char="●"/>
-            </a:pPr>
-            <a:r>
-              <a:rPr b="1" lang="ja">
-                <a:solidFill>
-                  <a:schemeClr val="dk1"/>
-                </a:solidFill>
-              </a:rPr>
-              <a:t>テクスチャ画像（PNG / JPEG）</a:t>
-            </a:r>
-            <a:r>
-              <a:rPr lang="ja">
-                <a:solidFill>
-                  <a:schemeClr val="dk1"/>
-                </a:solidFill>
-              </a:rPr>
-              <a:t>：色や表面の細かい凹凸画像データが内部に組み込まれている</a:t>
-            </a:r>
-            <a:endParaRPr>
-              <a:solidFill>
-                <a:schemeClr val="dk1"/>
-              </a:solidFill>
-            </a:endParaRPr>
-          </a:p>
-          <a:p>
-            <a:pPr indent="-298450" lvl="0" marL="457200" rtl="0" algn="l">
-              <a:lnSpc>
-                <a:spcPct val="115000"/>
-              </a:lnSpc>
-              <a:spcBef>
-                <a:spcPts val="0"/>
-              </a:spcBef>
-              <a:spcAft>
-                <a:spcPts val="0"/>
-              </a:spcAft>
-              <a:buClr>
-                <a:schemeClr val="dk1"/>
-              </a:buClr>
-              <a:buSzPts val="1100"/>
-              <a:buChar char="●"/>
-            </a:pPr>
-            <a:r>
-              <a:rPr b="1" lang="ja">
-                <a:solidFill>
-                  <a:schemeClr val="dk1"/>
-                </a:solidFill>
-              </a:rPr>
-              <a:t>骨格・アニメーション（スケルトン・キーフレーム）</a:t>
-            </a:r>
-            <a:r>
-              <a:rPr lang="ja">
-                <a:solidFill>
-                  <a:schemeClr val="dk1"/>
-                </a:solidFill>
-              </a:rPr>
-              <a:t>：キャラクターの動きなど</a:t>
-            </a:r>
-            <a:endParaRPr>
-              <a:solidFill>
-                <a:schemeClr val="dk1"/>
-              </a:solidFill>
-            </a:endParaRPr>
-          </a:p>
-          <a:p>
-            <a:pPr indent="-298450" lvl="0" marL="457200" rtl="0" algn="l">
-              <a:lnSpc>
-                <a:spcPct val="115000"/>
-              </a:lnSpc>
-              <a:spcBef>
-                <a:spcPts val="0"/>
-              </a:spcBef>
-              <a:spcAft>
-                <a:spcPts val="0"/>
-              </a:spcAft>
-              <a:buClr>
-                <a:schemeClr val="dk1"/>
-              </a:buClr>
-              <a:buSzPts val="1100"/>
-              <a:buChar char="●"/>
-            </a:pPr>
-            <a:r>
-              <a:rPr b="1" lang="ja">
-                <a:solidFill>
-                  <a:schemeClr val="dk1"/>
-                </a:solidFill>
-              </a:rPr>
-              <a:t>シーングラフ構造</a:t>
-            </a:r>
-            <a:r>
-              <a:rPr lang="ja">
-                <a:solidFill>
-                  <a:schemeClr val="dk1"/>
-                </a:solidFill>
-              </a:rPr>
-              <a:t>：複数パーツの位置関係・親子関係</a:t>
-            </a:r>
-            <a:endParaRPr>
-              <a:solidFill>
-                <a:schemeClr val="dk1"/>
-              </a:solidFill>
-            </a:endParaRPr>
-          </a:p>
-          <a:p>
-            <a:pPr indent="0" lvl="0" marL="0" rtl="0" algn="l">
-              <a:spcBef>
-                <a:spcPts val="1200"/>
-              </a:spcBef>
-              <a:spcAft>
-                <a:spcPts val="0"/>
-              </a:spcAft>
-              <a:buNone/>
-            </a:pPr>
-            <a:br>
-              <a:rPr lang="ja"/>
-            </a:br>
+              <a:t/>
+            </a:r>
             <a:endParaRPr/>
           </a:p>
         </p:txBody>
@@ -3275,7 +4616,7 @@
   <p:cSld>
     <p:spTree>
       <p:nvGrpSpPr>
-        <p:cNvPr id="83" name="Shape 83"/>
+        <p:cNvPr id="84" name="Shape 84"/>
         <p:cNvGrpSpPr/>
         <p:nvPr/>
       </p:nvGrpSpPr>
@@ -3289,7 +4630,7 @@
       </p:grpSpPr>
       <p:sp>
         <p:nvSpPr>
-          <p:cNvPr id="84" name="Google Shape;84;h411edbbbcdea00d4_0_18:notes"/>
+          <p:cNvPr id="85" name="Google Shape;85;h411edbbbcdea00d4_0_10:notes"/>
           <p:cNvSpPr/>
           <p:nvPr>
             <p:ph idx="2" type="sldImg"/>
@@ -3324,7 +4665,7 @@
       </p:sp>
       <p:sp>
         <p:nvSpPr>
-          <p:cNvPr id="85" name="Google Shape;85;h411edbbbcdea00d4_0_18:notes"/>
+          <p:cNvPr id="86" name="Google Shape;86;h411edbbbcdea00d4_0_10:notes"/>
           <p:cNvSpPr txBox="1"/>
           <p:nvPr>
             <p:ph idx="1" type="body"/>
@@ -3388,7 +4729,7 @@
       </p:grpSpPr>
       <p:sp>
         <p:nvSpPr>
-          <p:cNvPr id="91" name="Google Shape;91;h411edbbbcdea00d4_0_32:notes"/>
+          <p:cNvPr id="91" name="Google Shape;91;h411edbbbcdea00d4_0_23:notes"/>
           <p:cNvSpPr/>
           <p:nvPr>
             <p:ph idx="2" type="sldImg"/>
@@ -3423,7 +4764,7 @@
       </p:sp>
       <p:sp>
         <p:nvSpPr>
-          <p:cNvPr id="92" name="Google Shape;92;h411edbbbcdea00d4_0_32:notes"/>
+          <p:cNvPr id="92" name="Google Shape;92;h411edbbbcdea00d4_0_23:notes"/>
           <p:cNvSpPr txBox="1"/>
           <p:nvPr>
             <p:ph idx="1" type="body"/>
@@ -3454,8 +4795,246 @@
               <a:buNone/>
             </a:pPr>
             <a:r>
-              <a:t/>
-            </a:r>
+              <a:rPr lang="ja"/>
+              <a:t>glb</a:t>
+            </a:r>
+            <a:r>
+              <a:rPr lang="ja"/>
+              <a:t>ファイルとは3D界隈のjpegぐらいの標準形式</a:t>
+            </a:r>
+            <a:br>
+              <a:rPr lang="ja"/>
+            </a:br>
+            <a:r>
+              <a:rPr lang="ja">
+                <a:solidFill>
+                  <a:schemeClr val="dk1"/>
+                </a:solidFill>
+              </a:rPr>
+              <a:t>STLファイルが「表面の三角形の座標だけ」を持っていたのに対し、GLBファイルは</a:t>
+            </a:r>
+            <a:r>
+              <a:rPr b="1" lang="ja">
+                <a:solidFill>
+                  <a:schemeClr val="dk1"/>
+                </a:solidFill>
+              </a:rPr>
+              <a:t>1つのファイルの中に3D表示に必要なすべての情報</a:t>
+            </a:r>
+            <a:r>
+              <a:rPr lang="ja">
+                <a:solidFill>
+                  <a:schemeClr val="dk1"/>
+                </a:solidFill>
+              </a:rPr>
+              <a:t>を含めることができます。</a:t>
+            </a:r>
+            <a:endParaRPr>
+              <a:solidFill>
+                <a:schemeClr val="dk1"/>
+              </a:solidFill>
+            </a:endParaRPr>
+          </a:p>
+          <a:p>
+            <a:pPr indent="-298450" lvl="0" marL="457200" rtl="0" algn="l">
+              <a:lnSpc>
+                <a:spcPct val="115000"/>
+              </a:lnSpc>
+              <a:spcBef>
+                <a:spcPts val="1200"/>
+              </a:spcBef>
+              <a:spcAft>
+                <a:spcPts val="0"/>
+              </a:spcAft>
+              <a:buClr>
+                <a:schemeClr val="dk1"/>
+              </a:buClr>
+              <a:buSzPts val="1100"/>
+              <a:buChar char="●"/>
+            </a:pPr>
+            <a:r>
+              <a:rPr b="1" lang="ja">
+                <a:solidFill>
+                  <a:schemeClr val="dk1"/>
+                </a:solidFill>
+              </a:rPr>
+              <a:t>形状データ（メッシュ・頂点座標・法線）</a:t>
+            </a:r>
+            <a:endParaRPr b="1">
+              <a:solidFill>
+                <a:schemeClr val="dk1"/>
+              </a:solidFill>
+            </a:endParaRPr>
+          </a:p>
+          <a:p>
+            <a:pPr indent="-298450" lvl="0" marL="457200" rtl="0" algn="l">
+              <a:lnSpc>
+                <a:spcPct val="115000"/>
+              </a:lnSpc>
+              <a:spcBef>
+                <a:spcPts val="0"/>
+              </a:spcBef>
+              <a:spcAft>
+                <a:spcPts val="0"/>
+              </a:spcAft>
+              <a:buClr>
+                <a:schemeClr val="dk1"/>
+              </a:buClr>
+              <a:buSzPts val="1100"/>
+              <a:buChar char="●"/>
+            </a:pPr>
+            <a:r>
+              <a:rPr b="1" lang="ja">
+                <a:solidFill>
+                  <a:schemeClr val="dk1"/>
+                </a:solidFill>
+              </a:rPr>
+              <a:t>見た目の質感（マテリアル・PBR）</a:t>
+            </a:r>
+            <a:r>
+              <a:rPr lang="ja">
+                <a:solidFill>
+                  <a:schemeClr val="dk1"/>
+                </a:solidFill>
+              </a:rPr>
+              <a:t>：金属感（Roughness/Metallic）や透明度など</a:t>
+            </a:r>
+            <a:endParaRPr>
+              <a:solidFill>
+                <a:schemeClr val="dk1"/>
+              </a:solidFill>
+            </a:endParaRPr>
+          </a:p>
+          <a:p>
+            <a:pPr indent="-298450" lvl="0" marL="457200" rtl="0" algn="l">
+              <a:lnSpc>
+                <a:spcPct val="115000"/>
+              </a:lnSpc>
+              <a:spcBef>
+                <a:spcPts val="0"/>
+              </a:spcBef>
+              <a:spcAft>
+                <a:spcPts val="0"/>
+              </a:spcAft>
+              <a:buClr>
+                <a:schemeClr val="dk1"/>
+              </a:buClr>
+              <a:buSzPts val="1100"/>
+              <a:buChar char="●"/>
+            </a:pPr>
+            <a:r>
+              <a:rPr b="1" lang="ja">
+                <a:solidFill>
+                  <a:schemeClr val="dk1"/>
+                </a:solidFill>
+              </a:rPr>
+              <a:t>テクスチャ画像（PNG / JPEG）</a:t>
+            </a:r>
+            <a:r>
+              <a:rPr lang="ja">
+                <a:solidFill>
+                  <a:schemeClr val="dk1"/>
+                </a:solidFill>
+              </a:rPr>
+              <a:t>：色や表面の細かい凹凸画像データが内部に組み込まれている</a:t>
+            </a:r>
+            <a:endParaRPr>
+              <a:solidFill>
+                <a:schemeClr val="dk1"/>
+              </a:solidFill>
+            </a:endParaRPr>
+          </a:p>
+          <a:p>
+            <a:pPr indent="-298450" lvl="0" marL="457200" rtl="0" algn="l">
+              <a:lnSpc>
+                <a:spcPct val="115000"/>
+              </a:lnSpc>
+              <a:spcBef>
+                <a:spcPts val="0"/>
+              </a:spcBef>
+              <a:spcAft>
+                <a:spcPts val="0"/>
+              </a:spcAft>
+              <a:buClr>
+                <a:schemeClr val="dk1"/>
+              </a:buClr>
+              <a:buSzPts val="1100"/>
+              <a:buChar char="●"/>
+            </a:pPr>
+            <a:r>
+              <a:rPr b="1" lang="ja">
+                <a:solidFill>
+                  <a:schemeClr val="dk1"/>
+                </a:solidFill>
+              </a:rPr>
+              <a:t>骨格・アニメーション（スケルトン・キーフレーム）</a:t>
+            </a:r>
+            <a:r>
+              <a:rPr lang="ja">
+                <a:solidFill>
+                  <a:schemeClr val="dk1"/>
+                </a:solidFill>
+              </a:rPr>
+              <a:t>：キャラクターの動きなど</a:t>
+            </a:r>
+            <a:endParaRPr>
+              <a:solidFill>
+                <a:schemeClr val="dk1"/>
+              </a:solidFill>
+            </a:endParaRPr>
+          </a:p>
+          <a:p>
+            <a:pPr indent="-298450" lvl="0" marL="457200" rtl="0" algn="l">
+              <a:lnSpc>
+                <a:spcPct val="115000"/>
+              </a:lnSpc>
+              <a:spcBef>
+                <a:spcPts val="0"/>
+              </a:spcBef>
+              <a:spcAft>
+                <a:spcPts val="0"/>
+              </a:spcAft>
+              <a:buClr>
+                <a:schemeClr val="dk1"/>
+              </a:buClr>
+              <a:buSzPts val="1100"/>
+              <a:buChar char="●"/>
+            </a:pPr>
+            <a:r>
+              <a:rPr b="1" lang="ja">
+                <a:solidFill>
+                  <a:schemeClr val="dk1"/>
+                </a:solidFill>
+              </a:rPr>
+              <a:t>シーングラフ構造</a:t>
+            </a:r>
+            <a:r>
+              <a:rPr lang="ja">
+                <a:solidFill>
+                  <a:schemeClr val="dk1"/>
+                </a:solidFill>
+              </a:rPr>
+              <a:t>：複数パーツの位置関係・親子関係</a:t>
+            </a:r>
+            <a:endParaRPr>
+              <a:solidFill>
+                <a:schemeClr val="dk1"/>
+              </a:solidFill>
+            </a:endParaRPr>
+          </a:p>
+          <a:p>
+            <a:pPr indent="0" lvl="0" marL="0" rtl="0" algn="l">
+              <a:spcBef>
+                <a:spcPts val="1200"/>
+              </a:spcBef>
+              <a:spcAft>
+                <a:spcPts val="0"/>
+              </a:spcAft>
+              <a:buNone/>
+            </a:pPr>
+            <a:br>
+              <a:rPr lang="ja"/>
+            </a:br>
             <a:endParaRPr/>
           </a:p>
         </p:txBody>
@@ -3473,7 +5052,7 @@
   <p:cSld>
     <p:spTree>
       <p:nvGrpSpPr>
-        <p:cNvPr id="96" name="Shape 96"/>
+        <p:cNvPr id="97" name="Shape 97"/>
         <p:cNvGrpSpPr/>
         <p:nvPr/>
       </p:nvGrpSpPr>
@@ -3487,7 +5066,7 @@
       </p:grpSpPr>
       <p:sp>
         <p:nvSpPr>
-          <p:cNvPr id="97" name="Google Shape;97;h411edbbbcdea00d4_0_42:notes"/>
+          <p:cNvPr id="98" name="Google Shape;98;h411edbbbcdea00d4_0_18:notes"/>
           <p:cNvSpPr/>
           <p:nvPr>
             <p:ph idx="2" type="sldImg"/>
@@ -3522,7 +5101,7 @@
       </p:sp>
       <p:sp>
         <p:nvSpPr>
-          <p:cNvPr id="98" name="Google Shape;98;h411edbbbcdea00d4_0_42:notes"/>
+          <p:cNvPr id="99" name="Google Shape;99;h411edbbbcdea00d4_0_18:notes"/>
           <p:cNvSpPr txBox="1"/>
           <p:nvPr>
             <p:ph idx="1" type="body"/>
@@ -3553,55 +5132,8 @@
               <a:buNone/>
             </a:pPr>
             <a:r>
-              <a:rPr lang="ja"/>
-              <a:t>stl</a:t>
-            </a:r>
-            <a:r>
-              <a:rPr lang="ja"/>
-              <a:t>ファイルには</a:t>
-            </a:r>
-            <a:r>
-              <a:rPr lang="ja" sz="1300">
-                <a:solidFill>
-                  <a:srgbClr val="1F1F1F"/>
-                </a:solidFill>
-                <a:highlight>
-                  <a:srgbClr val="F2F0F0"/>
-                </a:highlight>
-              </a:rPr>
-              <a:t>三角形をした各ポリゴンの三次元座標が入っている</a:t>
-            </a:r>
-            <a:br>
-              <a:rPr lang="ja" sz="1300">
-                <a:solidFill>
-                  <a:srgbClr val="1F1F1F"/>
-                </a:solidFill>
-                <a:highlight>
-                  <a:srgbClr val="F2F0F0"/>
-                </a:highlight>
-              </a:rPr>
-            </a:br>
-            <a:r>
-              <a:rPr lang="ja" sz="1300">
-                <a:solidFill>
-                  <a:srgbClr val="1F1F1F"/>
-                </a:solidFill>
-                <a:highlight>
-                  <a:srgbClr val="F2F0F0"/>
-                </a:highlight>
-              </a:rPr>
-              <a:t>関節の座標はマゼンタの大きさが既知だから座標だけあればセグメンテーションには困らないってことかな？（半径がわかっていれば中心座標だけでいいので）</a:t>
-            </a:r>
-            <a:br>
-              <a:rPr lang="ja" sz="1300">
-                <a:solidFill>
-                  <a:srgbClr val="1F1F1F"/>
-                </a:solidFill>
-                <a:highlight>
-                  <a:srgbClr val="F2F0F0"/>
-                </a:highlight>
-              </a:rPr>
-            </a:br>
+              <a:t/>
+            </a:r>
             <a:endParaRPr/>
           </a:p>
         </p:txBody>
@@ -3619,7 +5151,7 @@
   <p:cSld>
     <p:spTree>
       <p:nvGrpSpPr>
-        <p:cNvPr id="103" name="Shape 103"/>
+        <p:cNvPr id="104" name="Shape 104"/>
         <p:cNvGrpSpPr/>
         <p:nvPr/>
       </p:nvGrpSpPr>
@@ -3633,7 +5165,7 @@
       </p:grpSpPr>
       <p:sp>
         <p:nvSpPr>
-          <p:cNvPr id="104" name="Google Shape;104;h411edbbbcdea00d4_0_56:notes"/>
+          <p:cNvPr id="105" name="Google Shape;105;h411edbbbcdea00d4_0_209:notes"/>
           <p:cNvSpPr/>
           <p:nvPr>
             <p:ph idx="2" type="sldImg"/>
@@ -3668,7 +5200,7 @@
       </p:sp>
       <p:sp>
         <p:nvSpPr>
-          <p:cNvPr id="105" name="Google Shape;105;h411edbbbcdea00d4_0_56:notes"/>
+          <p:cNvPr id="106" name="Google Shape;106;h411edbbbcdea00d4_0_209:notes"/>
           <p:cNvSpPr txBox="1"/>
           <p:nvPr>
             <p:ph idx="1" type="body"/>
@@ -3689,9 +5221,46 @@
           </a:bodyPr>
           <a:lstStyle/>
           <a:p>
+            <a:pPr indent="-292100" lvl="0" marL="457200" rtl="0" algn="l">
+              <a:lnSpc>
+                <a:spcPct val="115000"/>
+              </a:lnSpc>
+              <a:spcBef>
+                <a:spcPts val="1000"/>
+              </a:spcBef>
+              <a:spcAft>
+                <a:spcPts val="0"/>
+              </a:spcAft>
+              <a:buClr>
+                <a:srgbClr val="CCCCCC"/>
+              </a:buClr>
+              <a:buSzPts val="1000"/>
+              <a:buChar char="●"/>
+            </a:pPr>
+            <a:r>
+              <a:rPr lang="ja" sz="1000">
+                <a:solidFill>
+                  <a:srgbClr val="CCCCCC"/>
+                </a:solidFill>
+                <a:highlight>
+                  <a:srgbClr val="181818"/>
+                </a:highlight>
+              </a:rPr>
+              <a:t>3D の高さ方向の広がりは A1 が 1.00 m、A3 が 0.49 m で、A3 は腕が寝ているのが一目で分かります。</a:t>
+            </a:r>
+            <a:endParaRPr sz="1000">
+              <a:solidFill>
+                <a:srgbClr val="CCCCCC"/>
+              </a:solidFill>
+              <a:highlight>
+                <a:srgbClr val="181818"/>
+              </a:highlight>
+            </a:endParaRPr>
+          </a:p>
+          <a:p>
             <a:pPr indent="0" lvl="0" marL="0" rtl="0" algn="l">
               <a:spcBef>
-                <a:spcPts val="0"/>
+                <a:spcPts val="1000"/>
               </a:spcBef>
               <a:spcAft>
                 <a:spcPts val="0"/>
@@ -8470,7 +10039,7 @@
   <p:cSld>
     <p:spTree>
       <p:nvGrpSpPr>
-        <p:cNvPr id="112" name="Shape 112"/>
+        <p:cNvPr id="114" name="Shape 114"/>
         <p:cNvGrpSpPr/>
         <p:nvPr/>
       </p:nvGrpSpPr>
@@ -8484,7 +10053,7 @@
       </p:grpSpPr>
       <p:sp>
         <p:nvSpPr>
-          <p:cNvPr id="113" name="Google Shape;113;p22"/>
+          <p:cNvPr id="115" name="Google Shape;115;p22"/>
           <p:cNvSpPr txBox="1"/>
           <p:nvPr>
             <p:ph type="title"/>
@@ -8516,7 +10085,11 @@
             </a:pPr>
             <a:r>
               <a:rPr lang="ja"/>
-              <a:t>M3：検証して確認したこと</a:t>
+              <a:t>M2：</a:t>
+            </a:r>
+            <a:r>
+              <a:rPr lang="ja"/>
+              <a:t>検証して確認したこと</a:t>
             </a:r>
             <a:endParaRPr/>
           </a:p>
@@ -8524,7 +10097,7 @@
       </p:sp>
       <p:sp>
         <p:nvSpPr>
-          <p:cNvPr id="114" name="Google Shape;114;p22"/>
+          <p:cNvPr id="116" name="Google Shape;116;p22"/>
           <p:cNvSpPr txBox="1"/>
           <p:nvPr>
             <p:ph idx="1" type="body"/>
@@ -8556,12 +10129,29 @@
             </a:pPr>
             <a:r>
               <a:rPr lang="ja"/>
+              <a:t>・Tripo3Dはseed値を固定すると、入力が同じ画像だと同じ3Dを生成する</a:t>
+            </a:r>
+            <a:br>
+              <a:rPr lang="ja"/>
+            </a:br>
+            <a:r>
+              <a:rPr lang="ja"/>
               <a:t>・</a:t>
             </a:r>
             <a:r>
               <a:rPr lang="ja"/>
-              <a:t>手描き5例で関節3/3を検出できた</a:t>
-            </a:r>
+              <a:t>真横から描いた絵は4/4で成功したが、同じものを斜めから描いたものだと0/2</a:t>
+            </a:r>
+            <a:br>
+              <a:rPr lang="ja"/>
+            </a:br>
+            <a:r>
+              <a:rPr lang="ja"/>
+              <a:t>　（ここでいう失敗は、斜めに描いた弊害で高さが奥行きになってしまい、腕が寝た姿勢になってしまった。ということ）</a:t>
+            </a:r>
+            <a:br>
+              <a:rPr lang="ja"/>
+            </a:br>
             <a:endParaRPr/>
           </a:p>
         </p:txBody>
@@ -8579,7 +10169,7 @@
   <p:cSld>
     <p:spTree>
       <p:nvGrpSpPr>
-        <p:cNvPr id="118" name="Shape 118"/>
+        <p:cNvPr id="120" name="Shape 120"/>
         <p:cNvGrpSpPr/>
         <p:nvPr/>
       </p:nvGrpSpPr>
@@ -8593,7 +10183,7 @@
       </p:grpSpPr>
       <p:sp>
         <p:nvSpPr>
-          <p:cNvPr id="119" name="Google Shape;119;p23"/>
+          <p:cNvPr id="121" name="Google Shape;121;p23"/>
           <p:cNvSpPr txBox="1"/>
           <p:nvPr>
             <p:ph type="title"/>
@@ -8625,7 +10215,11 @@
             </a:pPr>
             <a:r>
               <a:rPr lang="ja"/>
-              <a:t>M4：形態パラメータ抽出</a:t>
+              <a:t>M3</a:t>
+            </a:r>
+            <a:r>
+              <a:rPr lang="ja"/>
+              <a:t>：関節検出・リンク分割</a:t>
             </a:r>
             <a:endParaRPr/>
           </a:p>
@@ -8633,7 +10227,7 @@
       </p:sp>
       <p:sp>
         <p:nvSpPr>
-          <p:cNvPr id="120" name="Google Shape;120;p23"/>
+          <p:cNvPr id="122" name="Google Shape;122;p23"/>
           <p:cNvSpPr txBox="1"/>
           <p:nvPr>
             <p:ph idx="1" type="body"/>
@@ -8641,8 +10235,8 @@
         </p:nvSpPr>
         <p:spPr>
           <a:xfrm>
-            <a:off x="311700" y="1152475"/>
-            <a:ext cx="8520600" cy="3416400"/>
+            <a:off x="311700" y="962325"/>
+            <a:ext cx="8520600" cy="3606600"/>
           </a:xfrm>
           <a:prstGeom prst="rect">
             <a:avLst/>
@@ -8672,7 +10266,18 @@
             </a:br>
             <a:r>
               <a:rPr lang="ja"/>
-              <a:t>⇒切り分けたリンクから、学習で使う設計変数の初期値(長さ・太さ)を求める</a:t>
+              <a:t>⇒</a:t>
+            </a:r>
+            <a:r>
+              <a:rPr lang="ja"/>
+              <a:t>3D モデルからマゼンタの球を見つけて関節の位置を決め、</a:t>
+            </a:r>
+            <a:br>
+              <a:rPr lang="ja"/>
+            </a:br>
+            <a:r>
+              <a:rPr lang="ja"/>
+              <a:t>　メッシュをリンクごとに切り分ける</a:t>
             </a:r>
             <a:endParaRPr/>
           </a:p>
@@ -8682,13 +10287,24 @@
                 <a:spcPts val="1200"/>
               </a:spcBef>
               <a:spcAft>
+                <a:spcPts val="0"/>
+              </a:spcAft>
+              <a:buNone/>
+            </a:pPr>
+            <a:r>
+              <a:rPr lang="ja"/>
+              <a:t>入出力</a:t>
+            </a:r>
+            <a:endParaRPr/>
+          </a:p>
+          <a:p>
+            <a:pPr indent="0" lvl="0" marL="0" rtl="0" algn="l">
+              <a:spcBef>
                 <a:spcPts val="1200"/>
-              </a:spcAft>
-              <a:buClr>
-                <a:schemeClr val="dk1"/>
-              </a:buClr>
-              <a:buSzPts val="1100"/>
-              <a:buFont typeface="Arial"/>
+              </a:spcBef>
+              <a:spcAft>
+                <a:spcPts val="1200"/>
+              </a:spcAft>
               <a:buNone/>
             </a:pPr>
             <a:r>
@@ -8700,19 +10316,65 @@
             </a:br>
             <a:r>
               <a:rPr lang="ja"/>
-              <a:t>入力：リンクごとのSTL,関節の座標</a:t>
+              <a:t>入力：3D</a:t>
+            </a:r>
+            <a:r>
+              <a:rPr lang="ja"/>
+              <a:t>形状(glb)</a:t>
             </a:r>
             <a:br>
               <a:rPr lang="ja"/>
             </a:br>
             <a:r>
               <a:rPr lang="ja"/>
-              <a:t>出力：topology.json</a:t>
+              <a:t>出力：</a:t>
+            </a:r>
+            <a:r>
+              <a:rPr lang="ja"/>
+              <a:t>リンクごとのSTL</a:t>
+            </a:r>
+            <a:br>
+              <a:rPr lang="ja"/>
+            </a:br>
+            <a:r>
+              <a:rPr lang="ja"/>
+              <a:t>	　関節の座標（</a:t>
+            </a:r>
+            <a:r>
+              <a:rPr lang="ja"/>
+              <a:t>中心）</a:t>
             </a:r>
             <a:endParaRPr/>
           </a:p>
         </p:txBody>
       </p:sp>
+      <p:pic>
+        <p:nvPicPr>
+          <p:cNvPr id="123" name="Google Shape;123;p23" title="pipeline_m3.png"/>
+          <p:cNvPicPr preferRelativeResize="0"/>
+          <p:nvPr/>
+        </p:nvPicPr>
+        <p:blipFill rotWithShape="1">
+          <a:blip r:embed="rId3">
+            <a:alphaModFix/>
+          </a:blip>
+          <a:srcRect b="0" l="4454" r="-442" t="0"/>
+          <a:stretch/>
+        </p:blipFill>
+        <p:spPr>
+          <a:xfrm>
+            <a:off x="3025602" y="2472175"/>
+            <a:ext cx="6118398" cy="2634623"/>
+          </a:xfrm>
+          <a:prstGeom prst="rect">
+            <a:avLst/>
+          </a:prstGeom>
+          <a:noFill/>
+          <a:ln>
+            <a:noFill/>
+          </a:ln>
+        </p:spPr>
+      </p:pic>
     </p:spTree>
   </p:cSld>
   <p:clrMapOvr>
@@ -8726,7 +10388,7 @@
   <p:cSld>
     <p:spTree>
       <p:nvGrpSpPr>
-        <p:cNvPr id="124" name="Shape 124"/>
+        <p:cNvPr id="127" name="Shape 127"/>
         <p:cNvGrpSpPr/>
         <p:nvPr/>
       </p:nvGrpSpPr>
@@ -8740,7 +10402,7 @@
       </p:grpSpPr>
       <p:sp>
         <p:nvSpPr>
-          <p:cNvPr id="125" name="Google Shape;125;p24"/>
+          <p:cNvPr id="128" name="Google Shape;128;p24"/>
           <p:cNvSpPr txBox="1"/>
           <p:nvPr>
             <p:ph type="title"/>
@@ -8772,7 +10434,7 @@
             </a:pPr>
             <a:r>
               <a:rPr lang="ja"/>
-              <a:t>M4：フローの説明</a:t>
+              <a:t>M3：フローの説明</a:t>
             </a:r>
             <a:endParaRPr/>
           </a:p>
@@ -8795,7 +10457,7 @@
       </p:sp>
       <p:sp>
         <p:nvSpPr>
-          <p:cNvPr id="126" name="Google Shape;126;p24"/>
+          <p:cNvPr id="129" name="Google Shape;129;p24"/>
           <p:cNvSpPr txBox="1"/>
           <p:nvPr>
             <p:ph idx="1" type="body"/>
@@ -8827,21 +10489,11 @@
             </a:pPr>
             <a:r>
               <a:rPr lang="ja"/>
-              <a:t>①長さと太さを求める</a:t>
-            </a:r>
-            <a:br>
-              <a:rPr lang="ja"/>
-            </a:br>
-            <a:r>
-              <a:rPr lang="ja"/>
-              <a:t>長さ ＝ 関節と関節の距離(先端リンクは、最後の関節から最も遠い点まで)</a:t>
-            </a:r>
-            <a:br>
-              <a:rPr lang="ja"/>
-            </a:br>
-            <a:r>
-              <a:rPr lang="ja"/>
-              <a:t>太さ ＝ 骨の軸に垂直な断面の幅の平均の半分</a:t>
+              <a:t>①</a:t>
+            </a:r>
+            <a:r>
+              <a:rPr lang="ja"/>
+              <a:t>テクスチャの色を頂点に移す</a:t>
             </a:r>
             <a:endParaRPr/>
           </a:p>
@@ -8861,6 +10513,26 @@
             </a:r>
             <a:r>
               <a:rPr lang="ja"/>
+              <a:t>マゼンタに近い色の頂点を抜き出す</a:t>
+            </a:r>
+            <a:endParaRPr/>
+          </a:p>
+          <a:p>
+            <a:pPr indent="0" lvl="0" marL="0" rtl="0" algn="l">
+              <a:spcBef>
+                <a:spcPts val="1200"/>
+              </a:spcBef>
+              <a:spcAft>
+                <a:spcPts val="0"/>
+              </a:spcAft>
+              <a:buNone/>
+            </a:pPr>
+            <a:r>
+              <a:rPr lang="ja"/>
+              <a:t>③</a:t>
+            </a:r>
+            <a:r>
+              <a:rPr lang="ja"/>
               <a:t>抜き出した頂点を3次元でまとまりに分け、各まとまりの重心を関節とする</a:t>
             </a:r>
             <a:endParaRPr/>
@@ -8877,11 +10549,7 @@
             </a:pPr>
             <a:r>
               <a:rPr lang="ja"/>
-              <a:t>③</a:t>
-            </a:r>
-            <a:r>
-              <a:rPr lang="ja"/>
-              <a:t>形がカプセルからどれだけはみ出すかを計算し、表示と記録をする</a:t>
+              <a:t>④関節の高さ(Z)でメッシュを切る</a:t>
             </a:r>
             <a:endParaRPr/>
           </a:p>
@@ -8897,11 +10565,7 @@
             </a:pPr>
             <a:r>
               <a:rPr lang="ja"/>
-              <a:t>④</a:t>
-            </a:r>
-            <a:r>
-              <a:rPr lang="ja"/>
-              <a:t>ギア比・可動域は既定値（100、±90°）を入れる</a:t>
+              <a:t>⑤各リンクを自分の座標に移してSTLで出力する</a:t>
             </a:r>
             <a:endParaRPr/>
           </a:p>
@@ -8935,7 +10599,7 @@
   <p:cSld>
     <p:spTree>
       <p:nvGrpSpPr>
-        <p:cNvPr id="130" name="Shape 130"/>
+        <p:cNvPr id="133" name="Shape 133"/>
         <p:cNvGrpSpPr/>
         <p:nvPr/>
       </p:nvGrpSpPr>
@@ -8949,7 +10613,7 @@
       </p:grpSpPr>
       <p:sp>
         <p:nvSpPr>
-          <p:cNvPr id="131" name="Google Shape;131;p25"/>
+          <p:cNvPr id="134" name="Google Shape;134;p25"/>
           <p:cNvSpPr txBox="1"/>
           <p:nvPr>
             <p:ph type="title"/>
@@ -8981,7 +10645,11 @@
             </a:pPr>
             <a:r>
               <a:rPr lang="ja"/>
-              <a:t>M4：検証して確認したこと</a:t>
+              <a:t>M3:</a:t>
+            </a:r>
+            <a:r>
+              <a:rPr lang="ja"/>
+              <a:t>フローの説明</a:t>
             </a:r>
             <a:endParaRPr/>
           </a:p>
@@ -8989,7 +10657,7 @@
       </p:sp>
       <p:sp>
         <p:nvSpPr>
-          <p:cNvPr id="132" name="Google Shape;132;p25"/>
+          <p:cNvPr id="135" name="Google Shape;135;p25"/>
           <p:cNvSpPr txBox="1"/>
           <p:nvPr>
             <p:ph idx="1" type="body"/>
@@ -9015,50 +10683,44 @@
                 <a:spcPts val="0"/>
               </a:spcBef>
               <a:spcAft>
-                <a:spcPts val="0"/>
-              </a:spcAft>
-              <a:buNone/>
-            </a:pPr>
-            <a:r>
-              <a:rPr lang="ja"/>
-              <a:t>・長さは関節位置と一致した（Bug 27・31 を直した後）</a:t>
+                <a:spcPts val="1200"/>
+              </a:spcAft>
+              <a:buNone/>
+            </a:pPr>
+            <a:r>
+              <a:t/>
             </a:r>
             <a:endParaRPr/>
           </a:p>
-          <a:p>
-            <a:pPr indent="0" lvl="0" marL="0" rtl="0" algn="l">
-              <a:spcBef>
-                <a:spcPts val="1200"/>
-              </a:spcBef>
-              <a:spcAft>
-                <a:spcPts val="0"/>
-              </a:spcAft>
-              <a:buNone/>
-            </a:pPr>
-            <a:r>
-              <a:rPr lang="ja"/>
-              <a:t>・太さ: カプセルの外に出る頂点の割合は平均 21.4 %。直方体（OBB）から求める旧方式の 29.7 % より小さく、悪化したリンクは無い（手描き 5 例・20 リンク、系譜 9-75）</a:t>
-            </a:r>
-            <a:endParaRPr/>
-          </a:p>
-          <a:p>
-            <a:pPr indent="0" lvl="0" marL="0" rtl="0" algn="l">
-              <a:spcBef>
-                <a:spcPts val="1200"/>
-              </a:spcBef>
-              <a:spcAft>
-                <a:spcPts val="1200"/>
-              </a:spcAft>
-              <a:buNone/>
-            </a:pPr>
-            <a:r>
-              <a:rPr lang="ja"/>
-              <a:t>・⚠ 限界: 平たい手先はカプセルで覆えず、70.9 % はみ出す（系譜 9-75）</a:t>
-            </a:r>
-            <a:endParaRPr/>
-          </a:p>
         </p:txBody>
       </p:sp>
+      <p:pic>
+        <p:nvPicPr>
+          <p:cNvPr id="136" name="Google Shape;136;p25" title="pipeline_m3.png"/>
+          <p:cNvPicPr preferRelativeResize="0"/>
+          <p:nvPr/>
+        </p:nvPicPr>
+        <p:blipFill rotWithShape="1">
+          <a:blip r:embed="rId3">
+            <a:alphaModFix/>
+          </a:blip>
+          <a:srcRect b="0" l="4454" r="-442" t="0"/>
+          <a:stretch/>
+        </p:blipFill>
+        <p:spPr>
+          <a:xfrm>
+            <a:off x="155850" y="1152477"/>
+            <a:ext cx="8832301" cy="3803248"/>
+          </a:xfrm>
+          <a:prstGeom prst="rect">
+            <a:avLst/>
+          </a:prstGeom>
+          <a:noFill/>
+          <a:ln>
+            <a:noFill/>
+          </a:ln>
+        </p:spPr>
+      </p:pic>
     </p:spTree>
   </p:cSld>
   <p:clrMapOvr>
@@ -9072,7 +10734,7 @@
   <p:cSld>
     <p:spTree>
       <p:nvGrpSpPr>
-        <p:cNvPr id="136" name="Shape 136"/>
+        <p:cNvPr id="140" name="Shape 140"/>
         <p:cNvGrpSpPr/>
         <p:nvPr/>
       </p:nvGrpSpPr>
@@ -9086,7 +10748,7 @@
       </p:grpSpPr>
       <p:sp>
         <p:nvSpPr>
-          <p:cNvPr id="137" name="Google Shape;137;p26"/>
+          <p:cNvPr id="141" name="Google Shape;141;p26"/>
           <p:cNvSpPr txBox="1"/>
           <p:nvPr>
             <p:ph type="title"/>
@@ -9118,11 +10780,7 @@
             </a:pPr>
             <a:r>
               <a:rPr lang="ja"/>
-              <a:t>M5：</a:t>
-            </a:r>
-            <a:r>
-              <a:rPr lang="ja"/>
-              <a:t>シミュレーションモデル作成</a:t>
+              <a:t>M3：検証して確認したこと</a:t>
             </a:r>
             <a:endParaRPr/>
           </a:p>
@@ -9130,7 +10788,7 @@
       </p:sp>
       <p:sp>
         <p:nvSpPr>
-          <p:cNvPr id="138" name="Google Shape;138;p26"/>
+          <p:cNvPr id="142" name="Google Shape;142;p26"/>
           <p:cNvSpPr txBox="1"/>
           <p:nvPr>
             <p:ph idx="1" type="body"/>
@@ -9156,62 +10814,17 @@
                 <a:spcPts val="0"/>
               </a:spcBef>
               <a:spcAft>
-                <a:spcPts val="0"/>
-              </a:spcAft>
-              <a:buNone/>
-            </a:pPr>
-            <a:r>
-              <a:rPr lang="ja"/>
-              <a:t>・なにをする工程か</a:t>
-            </a:r>
-            <a:br>
-              <a:rPr lang="ja"/>
-            </a:br>
-            <a:r>
-              <a:rPr lang="ja"/>
-              <a:t>⇒</a:t>
-            </a:r>
-            <a:r>
-              <a:rPr lang="ja"/>
-              <a:t>パラメータから、学習で使えるロボットモデルファイルを作る</a:t>
-            </a:r>
-            <a:endParaRPr/>
-          </a:p>
-          <a:p>
-            <a:pPr indent="0" lvl="0" marL="0" rtl="0" algn="l">
-              <a:spcBef>
                 <a:spcPts val="1200"/>
-              </a:spcBef>
-              <a:spcAft>
-                <a:spcPts val="1200"/>
-              </a:spcAft>
-              <a:buNone/>
-            </a:pPr>
-            <a:r>
-              <a:rPr lang="ja"/>
-              <a:t>・入出力</a:t>
-            </a:r>
-            <a:br>
-              <a:rPr lang="ja"/>
-            </a:br>
-            <a:r>
-              <a:rPr lang="ja"/>
-              <a:t>入力：topology.json</a:t>
-            </a:r>
-            <a:br>
-              <a:rPr lang="ja"/>
-            </a:br>
-            <a:r>
-              <a:rPr lang="ja"/>
-              <a:t>出力：XML(Mujoco</a:t>
-            </a:r>
-            <a:r>
-              <a:rPr lang="ja"/>
-              <a:t>互換。choreonoidが読み込むときに変換する</a:t>
-            </a:r>
-            <a:r>
-              <a:rPr lang="ja"/>
-              <a:t>)</a:t>
+              </a:spcAft>
+              <a:buNone/>
+            </a:pPr>
+            <a:r>
+              <a:rPr lang="ja"/>
+              <a:t>・</a:t>
+            </a:r>
+            <a:r>
+              <a:rPr lang="ja"/>
+              <a:t>手描き5例で関節3/3を検出できた</a:t>
             </a:r>
             <a:endParaRPr/>
           </a:p>
@@ -9230,7 +10843,7 @@
   <p:cSld>
     <p:spTree>
       <p:nvGrpSpPr>
-        <p:cNvPr id="142" name="Shape 142"/>
+        <p:cNvPr id="146" name="Shape 146"/>
         <p:cNvGrpSpPr/>
         <p:nvPr/>
       </p:nvGrpSpPr>
@@ -9244,7 +10857,7 @@
       </p:grpSpPr>
       <p:sp>
         <p:nvSpPr>
-          <p:cNvPr id="143" name="Google Shape;143;p27"/>
+          <p:cNvPr id="147" name="Google Shape;147;p27"/>
           <p:cNvSpPr txBox="1"/>
           <p:nvPr>
             <p:ph type="title"/>
@@ -9276,30 +10889,15 @@
             </a:pPr>
             <a:r>
               <a:rPr lang="ja"/>
-              <a:t>M5：フローの説明</a:t>
+              <a:t>M4：形態パラメータ抽出</a:t>
             </a:r>
             <a:endParaRPr/>
           </a:p>
-          <a:p>
-            <a:pPr indent="0" lvl="0" marL="0" rtl="0" algn="l">
-              <a:spcBef>
-                <a:spcPts val="0"/>
-              </a:spcBef>
-              <a:spcAft>
-                <a:spcPts val="0"/>
-              </a:spcAft>
-              <a:buNone/>
-            </a:pPr>
-            <a:r>
-              <a:t/>
-            </a:r>
-            <a:endParaRPr/>
-          </a:p>
         </p:txBody>
       </p:sp>
       <p:sp>
         <p:nvSpPr>
-          <p:cNvPr id="144" name="Google Shape;144;p27"/>
+          <p:cNvPr id="148" name="Google Shape;148;p27"/>
           <p:cNvSpPr txBox="1"/>
           <p:nvPr>
             <p:ph idx="1" type="body"/>
@@ -9307,8 +10905,8 @@
         </p:nvSpPr>
         <p:spPr>
           <a:xfrm>
-            <a:off x="311700" y="1152475"/>
-            <a:ext cx="8520600" cy="3416400"/>
+            <a:off x="311700" y="1127575"/>
+            <a:ext cx="8520600" cy="3758700"/>
           </a:xfrm>
           <a:prstGeom prst="rect">
             <a:avLst/>
@@ -9331,11 +10929,14 @@
             </a:pPr>
             <a:r>
               <a:rPr lang="ja"/>
-              <a:t>①</a:t>
-            </a:r>
-            <a:r>
-              <a:rPr lang="ja"/>
-              <a:t>各リンクをカプセルで近似する</a:t>
+              <a:t>・なにをする工程か</a:t>
+            </a:r>
+            <a:br>
+              <a:rPr lang="ja"/>
+            </a:br>
+            <a:r>
+              <a:rPr lang="ja"/>
+              <a:t>⇒切り分けたリンクから、学習で使う設計変数の初期値(長さ・太さ)を求める</a:t>
             </a:r>
             <a:endParaRPr/>
           </a:p>
@@ -9351,74 +10952,302 @@
             </a:pPr>
             <a:r>
               <a:rPr lang="ja"/>
-              <a:t>②</a:t>
-            </a:r>
-            <a:r>
-              <a:rPr lang="ja"/>
-              <a:t>子リンクを親リンクの先端に取り付ける</a:t>
+              <a:t>・入出力</a:t>
+            </a:r>
+            <a:br>
+              <a:rPr lang="ja"/>
+            </a:br>
+            <a:r>
+              <a:rPr lang="ja"/>
+              <a:t>入力：リンクごとのSTL,関節の座標</a:t>
+            </a:r>
+            <a:br>
+              <a:rPr lang="ja"/>
+            </a:br>
+            <a:r>
+              <a:rPr lang="ja"/>
+              <a:t>出力：topology.json</a:t>
             </a:r>
             <a:endParaRPr/>
           </a:p>
           <a:p>
-            <a:pPr indent="0" lvl="0" marL="0" rtl="0" algn="l">
+            <a:pPr indent="-316985" lvl="0" marL="457200" rtl="0" algn="l">
               <a:spcBef>
                 <a:spcPts val="1200"/>
               </a:spcBef>
               <a:spcAft>
                 <a:spcPts val="0"/>
               </a:spcAft>
-              <a:buNone/>
-            </a:pPr>
-            <a:r>
-              <a:rPr lang="ja"/>
-              <a:t>③</a:t>
-            </a:r>
-            <a:r>
-              <a:rPr lang="ja"/>
-              <a:t>関節軸を割り当てる</a:t>
-            </a:r>
-            <a:br>
-              <a:rPr lang="ja"/>
-            </a:br>
-            <a:r>
-              <a:rPr lang="ja"/>
-              <a:t>　(既定の縦型: 根元はヨー、それより先はピッチ。関節ごとの指定もできる)</a:t>
-            </a:r>
-            <a:br>
-              <a:rPr lang="ja"/>
-            </a:br>
-            <a:r>
-              <a:rPr lang="ja"/>
-              <a:t>　⇒</a:t>
-            </a:r>
-            <a:r>
-              <a:rPr b="1" lang="ja"/>
-              <a:t>※関節軸は決め打ちで決定しているということ(研究スコープ外)</a:t>
-            </a:r>
-            <a:endParaRPr b="1"/>
-          </a:p>
-          <a:p>
-            <a:pPr indent="0" lvl="0" marL="0" rtl="0" algn="l">
-              <a:spcBef>
-                <a:spcPts val="1200"/>
-              </a:spcBef>
-              <a:spcAft>
-                <a:spcPts val="1200"/>
-              </a:spcAft>
-              <a:buNone/>
-            </a:pPr>
-            <a:r>
-              <a:rPr lang="ja"/>
-              <a:t>④ギア比</a:t>
-            </a:r>
-            <a:r>
-              <a:rPr lang="ja"/>
-              <a:t>つきのモーターをつける</a:t>
+              <a:buClr>
+                <a:srgbClr val="CCCCCC"/>
+              </a:buClr>
+              <a:buSzPts val="1392"/>
+              <a:buChar char="●"/>
+            </a:pPr>
+            <a:r>
+              <a:rPr lang="ja" sz="1392">
+                <a:solidFill>
+                  <a:srgbClr val="CCCCCC"/>
+                </a:solidFill>
+                <a:highlight>
+                  <a:srgbClr val="181818"/>
+                </a:highlight>
+              </a:rPr>
+              <a:t>topology.json</a:t>
+            </a:r>
+            <a:endParaRPr sz="1392">
+              <a:solidFill>
+                <a:srgbClr val="CCCCCC"/>
+              </a:solidFill>
+              <a:highlight>
+                <a:srgbClr val="181818"/>
+              </a:highlight>
+            </a:endParaRPr>
+          </a:p>
+          <a:p>
+            <a:pPr indent="-316985" lvl="1" marL="914400" rtl="0" algn="l">
+              <a:spcBef>
+                <a:spcPts val="0"/>
+              </a:spcBef>
+              <a:spcAft>
+                <a:spcPts val="0"/>
+              </a:spcAft>
+              <a:buClr>
+                <a:srgbClr val="CCCCCC"/>
+              </a:buClr>
+              <a:buSzPts val="1392"/>
+              <a:buChar char="○"/>
+            </a:pPr>
+            <a:r>
+              <a:rPr lang="ja" sz="1392">
+                <a:solidFill>
+                  <a:srgbClr val="CCCCCC"/>
+                </a:solidFill>
+                <a:highlight>
+                  <a:srgbClr val="181818"/>
+                </a:highlight>
+              </a:rPr>
+              <a:t>名前・親リンク</a:t>
+            </a:r>
+            <a:endParaRPr sz="1392">
+              <a:solidFill>
+                <a:srgbClr val="CCCCCC"/>
+              </a:solidFill>
+              <a:highlight>
+                <a:srgbClr val="181818"/>
+              </a:highlight>
+            </a:endParaRPr>
+          </a:p>
+          <a:p>
+            <a:pPr indent="-316985" lvl="1" marL="914400" rtl="0" algn="l">
+              <a:spcBef>
+                <a:spcPts val="0"/>
+              </a:spcBef>
+              <a:spcAft>
+                <a:spcPts val="0"/>
+              </a:spcAft>
+              <a:buClr>
+                <a:srgbClr val="CCCCCC"/>
+              </a:buClr>
+              <a:buSzPts val="1392"/>
+              <a:buChar char="○"/>
+            </a:pPr>
+            <a:r>
+              <a:rPr lang="ja" sz="1392">
+                <a:solidFill>
+                  <a:srgbClr val="CCCCCC"/>
+                </a:solidFill>
+                <a:highlight>
+                  <a:srgbClr val="181818"/>
+                </a:highlight>
+              </a:rPr>
+              <a:t>関節（種類・軸・可動域）</a:t>
+            </a:r>
+            <a:endParaRPr sz="1392">
+              <a:solidFill>
+                <a:srgbClr val="CCCCCC"/>
+              </a:solidFill>
+              <a:highlight>
+                <a:srgbClr val="181818"/>
+              </a:highlight>
+            </a:endParaRPr>
+          </a:p>
+          <a:p>
+            <a:pPr indent="-310635" lvl="1" marL="914400" rtl="0" algn="l">
+              <a:spcBef>
+                <a:spcPts val="0"/>
+              </a:spcBef>
+              <a:spcAft>
+                <a:spcPts val="0"/>
+              </a:spcAft>
+              <a:buClr>
+                <a:srgbClr val="CCCCCC"/>
+              </a:buClr>
+              <a:buSzPts val="1292"/>
+              <a:buChar char="○"/>
+            </a:pPr>
+            <a:r>
+              <a:rPr lang="ja" sz="1392">
+                <a:solidFill>
+                  <a:srgbClr val="CCCCCC"/>
+                </a:solidFill>
+                <a:highlight>
+                  <a:srgbClr val="181818"/>
+                </a:highlight>
+              </a:rPr>
+              <a:t>骨の長さ（</a:t>
+            </a:r>
+            <a:r>
+              <a:rPr lang="ja" sz="1292">
+                <a:solidFill>
+                  <a:srgbClr val="D0D0D0"/>
+                </a:solidFill>
+                <a:highlight>
+                  <a:srgbClr val="3C3C3C"/>
+                </a:highlight>
+                <a:latin typeface="Courier New"/>
+                <a:ea typeface="Courier New"/>
+                <a:cs typeface="Courier New"/>
+                <a:sym typeface="Courier New"/>
+              </a:rPr>
+              <a:t>bone_offset</a:t>
+            </a:r>
+            <a:r>
+              <a:rPr lang="ja" sz="1392">
+                <a:solidFill>
+                  <a:srgbClr val="CCCCCC"/>
+                </a:solidFill>
+                <a:highlight>
+                  <a:srgbClr val="181818"/>
+                </a:highlight>
+              </a:rPr>
+              <a:t>）</a:t>
+            </a:r>
+            <a:endParaRPr sz="1392">
+              <a:solidFill>
+                <a:srgbClr val="CCCCCC"/>
+              </a:solidFill>
+              <a:highlight>
+                <a:srgbClr val="181818"/>
+              </a:highlight>
+            </a:endParaRPr>
+          </a:p>
+          <a:p>
+            <a:pPr indent="-310635" lvl="1" marL="914400" rtl="0" algn="l">
+              <a:spcBef>
+                <a:spcPts val="0"/>
+              </a:spcBef>
+              <a:spcAft>
+                <a:spcPts val="0"/>
+              </a:spcAft>
+              <a:buClr>
+                <a:srgbClr val="CCCCCC"/>
+              </a:buClr>
+              <a:buSzPts val="1292"/>
+              <a:buChar char="○"/>
+            </a:pPr>
+            <a:r>
+              <a:rPr lang="ja" sz="1392">
+                <a:solidFill>
+                  <a:srgbClr val="CCCCCC"/>
+                </a:solidFill>
+                <a:highlight>
+                  <a:srgbClr val="181818"/>
+                </a:highlight>
+              </a:rPr>
+              <a:t>カプセルの半径（</a:t>
+            </a:r>
+            <a:r>
+              <a:rPr lang="ja" sz="1292">
+                <a:solidFill>
+                  <a:srgbClr val="D0D0D0"/>
+                </a:solidFill>
+                <a:highlight>
+                  <a:srgbClr val="3C3C3C"/>
+                </a:highlight>
+                <a:latin typeface="Courier New"/>
+                <a:ea typeface="Courier New"/>
+                <a:cs typeface="Courier New"/>
+                <a:sym typeface="Courier New"/>
+              </a:rPr>
+              <a:t>size</a:t>
+            </a:r>
+            <a:r>
+              <a:rPr lang="ja" sz="1392">
+                <a:solidFill>
+                  <a:srgbClr val="CCCCCC"/>
+                </a:solidFill>
+                <a:highlight>
+                  <a:srgbClr val="181818"/>
+                </a:highlight>
+              </a:rPr>
+              <a:t>）</a:t>
+            </a:r>
+            <a:endParaRPr sz="1392">
+              <a:solidFill>
+                <a:srgbClr val="CCCCCC"/>
+              </a:solidFill>
+              <a:highlight>
+                <a:srgbClr val="181818"/>
+              </a:highlight>
+            </a:endParaRPr>
+          </a:p>
+          <a:p>
+            <a:pPr indent="-316985" lvl="1" marL="914400" rtl="0" algn="l">
+              <a:spcBef>
+                <a:spcPts val="0"/>
+              </a:spcBef>
+              <a:spcAft>
+                <a:spcPts val="0"/>
+              </a:spcAft>
+              <a:buClr>
+                <a:srgbClr val="CCCCCC"/>
+              </a:buClr>
+              <a:buSzPts val="1392"/>
+              <a:buChar char="○"/>
+            </a:pPr>
+            <a:r>
+              <a:rPr lang="ja" sz="1392">
+                <a:solidFill>
+                  <a:srgbClr val="CCCCCC"/>
+                </a:solidFill>
+                <a:highlight>
+                  <a:srgbClr val="181818"/>
+                </a:highlight>
+              </a:rPr>
+              <a:t>ギア比</a:t>
             </a:r>
             <a:endParaRPr/>
           </a:p>
         </p:txBody>
       </p:sp>
+      <p:pic>
+        <p:nvPicPr>
+          <p:cNvPr id="149" name="Google Shape;149;p27" title="pipeline_m4.png"/>
+          <p:cNvPicPr preferRelativeResize="0"/>
+          <p:nvPr/>
+        </p:nvPicPr>
+        <p:blipFill rotWithShape="1">
+          <a:blip r:embed="rId3">
+            <a:alphaModFix/>
+          </a:blip>
+          <a:srcRect b="0" l="5486" r="4277" t="0"/>
+          <a:stretch/>
+        </p:blipFill>
+        <p:spPr>
+          <a:xfrm>
+            <a:off x="3417950" y="2789140"/>
+            <a:ext cx="5726049" cy="2221624"/>
+          </a:xfrm>
+          <a:prstGeom prst="rect">
+            <a:avLst/>
+          </a:prstGeom>
+          <a:noFill/>
+          <a:ln>
+            <a:noFill/>
+          </a:ln>
+        </p:spPr>
+      </p:pic>
     </p:spTree>
   </p:cSld>
   <p:clrMapOvr>
@@ -9432,7 +11261,7 @@
   <p:cSld>
     <p:spTree>
       <p:nvGrpSpPr>
-        <p:cNvPr id="148" name="Shape 148"/>
+        <p:cNvPr id="153" name="Shape 153"/>
         <p:cNvGrpSpPr/>
         <p:nvPr/>
       </p:nvGrpSpPr>
@@ -9446,7 +11275,7 @@
       </p:grpSpPr>
       <p:sp>
         <p:nvSpPr>
-          <p:cNvPr id="149" name="Google Shape;149;p28"/>
+          <p:cNvPr id="154" name="Google Shape;154;p28"/>
           <p:cNvSpPr txBox="1"/>
           <p:nvPr>
             <p:ph type="title"/>
@@ -9478,15 +11307,30 @@
             </a:pPr>
             <a:r>
               <a:rPr lang="ja"/>
-              <a:t>M5：検証して確認したこと</a:t>
+              <a:t>M4：フローの説明</a:t>
             </a:r>
             <a:endParaRPr/>
           </a:p>
+          <a:p>
+            <a:pPr indent="0" lvl="0" marL="0" rtl="0" algn="l">
+              <a:spcBef>
+                <a:spcPts val="0"/>
+              </a:spcBef>
+              <a:spcAft>
+                <a:spcPts val="0"/>
+              </a:spcAft>
+              <a:buNone/>
+            </a:pPr>
+            <a:r>
+              <a:t/>
+            </a:r>
+            <a:endParaRPr/>
+          </a:p>
         </p:txBody>
       </p:sp>
       <p:sp>
         <p:nvSpPr>
-          <p:cNvPr id="150" name="Google Shape;150;p28"/>
+          <p:cNvPr id="155" name="Google Shape;155;p28"/>
           <p:cNvSpPr txBox="1"/>
           <p:nvPr>
             <p:ph idx="1" type="body"/>
@@ -9518,11 +11362,21 @@
             </a:pPr>
             <a:r>
               <a:rPr lang="ja"/>
-              <a:t>・</a:t>
-            </a:r>
-            <a:r>
-              <a:rPr lang="ja"/>
-              <a:t>モデル上のリーチと実際のリーチが一致した</a:t>
+              <a:t>①長さと太さを求める</a:t>
+            </a:r>
+            <a:br>
+              <a:rPr lang="ja"/>
+            </a:br>
+            <a:r>
+              <a:rPr lang="ja"/>
+              <a:t>長さ ＝ 関節と関節の距離(先端リンクは、最後の関節から最も遠い点まで)</a:t>
+            </a:r>
+            <a:br>
+              <a:rPr lang="ja"/>
+            </a:br>
+            <a:r>
+              <a:rPr lang="ja"/>
+              <a:t>太さ ＝ 骨の軸に垂直な断面の幅の平均の半分</a:t>
             </a:r>
             <a:endParaRPr/>
           </a:p>
@@ -9538,11 +11392,11 @@
             </a:pPr>
             <a:r>
               <a:rPr lang="ja"/>
-              <a:t>・</a:t>
-            </a:r>
-            <a:r>
-              <a:rPr lang="ja"/>
-              <a:t>関節軸も正しい</a:t>
+              <a:t>②</a:t>
+            </a:r>
+            <a:r>
+              <a:rPr lang="ja"/>
+              <a:t>形がカプセルからどれだけはみ出すかを計算し、表示と記録をする</a:t>
             </a:r>
             <a:endParaRPr/>
           </a:p>
@@ -9558,7 +11412,11 @@
             </a:pPr>
             <a:r>
               <a:rPr lang="ja"/>
-              <a:t>・実行に入れないような不備のあるモデルのときには黙って進まない(もうちょいいい言い方ない？)</a:t>
+              <a:t>③</a:t>
+            </a:r>
+            <a:r>
+              <a:rPr lang="ja"/>
+              <a:t>ギア比・可動域は既定値（100、±90°）を入れる</a:t>
             </a:r>
             <a:endParaRPr/>
           </a:p>
@@ -9573,12 +11431,7 @@
               <a:buNone/>
             </a:pPr>
             <a:r>
-              <a:rPr lang="ja"/>
-              <a:t>・</a:t>
-            </a:r>
-            <a:r>
-              <a:rPr lang="ja"/>
-              <a:t>自己干渉することを確認した(これはM5の成果なのかM6の成果なのか)</a:t>
+              <a:t/>
             </a:r>
             <a:endParaRPr/>
           </a:p>
@@ -9597,7 +11450,7 @@
   <p:cSld>
     <p:spTree>
       <p:nvGrpSpPr>
-        <p:cNvPr id="154" name="Shape 154"/>
+        <p:cNvPr id="159" name="Shape 159"/>
         <p:cNvGrpSpPr/>
         <p:nvPr/>
       </p:nvGrpSpPr>
@@ -9611,7 +11464,7 @@
       </p:grpSpPr>
       <p:sp>
         <p:nvSpPr>
-          <p:cNvPr id="155" name="Google Shape;155;p29"/>
+          <p:cNvPr id="160" name="Google Shape;160;p29"/>
           <p:cNvSpPr txBox="1"/>
           <p:nvPr>
             <p:ph type="title"/>
@@ -9643,11 +11496,11 @@
             </a:pPr>
             <a:r>
               <a:rPr lang="ja"/>
-              <a:t>M6：Stackelberg PPO</a:t>
-            </a:r>
-            <a:r>
-              <a:rPr lang="ja"/>
-              <a:t>によるロボット評価</a:t>
+              <a:t>M4:</a:t>
+            </a:r>
+            <a:r>
+              <a:rPr lang="ja"/>
+              <a:t>フローの説明</a:t>
             </a:r>
             <a:endParaRPr/>
           </a:p>
@@ -9655,7 +11508,7 @@
       </p:sp>
       <p:sp>
         <p:nvSpPr>
-          <p:cNvPr id="156" name="Google Shape;156;p29"/>
+          <p:cNvPr id="161" name="Google Shape;161;p29"/>
           <p:cNvSpPr txBox="1"/>
           <p:nvPr>
             <p:ph idx="1" type="body"/>
@@ -9681,69 +11534,12 @@
                 <a:spcPts val="0"/>
               </a:spcBef>
               <a:spcAft>
-                <a:spcPts val="0"/>
-              </a:spcAft>
-              <a:buNone/>
-            </a:pPr>
-            <a:r>
-              <a:rPr lang="ja"/>
-              <a:t>・なにをする工程か</a:t>
-            </a:r>
-            <a:br>
-              <a:rPr lang="ja"/>
-            </a:br>
-            <a:r>
-              <a:rPr lang="ja"/>
-              <a:t>⇒</a:t>
-            </a:r>
-            <a:r>
-              <a:rPr lang="ja"/>
-              <a:t>形（設計）と動かし方（制御）を同時に学習させ、</a:t>
-            </a:r>
-            <a:br>
-              <a:rPr lang="ja"/>
-            </a:br>
-            <a:r>
-              <a:rPr lang="ja"/>
-              <a:t>　「この形でこのタスクがどこまでできるか」を測る</a:t>
-            </a:r>
-            <a:endParaRPr/>
-          </a:p>
-          <a:p>
-            <a:pPr indent="0" lvl="0" marL="0" rtl="0" algn="l">
-              <a:spcBef>
                 <a:spcPts val="1200"/>
-              </a:spcBef>
-              <a:spcAft>
-                <a:spcPts val="1200"/>
-              </a:spcAft>
-              <a:buNone/>
-            </a:pPr>
-            <a:r>
-              <a:rPr lang="ja"/>
-              <a:t>・入出力</a:t>
-            </a:r>
-            <a:br>
-              <a:rPr lang="ja"/>
-            </a:br>
-            <a:r>
-              <a:rPr lang="ja"/>
-              <a:t>入力：</a:t>
-            </a:r>
-            <a:r>
-              <a:rPr lang="ja"/>
-              <a:t>XML ＋ タスク（到達・押し・目標位置への押し）</a:t>
-            </a:r>
-            <a:br>
-              <a:rPr lang="ja"/>
-            </a:br>
-            <a:r>
-              <a:rPr lang="ja"/>
-              <a:t>出力：</a:t>
-            </a:r>
-            <a:r>
-              <a:rPr lang="ja"/>
-              <a:t>スコア（学習曲線）・学習後の形(XML?)・方策</a:t>
+              </a:spcAft>
+              <a:buNone/>
+            </a:pPr>
+            <a:r>
+              <a:t/>
             </a:r>
             <a:endParaRPr/>
           </a:p>
@@ -9751,12 +11547,86 @@
       </p:sp>
       <p:pic>
         <p:nvPicPr>
-          <p:cNvPr id="157" name="Google Shape;157;p29"/>
+          <p:cNvPr id="162" name="Google Shape;162;p29" title="pipeline_m4.png"/>
+          <p:cNvPicPr preferRelativeResize="0"/>
+          <p:nvPr/>
+        </p:nvPicPr>
+        <p:blipFill rotWithShape="1">
+          <a:blip r:embed="rId3">
+            <a:alphaModFix/>
+          </a:blip>
+          <a:srcRect b="0" l="5486" r="4277" t="0"/>
+          <a:stretch/>
+        </p:blipFill>
+        <p:spPr>
+          <a:xfrm>
+            <a:off x="169257" y="1186306"/>
+            <a:ext cx="8805484" cy="3416399"/>
+          </a:xfrm>
+          <a:prstGeom prst="rect">
+            <a:avLst/>
+          </a:prstGeom>
+          <a:noFill/>
+          <a:ln>
+            <a:noFill/>
+          </a:ln>
+        </p:spPr>
+      </p:pic>
+      <p:sp>
+        <p:nvSpPr>
+          <p:cNvPr id="163" name="Google Shape;163;p29"/>
+          <p:cNvSpPr/>
+          <p:nvPr/>
+        </p:nvSpPr>
+        <p:spPr>
+          <a:xfrm>
+            <a:off x="5433850" y="3683400"/>
+            <a:ext cx="442800" cy="398100"/>
+          </a:xfrm>
+          <a:prstGeom prst="ellipse">
+            <a:avLst/>
+          </a:prstGeom>
+          <a:noFill/>
+          <a:ln cap="flat" cmpd="sng" w="19050">
+            <a:solidFill>
+              <a:srgbClr val="9900FF"/>
+            </a:solidFill>
+            <a:prstDash val="solid"/>
+            <a:round/>
+            <a:headEnd len="sm" w="sm" type="none"/>
+            <a:tailEnd len="sm" w="sm" type="none"/>
+          </a:ln>
+        </p:spPr>
+        <p:txBody>
+          <a:bodyPr anchorCtr="0" anchor="ctr" bIns="91425" lIns="91425" spcFirstLastPara="1" rIns="91425" wrap="square" tIns="91425">
+            <a:noAutofit/>
+          </a:bodyPr>
+          <a:lstStyle/>
+          <a:p>
+            <a:pPr indent="0" lvl="0" marL="0" rtl="0" algn="ctr">
+              <a:spcBef>
+                <a:spcPts val="0"/>
+              </a:spcBef>
+              <a:spcAft>
+                <a:spcPts val="0"/>
+              </a:spcAft>
+              <a:buNone/>
+            </a:pPr>
+            <a:r>
+              <a:t/>
+            </a:r>
+            <a:endParaRPr/>
+          </a:p>
+        </p:txBody>
+      </p:sp>
+      <p:pic>
+        <p:nvPicPr>
+          <p:cNvPr id="164" name="Google Shape;164;p29"/>
           <p:cNvPicPr preferRelativeResize="0"/>
           <p:nvPr/>
         </p:nvPicPr>
         <p:blipFill>
-          <a:blip r:embed="rId3">
+          <a:blip r:embed="rId4">
             <a:alphaModFix/>
           </a:blip>
           <a:stretch>
@@ -9765,8 +11635,35 @@
         </p:blipFill>
         <p:spPr>
           <a:xfrm>
-            <a:off x="2131352" y="3369151"/>
-            <a:ext cx="4881300" cy="1683950"/>
+            <a:off x="2954777" y="100800"/>
+            <a:ext cx="723526" cy="1051674"/>
+          </a:xfrm>
+          <a:prstGeom prst="rect">
+            <a:avLst/>
+          </a:prstGeom>
+          <a:noFill/>
+          <a:ln>
+            <a:noFill/>
+          </a:ln>
+        </p:spPr>
+      </p:pic>
+      <p:pic>
+        <p:nvPicPr>
+          <p:cNvPr id="165" name="Google Shape;165;p29"/>
+          <p:cNvPicPr preferRelativeResize="0"/>
+          <p:nvPr/>
+        </p:nvPicPr>
+        <p:blipFill rotWithShape="1">
+          <a:blip r:embed="rId5">
+            <a:alphaModFix/>
+          </a:blip>
+          <a:srcRect b="0" l="53275" r="0" t="0"/>
+          <a:stretch/>
+        </p:blipFill>
+        <p:spPr>
+          <a:xfrm>
+            <a:off x="2836243" y="2321825"/>
+            <a:ext cx="2336551" cy="1552575"/>
           </a:xfrm>
           <a:prstGeom prst="rect">
             <a:avLst/>
@@ -9790,7 +11687,7 @@
   <p:cSld>
     <p:spTree>
       <p:nvGrpSpPr>
-        <p:cNvPr id="161" name="Shape 161"/>
+        <p:cNvPr id="169" name="Shape 169"/>
         <p:cNvGrpSpPr/>
         <p:nvPr/>
       </p:nvGrpSpPr>
@@ -9804,7 +11701,7 @@
       </p:grpSpPr>
       <p:sp>
         <p:nvSpPr>
-          <p:cNvPr id="162" name="Google Shape;162;p30"/>
+          <p:cNvPr id="170" name="Google Shape;170;p30"/>
           <p:cNvSpPr txBox="1"/>
           <p:nvPr>
             <p:ph type="title"/>
@@ -9836,30 +11733,15 @@
             </a:pPr>
             <a:r>
               <a:rPr lang="ja"/>
-              <a:t>M6：フローの説明</a:t>
+              <a:t>M4：検証して確認したこと</a:t>
             </a:r>
             <a:endParaRPr/>
           </a:p>
-          <a:p>
-            <a:pPr indent="0" lvl="0" marL="0" rtl="0" algn="l">
-              <a:spcBef>
-                <a:spcPts val="0"/>
-              </a:spcBef>
-              <a:spcAft>
-                <a:spcPts val="0"/>
-              </a:spcAft>
-              <a:buNone/>
-            </a:pPr>
-            <a:r>
-              <a:t/>
-            </a:r>
-            <a:endParaRPr/>
-          </a:p>
         </p:txBody>
       </p:sp>
       <p:sp>
         <p:nvSpPr>
-          <p:cNvPr id="163" name="Google Shape;163;p30"/>
+          <p:cNvPr id="171" name="Google Shape;171;p30"/>
           <p:cNvSpPr txBox="1"/>
           <p:nvPr>
             <p:ph idx="1" type="body"/>
@@ -9891,7 +11773,7 @@
             </a:pPr>
             <a:r>
               <a:rPr lang="ja"/>
-              <a:t>①Leader が形を編集する（長さ・太さ・ギア比。リンクの数は変えない）</a:t>
+              <a:t>・長さは関節位置と一致した</a:t>
             </a:r>
             <a:endParaRPr/>
           </a:p>
@@ -9907,14 +11789,7 @@
             </a:pPr>
             <a:r>
               <a:rPr lang="ja"/>
-              <a:t>②Follower がその形で最大 1200 ステップ動かす。</a:t>
-            </a:r>
-            <a:br>
-              <a:rPr lang="ja"/>
-            </a:br>
-            <a:r>
-              <a:rPr lang="ja"/>
-              <a:t>　報酬 ＝ タスク報酬 − 制御コスト</a:t>
+              <a:t>・太さ: カプセルの外に出る頂点の割合は平均 21.4 %。直方体（OBB）から求める旧方式の 29.7 % より小さく、悪化したリンクは無い（手描き 5 例・20 リンク、系譜 9-75）</a:t>
             </a:r>
             <a:endParaRPr/>
           </a:p>
@@ -9924,50 +11799,74 @@
                 <a:spcPts val="1200"/>
               </a:spcBef>
               <a:spcAft>
-                <a:spcPts val="0"/>
-              </a:spcAft>
-              <a:buNone/>
-            </a:pPr>
-            <a:r>
-              <a:rPr lang="ja"/>
-              <a:t>③Leader の評価はFollower が得た報酬をそのまま引き継ぐ（設計中の報酬は 0）</a:t>
+                <a:spcPts val="1200"/>
+              </a:spcAft>
+              <a:buNone/>
+            </a:pPr>
+            <a:r>
+              <a:rPr lang="ja"/>
+              <a:t>・⚠ 限界: 平たい手先はカプセルで覆えず、70.9 % はみ出す（ホッケーではなくB１。いうほど平たいか？）</a:t>
             </a:r>
             <a:endParaRPr/>
           </a:p>
-          <a:p>
-            <a:pPr indent="0" lvl="0" marL="0" rtl="0" algn="l">
-              <a:spcBef>
-                <a:spcPts val="1200"/>
-              </a:spcBef>
-              <a:spcAft>
-                <a:spcPts val="0"/>
-              </a:spcAft>
-              <a:buNone/>
-            </a:pPr>
-            <a:r>
-              <a:rPr lang="ja"/>
-              <a:t>④1 epochごとに 5 万ステップ以上を集めて PPO で更新する（200 epoch）</a:t>
-            </a:r>
-            <a:endParaRPr/>
-          </a:p>
-          <a:p>
-            <a:pPr indent="0" lvl="0" marL="0" rtl="0" algn="l">
-              <a:spcBef>
-                <a:spcPts val="1200"/>
-              </a:spcBef>
-              <a:spcAft>
-                <a:spcPts val="1200"/>
-              </a:spcAft>
-              <a:buNone/>
-            </a:pPr>
-            <a:r>
-              <a:rPr lang="ja"/>
-              <a:t>⑤形の候補どうしを学習曲線の順位で比べる</a:t>
-            </a:r>
-            <a:endParaRPr/>
-          </a:p>
         </p:txBody>
       </p:sp>
+      <p:pic>
+        <p:nvPicPr>
+          <p:cNvPr id="172" name="Google Shape;172;p30" title="pipeline_m4.png"/>
+          <p:cNvPicPr preferRelativeResize="0"/>
+          <p:nvPr/>
+        </p:nvPicPr>
+        <p:blipFill>
+          <a:blip r:embed="rId3">
+            <a:alphaModFix/>
+          </a:blip>
+          <a:stretch>
+            <a:fillRect/>
+          </a:stretch>
+        </p:blipFill>
+        <p:spPr>
+          <a:xfrm>
+            <a:off x="1881275" y="3126750"/>
+            <a:ext cx="5381448" cy="1884025"/>
+          </a:xfrm>
+          <a:prstGeom prst="rect">
+            <a:avLst/>
+          </a:prstGeom>
+          <a:noFill/>
+          <a:ln>
+            <a:noFill/>
+          </a:ln>
+        </p:spPr>
+      </p:pic>
+      <p:pic>
+        <p:nvPicPr>
+          <p:cNvPr id="173" name="Google Shape;173;p30" title="B1_m1.jpeg"/>
+          <p:cNvPicPr preferRelativeResize="0"/>
+          <p:nvPr/>
+        </p:nvPicPr>
+        <p:blipFill>
+          <a:blip r:embed="rId4">
+            <a:alphaModFix/>
+          </a:blip>
+          <a:stretch>
+            <a:fillRect/>
+          </a:stretch>
+        </p:blipFill>
+        <p:spPr>
+          <a:xfrm>
+            <a:off x="232600" y="3465475"/>
+            <a:ext cx="1337326" cy="1783101"/>
+          </a:xfrm>
+          <a:prstGeom prst="rect">
+            <a:avLst/>
+          </a:prstGeom>
+          <a:noFill/>
+          <a:ln>
+            <a:noFill/>
+          </a:ln>
+        </p:spPr>
+      </p:pic>
     </p:spTree>
   </p:cSld>
   <p:clrMapOvr>
@@ -9981,7 +11880,7 @@
   <p:cSld>
     <p:spTree>
       <p:nvGrpSpPr>
-        <p:cNvPr id="167" name="Shape 167"/>
+        <p:cNvPr id="177" name="Shape 177"/>
         <p:cNvGrpSpPr/>
         <p:nvPr/>
       </p:nvGrpSpPr>
@@ -9995,7 +11894,7 @@
       </p:grpSpPr>
       <p:sp>
         <p:nvSpPr>
-          <p:cNvPr id="168" name="Google Shape;168;p31"/>
+          <p:cNvPr id="178" name="Google Shape;178;p31"/>
           <p:cNvSpPr txBox="1"/>
           <p:nvPr>
             <p:ph type="title"/>
@@ -10027,11 +11926,11 @@
             </a:pPr>
             <a:r>
               <a:rPr lang="ja"/>
-              <a:t>M6：</a:t>
-            </a:r>
-            <a:r>
-              <a:rPr lang="ja"/>
-              <a:t>検証して確認したこと</a:t>
+              <a:t>M5：</a:t>
+            </a:r>
+            <a:r>
+              <a:rPr lang="ja"/>
+              <a:t>シミュレーションモデル作成</a:t>
             </a:r>
             <a:endParaRPr/>
           </a:p>
@@ -10039,7 +11938,7 @@
       </p:sp>
       <p:sp>
         <p:nvSpPr>
-          <p:cNvPr id="169" name="Google Shape;169;p31"/>
+          <p:cNvPr id="179" name="Google Shape;179;p31"/>
           <p:cNvSpPr txBox="1"/>
           <p:nvPr>
             <p:ph idx="1" type="body"/>
@@ -10071,11 +11970,18 @@
             </a:pPr>
             <a:r>
               <a:rPr lang="ja"/>
-              <a:t>・</a:t>
-            </a:r>
-            <a:r>
-              <a:rPr lang="ja"/>
-              <a:t>タスクごとに違う形に収束した(3 task × 2 seed)</a:t>
+              <a:t>・なにをする工程か</a:t>
+            </a:r>
+            <a:br>
+              <a:rPr lang="ja"/>
+            </a:br>
+            <a:r>
+              <a:rPr lang="ja"/>
+              <a:t>⇒</a:t>
+            </a:r>
+            <a:r>
+              <a:rPr lang="ja"/>
+              <a:t>パラメータから、学習で使えるロボットモデルファイルを作る</a:t>
             </a:r>
             <a:endParaRPr/>
           </a:p>
@@ -10085,37 +11991,35 @@
                 <a:spcPts val="1200"/>
               </a:spcBef>
               <a:spcAft>
-                <a:spcPts val="0"/>
-              </a:spcAft>
-              <a:buNone/>
-            </a:pPr>
-            <a:r>
-              <a:rPr lang="ja"/>
-              <a:t>・</a:t>
-            </a:r>
-            <a:r>
-              <a:rPr lang="ja"/>
-              <a:t>順位がタスクで逆になった(あるタスクでは高スコアだった長いアームロボットが、別のタスクでは低スコアになった。つまり長いロボット=有利という話ではない)</a:t>
-            </a:r>
-            <a:endParaRPr/>
-          </a:p>
-          <a:p>
-            <a:pPr indent="0" lvl="0" marL="0" rtl="0" algn="l">
-              <a:spcBef>
                 <a:spcPts val="1200"/>
-              </a:spcBef>
-              <a:spcAft>
-                <a:spcPts val="1200"/>
-              </a:spcAft>
-              <a:buNone/>
-            </a:pPr>
-            <a:r>
-              <a:rPr lang="ja"/>
-              <a:t>・パーツ同士が</a:t>
-            </a:r>
-            <a:r>
-              <a:rPr lang="ja"/>
-              <a:t>自己干渉することを確認した</a:t>
+              </a:spcAft>
+              <a:buNone/>
+            </a:pPr>
+            <a:r>
+              <a:rPr lang="ja"/>
+              <a:t>・入出力</a:t>
+            </a:r>
+            <a:br>
+              <a:rPr lang="ja"/>
+            </a:br>
+            <a:r>
+              <a:rPr lang="ja"/>
+              <a:t>入力：topology.json</a:t>
+            </a:r>
+            <a:br>
+              <a:rPr lang="ja"/>
+            </a:br>
+            <a:r>
+              <a:rPr lang="ja"/>
+              <a:t>出力：XML(Mujoco</a:t>
+            </a:r>
+            <a:r>
+              <a:rPr lang="ja"/>
+              <a:t>互換。choreonoidが読み込むときに変換する</a:t>
+            </a:r>
+            <a:r>
+              <a:rPr lang="ja"/>
+              <a:t>)</a:t>
             </a:r>
             <a:endParaRPr/>
           </a:p>
@@ -10179,12 +12083,7 @@
               <a:buNone/>
             </a:pPr>
             <a:r>
-              <a:rPr lang="ja"/>
-              <a:t>M1</a:t>
-            </a:r>
-            <a:r>
-              <a:rPr lang="ja"/>
-              <a:t>：画像整形(Gemini API)</a:t>
+              <a:t/>
             </a:r>
             <a:endParaRPr/>
           </a:p>
@@ -10218,57 +12117,12 @@
                 <a:spcPts val="0"/>
               </a:spcBef>
               <a:spcAft>
-                <a:spcPts val="0"/>
-              </a:spcAft>
-              <a:buNone/>
-            </a:pPr>
-            <a:r>
-              <a:rPr lang="ja"/>
-              <a:t>・なにをする工程か</a:t>
-            </a:r>
-            <a:br>
-              <a:rPr lang="ja"/>
-            </a:br>
-            <a:r>
-              <a:rPr lang="ja"/>
-              <a:t>⇒手描きスケッチを、後の3D化とセグメンテーションで扱いやすい</a:t>
-            </a:r>
-            <a:br>
-              <a:rPr lang="ja"/>
-            </a:br>
-            <a:r>
-              <a:rPr lang="ja"/>
-              <a:t>「CAD風スケッチ」の画像に描き直す</a:t>
-            </a:r>
-            <a:endParaRPr/>
-          </a:p>
-          <a:p>
-            <a:pPr indent="0" lvl="0" marL="0" rtl="0" algn="l">
-              <a:spcBef>
                 <a:spcPts val="1200"/>
-              </a:spcBef>
-              <a:spcAft>
-                <a:spcPts val="1200"/>
-              </a:spcAft>
-              <a:buNone/>
-            </a:pPr>
-            <a:r>
-              <a:rPr lang="ja"/>
-              <a:t>・入出力</a:t>
-            </a:r>
-            <a:br>
-              <a:rPr lang="ja"/>
-            </a:br>
-            <a:r>
-              <a:rPr lang="ja"/>
-              <a:t>入力：手描きスケッチ(png)+固定プロンプト</a:t>
-            </a:r>
-            <a:br>
-              <a:rPr lang="ja"/>
-            </a:br>
-            <a:r>
-              <a:rPr lang="ja"/>
-              <a:t>出力：整形済み画像(png)</a:t>
+              </a:spcAft>
+              <a:buNone/>
+            </a:pPr>
+            <a:r>
+              <a:t/>
             </a:r>
             <a:endParaRPr/>
           </a:p>
@@ -10290,8 +12144,8 @@
         </p:blipFill>
         <p:spPr>
           <a:xfrm>
-            <a:off x="5250101" y="2632300"/>
-            <a:ext cx="3626799" cy="2128775"/>
+            <a:off x="1212912" y="1152475"/>
+            <a:ext cx="6718176" cy="3684576"/>
           </a:xfrm>
           <a:prstGeom prst="rect">
             <a:avLst/>
@@ -10315,7 +12169,7 @@
   <p:cSld>
     <p:spTree>
       <p:nvGrpSpPr>
-        <p:cNvPr id="173" name="Shape 173"/>
+        <p:cNvPr id="183" name="Shape 183"/>
         <p:cNvGrpSpPr/>
         <p:nvPr/>
       </p:nvGrpSpPr>
@@ -10329,7 +12183,7 @@
       </p:grpSpPr>
       <p:sp>
         <p:nvSpPr>
-          <p:cNvPr id="174" name="Google Shape;174;p32"/>
+          <p:cNvPr id="184" name="Google Shape;184;p32"/>
           <p:cNvSpPr txBox="1"/>
           <p:nvPr>
             <p:ph type="title"/>
@@ -10361,19 +12215,30 @@
             </a:pPr>
             <a:r>
               <a:rPr lang="ja"/>
-              <a:t>M7：</a:t>
-            </a:r>
-            <a:r>
-              <a:rPr lang="ja"/>
-              <a:t>形態診断</a:t>
+              <a:t>M5：フローの説明</a:t>
             </a:r>
             <a:endParaRPr/>
           </a:p>
+          <a:p>
+            <a:pPr indent="0" lvl="0" marL="0" rtl="0" algn="l">
+              <a:spcBef>
+                <a:spcPts val="0"/>
+              </a:spcBef>
+              <a:spcAft>
+                <a:spcPts val="0"/>
+              </a:spcAft>
+              <a:buNone/>
+            </a:pPr>
+            <a:r>
+              <a:t/>
+            </a:r>
+            <a:endParaRPr/>
+          </a:p>
         </p:txBody>
       </p:sp>
       <p:sp>
         <p:nvSpPr>
-          <p:cNvPr id="175" name="Google Shape;175;p32"/>
+          <p:cNvPr id="185" name="Google Shape;185;p32"/>
           <p:cNvSpPr txBox="1"/>
           <p:nvPr>
             <p:ph idx="1" type="body"/>
@@ -10405,67 +12270,122 @@
             </a:pPr>
             <a:r>
               <a:rPr lang="ja"/>
-              <a:t>・なにをする工程か</a:t>
+              <a:t>①</a:t>
+            </a:r>
+            <a:r>
+              <a:rPr lang="ja"/>
+              <a:t>各リンクをカプセルで近似する</a:t>
+            </a:r>
+            <a:endParaRPr/>
+          </a:p>
+          <a:p>
+            <a:pPr indent="0" lvl="0" marL="0" rtl="0" algn="l">
+              <a:spcBef>
+                <a:spcPts val="1200"/>
+              </a:spcBef>
+              <a:spcAft>
+                <a:spcPts val="0"/>
+              </a:spcAft>
+              <a:buNone/>
+            </a:pPr>
+            <a:r>
+              <a:rPr lang="ja"/>
+              <a:t>②</a:t>
+            </a:r>
+            <a:r>
+              <a:rPr lang="ja"/>
+              <a:t>子リンクを親リンクの先端に取り付ける</a:t>
+            </a:r>
+            <a:endParaRPr/>
+          </a:p>
+          <a:p>
+            <a:pPr indent="0" lvl="0" marL="0" rtl="0" algn="l">
+              <a:spcBef>
+                <a:spcPts val="1200"/>
+              </a:spcBef>
+              <a:spcAft>
+                <a:spcPts val="0"/>
+              </a:spcAft>
+              <a:buNone/>
+            </a:pPr>
+            <a:r>
+              <a:rPr lang="ja"/>
+              <a:t>③</a:t>
+            </a:r>
+            <a:r>
+              <a:rPr lang="ja"/>
+              <a:t>関節軸を割り当てる</a:t>
             </a:r>
             <a:br>
               <a:rPr lang="ja"/>
             </a:br>
             <a:r>
               <a:rPr lang="ja"/>
-              <a:t>⇒「向かない」とだけ返すのではなく、原因と直し方を返す。</a:t>
+              <a:t>　(既定の縦型: 根元はヨー、それより先はピッチ。関節ごとの指定もできる)</a:t>
             </a:r>
             <a:br>
               <a:rPr lang="ja"/>
             </a:br>
             <a:r>
               <a:rPr lang="ja"/>
-              <a:t>　生成 AI は使わず、閾値の判定と決まった文面で返す</a:t>
-            </a:r>
-            <a:r>
-              <a:rPr lang="ja"/>
-              <a:t>。</a:t>
-            </a:r>
-            <a:br>
-              <a:rPr lang="ja"/>
-            </a:br>
-            <a:r>
-              <a:rPr lang="ja"/>
-              <a:t>　（学習を回すまでもなく失敗するとわかっているものを弾くパターンもある）</a:t>
+              <a:t>　⇒</a:t>
+            </a:r>
+            <a:r>
+              <a:rPr b="1" lang="ja"/>
+              <a:t>※関節軸は決め打ちで決定しているということ(研究スコープ外)</a:t>
+            </a:r>
+            <a:endParaRPr b="1"/>
+          </a:p>
+          <a:p>
+            <a:pPr indent="0" lvl="0" marL="0" rtl="0" algn="l">
+              <a:spcBef>
+                <a:spcPts val="1200"/>
+              </a:spcBef>
+              <a:spcAft>
+                <a:spcPts val="1200"/>
+              </a:spcAft>
+              <a:buNone/>
+            </a:pPr>
+            <a:r>
+              <a:rPr lang="ja"/>
+              <a:t>④ギア比</a:t>
+            </a:r>
+            <a:r>
+              <a:rPr lang="ja"/>
+              <a:t>つきのモーターをつける</a:t>
             </a:r>
             <a:endParaRPr/>
           </a:p>
-          <a:p>
-            <a:pPr indent="0" lvl="0" marL="0" rtl="0" algn="l">
-              <a:spcBef>
-                <a:spcPts val="1200"/>
-              </a:spcBef>
-              <a:spcAft>
-                <a:spcPts val="1200"/>
-              </a:spcAft>
-              <a:buNone/>
-            </a:pPr>
-            <a:r>
-              <a:rPr lang="ja"/>
-              <a:t>・入出力</a:t>
-            </a:r>
-            <a:br>
-              <a:rPr lang="ja"/>
-            </a:br>
-            <a:r>
-              <a:rPr lang="ja"/>
-              <a:t>入力：XML ＋ タスク（到達・押し・目標位置への押し）</a:t>
-            </a:r>
-            <a:br>
-              <a:rPr lang="ja"/>
-            </a:br>
-            <a:r>
-              <a:rPr lang="ja"/>
-              <a:t>出力：スコア（学習曲線）・学習後の形(XML?)・方策</a:t>
-            </a:r>
-            <a:endParaRPr/>
-          </a:p>
         </p:txBody>
       </p:sp>
+      <p:pic>
+        <p:nvPicPr>
+          <p:cNvPr id="186" name="Google Shape;186;p32" title="pipeline_m5.png"/>
+          <p:cNvPicPr preferRelativeResize="0"/>
+          <p:nvPr/>
+        </p:nvPicPr>
+        <p:blipFill>
+          <a:blip r:embed="rId3">
+            <a:alphaModFix/>
+          </a:blip>
+          <a:stretch>
+            <a:fillRect/>
+          </a:stretch>
+        </p:blipFill>
+        <p:spPr>
+          <a:xfrm>
+            <a:off x="5110325" y="3110475"/>
+            <a:ext cx="3775599" cy="2033024"/>
+          </a:xfrm>
+          <a:prstGeom prst="rect">
+            <a:avLst/>
+          </a:prstGeom>
+          <a:noFill/>
+          <a:ln>
+            <a:noFill/>
+          </a:ln>
+        </p:spPr>
+      </p:pic>
     </p:spTree>
   </p:cSld>
   <p:clrMapOvr>
@@ -10479,7 +12399,7 @@
   <p:cSld>
     <p:spTree>
       <p:nvGrpSpPr>
-        <p:cNvPr id="179" name="Shape 179"/>
+        <p:cNvPr id="190" name="Shape 190"/>
         <p:cNvGrpSpPr/>
         <p:nvPr/>
       </p:nvGrpSpPr>
@@ -10493,7 +12413,7 @@
       </p:grpSpPr>
       <p:sp>
         <p:nvSpPr>
-          <p:cNvPr id="180" name="Google Shape;180;p33"/>
+          <p:cNvPr id="191" name="Google Shape;191;p33"/>
           <p:cNvSpPr txBox="1"/>
           <p:nvPr>
             <p:ph type="title"/>
@@ -10525,34 +12445,19 @@
             </a:pPr>
             <a:r>
               <a:rPr lang="ja"/>
-              <a:t>M7：フ</a:t>
-            </a:r>
-            <a:r>
-              <a:rPr lang="ja"/>
-              <a:t>ローの説明</a:t>
+              <a:t>M5</a:t>
+            </a:r>
+            <a:r>
+              <a:rPr lang="ja"/>
+              <a:t>：フローの説明</a:t>
             </a:r>
             <a:endParaRPr/>
           </a:p>
-          <a:p>
-            <a:pPr indent="0" lvl="0" marL="0" rtl="0" algn="l">
-              <a:spcBef>
-                <a:spcPts val="0"/>
-              </a:spcBef>
-              <a:spcAft>
-                <a:spcPts val="0"/>
-              </a:spcAft>
-              <a:buNone/>
-            </a:pPr>
-            <a:r>
-              <a:t/>
-            </a:r>
-            <a:endParaRPr/>
-          </a:p>
         </p:txBody>
       </p:sp>
       <p:sp>
         <p:nvSpPr>
-          <p:cNvPr id="181" name="Google Shape;181;p33"/>
+          <p:cNvPr id="192" name="Google Shape;192;p33"/>
           <p:cNvSpPr txBox="1"/>
           <p:nvPr>
             <p:ph idx="1" type="body"/>
@@ -10578,98 +12483,45 @@
                 <a:spcPts val="0"/>
               </a:spcBef>
               <a:spcAft>
-                <a:spcPts val="0"/>
-              </a:spcAft>
-              <a:buNone/>
-            </a:pPr>
-            <a:r>
-              <a:rPr lang="ja"/>
-              <a:t>①</a:t>
-            </a:r>
-            <a:r>
-              <a:rPr lang="ja"/>
-              <a:t>第 1 層（学習前・約 1 秒）: 幾何だけで届くかを判定する。届かなければ棄却し「腕を N 倍に」と返す（切り上げ・余裕なし）</a:t>
+                <a:spcPts val="1200"/>
+              </a:spcAft>
+              <a:buNone/>
+            </a:pPr>
+            <a:r>
+              <a:t/>
             </a:r>
             <a:endParaRPr/>
           </a:p>
-          <a:p>
-            <a:pPr indent="0" lvl="0" marL="0" rtl="0" algn="l">
-              <a:spcBef>
-                <a:spcPts val="1200"/>
-              </a:spcBef>
-              <a:spcAft>
-                <a:spcPts val="0"/>
-              </a:spcAft>
-              <a:buNone/>
-            </a:pPr>
-            <a:r>
-              <a:rPr lang="ja"/>
-              <a:t>②棄却されたら、N 倍した XML を自動で作ってもう一度判定する</a:t>
-            </a:r>
-            <a:endParaRPr/>
-          </a:p>
-          <a:p>
-            <a:pPr indent="0" lvl="0" marL="0" rtl="0" algn="l">
-              <a:spcBef>
-                <a:spcPts val="1200"/>
-              </a:spcBef>
-              <a:spcAft>
-                <a:spcPts val="0"/>
-              </a:spcAft>
-              <a:buNone/>
-            </a:pPr>
-            <a:r>
-              <a:rPr lang="ja"/>
-              <a:t>③</a:t>
-            </a:r>
-            <a:r>
-              <a:rPr lang="ja"/>
-              <a:t>第 2 層（学習後）: ギア比・太さが探索範囲の端に張り付いていないかを見る</a:t>
-            </a:r>
-            <a:endParaRPr/>
-          </a:p>
-          <a:p>
-            <a:pPr indent="0" lvl="0" marL="0" rtl="0" algn="l">
-              <a:spcBef>
-                <a:spcPts val="1200"/>
-              </a:spcBef>
-              <a:spcAft>
-                <a:spcPts val="0"/>
-              </a:spcAft>
-              <a:buNone/>
-            </a:pPr>
-            <a:r>
-              <a:rPr lang="ja"/>
-              <a:t>④</a:t>
-            </a:r>
-            <a:r>
-              <a:rPr lang="ja"/>
-              <a:t>第 3 層（学習後）: 1 話動かし、戦略（一撃で飛ばす・押す・静止など）と、使っていない関節を報告する</a:t>
-            </a:r>
-            <a:endParaRPr/>
-          </a:p>
-          <a:p>
-            <a:pPr indent="0" lvl="0" marL="0" rtl="0" algn="l">
-              <a:spcBef>
-                <a:spcPts val="1200"/>
-              </a:spcBef>
-              <a:spcAft>
-                <a:spcPts val="1200"/>
-              </a:spcAft>
-              <a:buNone/>
-            </a:pPr>
-            <a:r>
-              <a:rPr lang="ja"/>
-              <a:t>⑤</a:t>
-            </a:r>
-            <a:r>
-              <a:rPr lang="ja"/>
-              <a:t>「この形ではできない」と断定するのは第 1 層だけ。第 2・3 層は報告にとどめる</a:t>
-            </a:r>
-            <a:endParaRPr/>
-          </a:p>
         </p:txBody>
       </p:sp>
+      <p:pic>
+        <p:nvPicPr>
+          <p:cNvPr id="193" name="Google Shape;193;p33" title="pipeline_m5.png"/>
+          <p:cNvPicPr preferRelativeResize="0"/>
+          <p:nvPr/>
+        </p:nvPicPr>
+        <p:blipFill>
+          <a:blip r:embed="rId3">
+            <a:alphaModFix/>
+          </a:blip>
+          <a:stretch>
+            <a:fillRect/>
+          </a:stretch>
+        </p:blipFill>
+        <p:spPr>
+          <a:xfrm>
+            <a:off x="991425" y="1152476"/>
+            <a:ext cx="7161151" cy="3856025"/>
+          </a:xfrm>
+          <a:prstGeom prst="rect">
+            <a:avLst/>
+          </a:prstGeom>
+          <a:noFill/>
+          <a:ln>
+            <a:noFill/>
+          </a:ln>
+        </p:spPr>
+      </p:pic>
     </p:spTree>
   </p:cSld>
   <p:clrMapOvr>
@@ -10683,7 +12535,7 @@
   <p:cSld>
     <p:spTree>
       <p:nvGrpSpPr>
-        <p:cNvPr id="185" name="Shape 185"/>
+        <p:cNvPr id="197" name="Shape 197"/>
         <p:cNvGrpSpPr/>
         <p:nvPr/>
       </p:nvGrpSpPr>
@@ -10697,7 +12549,7 @@
       </p:grpSpPr>
       <p:sp>
         <p:nvSpPr>
-          <p:cNvPr id="186" name="Google Shape;186;p34"/>
+          <p:cNvPr id="198" name="Google Shape;198;p34"/>
           <p:cNvSpPr txBox="1"/>
           <p:nvPr>
             <p:ph type="title"/>
@@ -10729,11 +12581,7 @@
             </a:pPr>
             <a:r>
               <a:rPr lang="ja"/>
-              <a:t>M7：検証</a:t>
-            </a:r>
-            <a:r>
-              <a:rPr lang="ja"/>
-              <a:t>して確認したこと</a:t>
+              <a:t>M5：検証して確認したこと</a:t>
             </a:r>
             <a:endParaRPr/>
           </a:p>
@@ -10741,7 +12589,7 @@
       </p:sp>
       <p:sp>
         <p:nvSpPr>
-          <p:cNvPr id="187" name="Google Shape;187;p34"/>
+          <p:cNvPr id="199" name="Google Shape;199;p34"/>
           <p:cNvSpPr txBox="1"/>
           <p:nvPr>
             <p:ph idx="1" type="body"/>
@@ -10758,7 +12606,7 @@
         </p:spPr>
         <p:txBody>
           <a:bodyPr anchorCtr="0" anchor="t" bIns="91425" lIns="91425" spcFirstLastPara="1" rIns="91425" wrap="square" tIns="91425">
-            <a:normAutofit fontScale="85000" lnSpcReduction="20000"/>
+            <a:normAutofit/>
           </a:bodyPr>
           <a:lstStyle/>
           <a:p>
@@ -10773,15 +12621,11 @@
             </a:pPr>
             <a:r>
               <a:rPr lang="ja"/>
-              <a:t>・総合判定が実測と 6/6 一致した(</a:t>
-            </a:r>
-            <a:r>
-              <a:rPr lang="ja"/>
-              <a:t>どういうこと？</a:t>
-            </a:r>
-            <a:r>
-              <a:rPr lang="ja"/>
-              <a:t>)</a:t>
+              <a:t>・</a:t>
+            </a:r>
+            <a:r>
+              <a:rPr lang="ja"/>
+              <a:t>モデル上のリーチと実際のリーチが一致した</a:t>
             </a:r>
             <a:endParaRPr/>
           </a:p>
@@ -10797,7 +12641,11 @@
             </a:pPr>
             <a:r>
               <a:rPr lang="ja"/>
-              <a:t>・第 1 層の助言（1.99 倍）に従うと、−396.92 → −0.33 / −0.27 に改善した(なんの値？どのタスク？)</a:t>
+              <a:t>・</a:t>
+            </a:r>
+            <a:r>
+              <a:rPr lang="ja"/>
+              <a:t>関節軸も正しい</a:t>
             </a:r>
             <a:endParaRPr/>
           </a:p>
@@ -10807,61 +12655,13 @@
                 <a:spcPts val="1200"/>
               </a:spcBef>
               <a:spcAft>
-                <a:spcPts val="0"/>
-              </a:spcAft>
-              <a:buNone/>
-            </a:pPr>
-            <a:r>
-              <a:rPr lang="ja"/>
-              <a:t>・余裕を上乗せすると成績は単調に悪くなる→ 余裕なしの設計にした根拠(どういうこと？)</a:t>
-            </a:r>
-            <a:endParaRPr/>
-          </a:p>
-          <a:p>
-            <a:pPr indent="0" lvl="0" marL="0" rtl="0" algn="l">
-              <a:spcBef>
                 <a:spcPts val="1200"/>
-              </a:spcBef>
-              <a:spcAft>
-                <a:spcPts val="0"/>
-              </a:spcAft>
-              <a:buNone/>
-            </a:pPr>
-            <a:r>
-              <a:rPr lang="ja"/>
-              <a:t>・第 3 層の助言どおりに関節を固定しても成績は落ちない⇒つまり効率化できてよかったねってこと</a:t>
-            </a:r>
-            <a:endParaRPr/>
-          </a:p>
-          <a:p>
-            <a:pPr indent="0" lvl="0" marL="0" rtl="0" algn="l">
-              <a:spcBef>
-                <a:spcPts val="1200"/>
-              </a:spcBef>
-              <a:spcAft>
-                <a:spcPts val="0"/>
-              </a:spcAft>
-              <a:buNone/>
-            </a:pPr>
-            <a:r>
-              <a:rPr lang="ja"/>
-              <a:t>⚠ 第 2 層の判定だけでは、良い方にも悪い方にも誤る（系譜 9-10）。閾値は較正していない（系譜 9-70）⇒詳細も知らないし原因も不明</a:t>
-            </a:r>
-            <a:endParaRPr/>
-          </a:p>
-          <a:p>
-            <a:pPr indent="0" lvl="0" marL="0" rtl="0" algn="l">
-              <a:spcBef>
-                <a:spcPts val="1200"/>
-              </a:spcBef>
-              <a:spcAft>
-                <a:spcPts val="1200"/>
-              </a:spcAft>
-              <a:buNone/>
-            </a:pPr>
-            <a:r>
-              <a:rPr lang="ja"/>
-              <a:t>⚠ パイプラインが出した不適合な形を、助言で直して学習で達成まで持っていった通しの例はまだ無い⇒これからやる予定かもしれない...（スケジュール的に無理そうだったら、軽微な修正できました！だけにする）</a:t>
+              </a:spcAft>
+              <a:buNone/>
+            </a:pPr>
+            <a:r>
+              <a:rPr lang="ja"/>
+              <a:t>・モデルや環境に不備があって実行に入れないときは、エラーで止まる</a:t>
             </a:r>
             <a:endParaRPr/>
           </a:p>
@@ -10880,7 +12680,7 @@
   <p:cSld>
     <p:spTree>
       <p:nvGrpSpPr>
-        <p:cNvPr id="191" name="Shape 191"/>
+        <p:cNvPr id="203" name="Shape 203"/>
         <p:cNvGrpSpPr/>
         <p:nvPr/>
       </p:nvGrpSpPr>
@@ -10894,7 +12694,7 @@
       </p:grpSpPr>
       <p:sp>
         <p:nvSpPr>
-          <p:cNvPr id="192" name="Google Shape;192;p35"/>
+          <p:cNvPr id="204" name="Google Shape;204;p35"/>
           <p:cNvSpPr txBox="1"/>
           <p:nvPr>
             <p:ph type="title"/>
@@ -10926,11 +12726,11 @@
             </a:pPr>
             <a:r>
               <a:rPr lang="ja"/>
-              <a:t>M7:</a:t>
-            </a:r>
-            <a:r>
-              <a:rPr lang="ja"/>
-              <a:t>の棄却の判定閾値とアドバイス表</a:t>
+              <a:t>M6：Stackelberg PPO</a:t>
+            </a:r>
+            <a:r>
+              <a:rPr lang="ja"/>
+              <a:t>によるロボット評価</a:t>
             </a:r>
             <a:endParaRPr/>
           </a:p>
@@ -10938,7 +12738,7 @@
       </p:sp>
       <p:sp>
         <p:nvSpPr>
-          <p:cNvPr id="193" name="Google Shape;193;p35"/>
+          <p:cNvPr id="205" name="Google Shape;205;p35"/>
           <p:cNvSpPr txBox="1"/>
           <p:nvPr>
             <p:ph idx="1" type="body"/>
@@ -10964,12 +12764,73 @@
                 <a:spcPts val="0"/>
               </a:spcBef>
               <a:spcAft>
+                <a:spcPts val="0"/>
+              </a:spcAft>
+              <a:buNone/>
+            </a:pPr>
+            <a:r>
+              <a:rPr lang="ja"/>
+              <a:t>・なにをする工程か</a:t>
+            </a:r>
+            <a:br>
+              <a:rPr lang="ja"/>
+            </a:br>
+            <a:r>
+              <a:rPr lang="ja"/>
+              <a:t>⇒</a:t>
+            </a:r>
+            <a:r>
+              <a:rPr lang="ja"/>
+              <a:t>形（設計）と動かし方（制御）を同時に学習させ、</a:t>
+            </a:r>
+            <a:br>
+              <a:rPr lang="ja"/>
+            </a:br>
+            <a:r>
+              <a:rPr lang="ja"/>
+              <a:t>　「この形でこのタスクがどこまでできるか」を測る</a:t>
+            </a:r>
+            <a:endParaRPr/>
+          </a:p>
+          <a:p>
+            <a:pPr indent="0" lvl="0" marL="0" rtl="0" algn="l">
+              <a:spcBef>
                 <a:spcPts val="1200"/>
-              </a:spcAft>
-              <a:buNone/>
-            </a:pPr>
-            <a:r>
-              <a:t/>
+              </a:spcBef>
+              <a:spcAft>
+                <a:spcPts val="1200"/>
+              </a:spcAft>
+              <a:buNone/>
+            </a:pPr>
+            <a:r>
+              <a:rPr lang="ja"/>
+              <a:t>・入出力</a:t>
+            </a:r>
+            <a:br>
+              <a:rPr lang="ja"/>
+            </a:br>
+            <a:r>
+              <a:rPr lang="ja"/>
+              <a:t>入力：</a:t>
+            </a:r>
+            <a:r>
+              <a:rPr lang="ja"/>
+              <a:t>XML ＋ タスク（到達・押し・目標位置への押し）</a:t>
+            </a:r>
+            <a:br>
+              <a:rPr lang="ja"/>
+            </a:br>
+            <a:r>
+              <a:rPr lang="ja"/>
+              <a:t>出力：</a:t>
+            </a:r>
+            <a:r>
+              <a:rPr lang="ja"/>
+              <a:t>スコア（学習曲線）・学習後の形,方策</a:t>
+            </a:r>
+            <a:r>
+              <a:rPr lang="ja"/>
+              <a:t>(best.p)</a:t>
             </a:r>
             <a:endParaRPr/>
           </a:p>
@@ -10977,7 +12838,7 @@
       </p:sp>
       <p:pic>
         <p:nvPicPr>
-          <p:cNvPr id="194" name="Google Shape;194;p35"/>
+          <p:cNvPr id="206" name="Google Shape;206;p35"/>
           <p:cNvPicPr preferRelativeResize="0"/>
           <p:nvPr/>
         </p:nvPicPr>
@@ -10991,8 +12852,8 @@
         </p:blipFill>
         <p:spPr>
           <a:xfrm>
-            <a:off x="0" y="1456430"/>
-            <a:ext cx="9144003" cy="3170040"/>
+            <a:off x="2131352" y="3369151"/>
+            <a:ext cx="4881300" cy="1683950"/>
           </a:xfrm>
           <a:prstGeom prst="rect">
             <a:avLst/>
@@ -11016,7 +12877,7 @@
   <p:cSld>
     <p:spTree>
       <p:nvGrpSpPr>
-        <p:cNvPr id="198" name="Shape 198"/>
+        <p:cNvPr id="210" name="Shape 210"/>
         <p:cNvGrpSpPr/>
         <p:nvPr/>
       </p:nvGrpSpPr>
@@ -11030,7 +12891,7 @@
       </p:grpSpPr>
       <p:sp>
         <p:nvSpPr>
-          <p:cNvPr id="199" name="Google Shape;199;p36"/>
+          <p:cNvPr id="211" name="Google Shape;211;p36"/>
           <p:cNvSpPr txBox="1"/>
           <p:nvPr>
             <p:ph type="title"/>
@@ -11062,19 +12923,30 @@
             </a:pPr>
             <a:r>
               <a:rPr lang="ja"/>
-              <a:t>M7</a:t>
-            </a:r>
-            <a:r>
-              <a:rPr lang="ja"/>
-              <a:t>：閉ループの概要</a:t>
+              <a:t>M6：フローの説明</a:t>
             </a:r>
             <a:endParaRPr/>
           </a:p>
+          <a:p>
+            <a:pPr indent="0" lvl="0" marL="0" rtl="0" algn="l">
+              <a:spcBef>
+                <a:spcPts val="0"/>
+              </a:spcBef>
+              <a:spcAft>
+                <a:spcPts val="0"/>
+              </a:spcAft>
+              <a:buNone/>
+            </a:pPr>
+            <a:r>
+              <a:t/>
+            </a:r>
+            <a:endParaRPr/>
+          </a:p>
         </p:txBody>
       </p:sp>
       <p:sp>
         <p:nvSpPr>
-          <p:cNvPr id="200" name="Google Shape;200;p36"/>
+          <p:cNvPr id="212" name="Google Shape;212;p36"/>
           <p:cNvSpPr txBox="1"/>
           <p:nvPr>
             <p:ph idx="1" type="body"/>
@@ -11100,45 +12972,105 @@
                 <a:spcPts val="0"/>
               </a:spcBef>
               <a:spcAft>
+                <a:spcPts val="0"/>
+              </a:spcAft>
+              <a:buNone/>
+            </a:pPr>
+            <a:r>
+              <a:rPr lang="ja"/>
+              <a:t>①Leader が形を編集する（長さ・太さ・ギア比。リンクの数は変えない）</a:t>
+            </a:r>
+            <a:endParaRPr/>
+          </a:p>
+          <a:p>
+            <a:pPr indent="0" lvl="0" marL="0" rtl="0" algn="l">
+              <a:spcBef>
                 <a:spcPts val="1200"/>
-              </a:spcAft>
-              <a:buNone/>
-            </a:pPr>
-            <a:r>
-              <a:t/>
+              </a:spcBef>
+              <a:spcAft>
+                <a:spcPts val="0"/>
+              </a:spcAft>
+              <a:buNone/>
+            </a:pPr>
+            <a:r>
+              <a:rPr lang="ja"/>
+              <a:t>②Follower がその形で最大 1200 ステップ動かす</a:t>
+            </a:r>
+            <a:br>
+              <a:rPr lang="ja"/>
+            </a:br>
+            <a:r>
+              <a:rPr lang="ja"/>
+              <a:t>　報酬 ＝ タスク報酬 − 制御コスト</a:t>
             </a:r>
             <a:endParaRPr/>
           </a:p>
+          <a:p>
+            <a:pPr indent="0" lvl="0" marL="0" rtl="0" algn="l">
+              <a:spcBef>
+                <a:spcPts val="1200"/>
+              </a:spcBef>
+              <a:spcAft>
+                <a:spcPts val="0"/>
+              </a:spcAft>
+              <a:buNone/>
+            </a:pPr>
+            <a:r>
+              <a:rPr lang="ja"/>
+              <a:t>③Leader の評価はFollower が得た報酬をそのまま引き継ぐ（設計中の報酬は 0）</a:t>
+            </a:r>
+            <a:endParaRPr/>
+          </a:p>
+          <a:p>
+            <a:pPr indent="0" lvl="0" marL="0" rtl="0" algn="l">
+              <a:spcBef>
+                <a:spcPts val="1200"/>
+              </a:spcBef>
+              <a:spcAft>
+                <a:spcPts val="0"/>
+              </a:spcAft>
+              <a:buNone/>
+            </a:pPr>
+            <a:r>
+              <a:rPr lang="ja"/>
+              <a:t>④1 epochごとに 5 万ステップ以上を集めて PPO で更新する（200 epoch）</a:t>
+            </a:r>
+            <a:endParaRPr/>
+          </a:p>
+          <a:p>
+            <a:pPr indent="0" lvl="0" marL="0" rtl="0" algn="l">
+              <a:spcBef>
+                <a:spcPts val="1200"/>
+              </a:spcBef>
+              <a:spcAft>
+                <a:spcPts val="0"/>
+              </a:spcAft>
+              <a:buNone/>
+            </a:pPr>
+            <a:r>
+              <a:rPr lang="ja"/>
+              <a:t>⑤形の候補どうしを学習曲線の順位で比べる</a:t>
+            </a:r>
+            <a:endParaRPr/>
+          </a:p>
+          <a:p>
+            <a:pPr indent="0" lvl="0" marL="0" rtl="0" algn="l">
+              <a:spcBef>
+                <a:spcPts val="1200"/>
+              </a:spcBef>
+              <a:spcAft>
+                <a:spcPts val="1200"/>
+              </a:spcAft>
+              <a:buNone/>
+            </a:pPr>
+            <a:r>
+              <a:rPr lang="ja"/>
+              <a:t>⑥最良の方策と形をチェックポイントに保存し、学習曲線をログに残す</a:t>
+            </a:r>
+            <a:endParaRPr/>
+          </a:p>
         </p:txBody>
       </p:sp>
-      <p:pic>
-        <p:nvPicPr>
-          <p:cNvPr id="201" name="Google Shape;201;p36"/>
-          <p:cNvPicPr preferRelativeResize="0"/>
-          <p:nvPr/>
-        </p:nvPicPr>
-        <p:blipFill>
-          <a:blip r:embed="rId3">
-            <a:alphaModFix/>
-          </a:blip>
-          <a:stretch>
-            <a:fillRect/>
-          </a:stretch>
-        </p:blipFill>
-        <p:spPr>
-          <a:xfrm>
-            <a:off x="0" y="1855143"/>
-            <a:ext cx="9144003" cy="1433215"/>
-          </a:xfrm>
-          <a:prstGeom prst="rect">
-            <a:avLst/>
-          </a:prstGeom>
-          <a:noFill/>
-          <a:ln>
-            <a:noFill/>
-          </a:ln>
-        </p:spPr>
-      </p:pic>
     </p:spTree>
   </p:cSld>
   <p:clrMapOvr>
@@ -11152,7 +13084,7 @@
   <p:cSld>
     <p:spTree>
       <p:nvGrpSpPr>
-        <p:cNvPr id="205" name="Shape 205"/>
+        <p:cNvPr id="216" name="Shape 216"/>
         <p:cNvGrpSpPr/>
         <p:nvPr/>
       </p:nvGrpSpPr>
@@ -11166,7 +13098,7 @@
       </p:grpSpPr>
       <p:sp>
         <p:nvSpPr>
-          <p:cNvPr id="206" name="Google Shape;206;p37"/>
+          <p:cNvPr id="217" name="Google Shape;217;p37"/>
           <p:cNvSpPr txBox="1"/>
           <p:nvPr>
             <p:ph type="title"/>
@@ -11198,11 +13130,11 @@
             </a:pPr>
             <a:r>
               <a:rPr lang="ja"/>
-              <a:t>M7</a:t>
-            </a:r>
-            <a:r>
-              <a:rPr lang="ja"/>
-              <a:t>：第二層学習後の形</a:t>
+              <a:t>M6：</a:t>
+            </a:r>
+            <a:r>
+              <a:rPr lang="ja"/>
+              <a:t>検証して確認したこと</a:t>
             </a:r>
             <a:endParaRPr/>
           </a:p>
@@ -11210,7 +13142,7 @@
       </p:sp>
       <p:sp>
         <p:nvSpPr>
-          <p:cNvPr id="207" name="Google Shape;207;p37"/>
+          <p:cNvPr id="218" name="Google Shape;218;p37"/>
           <p:cNvSpPr txBox="1"/>
           <p:nvPr>
             <p:ph idx="1" type="body"/>
@@ -11236,45 +13168,62 @@
                 <a:spcPts val="0"/>
               </a:spcBef>
               <a:spcAft>
+                <a:spcPts val="0"/>
+              </a:spcAft>
+              <a:buNone/>
+            </a:pPr>
+            <a:r>
+              <a:rPr lang="ja"/>
+              <a:t>・</a:t>
+            </a:r>
+            <a:r>
+              <a:rPr lang="ja"/>
+              <a:t>タスクごとに違う形に収束した(3 task × 2 seed)</a:t>
+            </a:r>
+            <a:endParaRPr/>
+          </a:p>
+          <a:p>
+            <a:pPr indent="0" lvl="0" marL="0" rtl="0" algn="l">
+              <a:spcBef>
                 <a:spcPts val="1200"/>
-              </a:spcAft>
-              <a:buNone/>
-            </a:pPr>
-            <a:r>
-              <a:t/>
+              </a:spcBef>
+              <a:spcAft>
+                <a:spcPts val="0"/>
+              </a:spcAft>
+              <a:buNone/>
+            </a:pPr>
+            <a:r>
+              <a:rPr lang="ja"/>
+              <a:t>・seed</a:t>
+            </a:r>
+            <a:r>
+              <a:rPr lang="ja"/>
+              <a:t>を変えてもタスクごとに進化する形状の傾向は保たれた</a:t>
             </a:r>
             <a:endParaRPr/>
           </a:p>
+          <a:p>
+            <a:pPr indent="0" lvl="0" marL="0" rtl="0" algn="l">
+              <a:spcBef>
+                <a:spcPts val="1200"/>
+              </a:spcBef>
+              <a:spcAft>
+                <a:spcPts val="1200"/>
+              </a:spcAft>
+              <a:buNone/>
+            </a:pPr>
+            <a:r>
+              <a:rPr lang="ja"/>
+              <a:t>・パーツ同士が</a:t>
+            </a:r>
+            <a:r>
+              <a:rPr lang="ja"/>
+              <a:t>自己干渉することを確認した</a:t>
+            </a:r>
+            <a:endParaRPr/>
+          </a:p>
         </p:txBody>
       </p:sp>
-      <p:pic>
-        <p:nvPicPr>
-          <p:cNvPr id="208" name="Google Shape;208;p37"/>
-          <p:cNvPicPr preferRelativeResize="0"/>
-          <p:nvPr/>
-        </p:nvPicPr>
-        <p:blipFill>
-          <a:blip r:embed="rId3">
-            <a:alphaModFix/>
-          </a:blip>
-          <a:stretch>
-            <a:fillRect/>
-          </a:stretch>
-        </p:blipFill>
-        <p:spPr>
-          <a:xfrm>
-            <a:off x="0" y="1569393"/>
-            <a:ext cx="9144003" cy="2004715"/>
-          </a:xfrm>
-          <a:prstGeom prst="rect">
-            <a:avLst/>
-          </a:prstGeom>
-          <a:noFill/>
-          <a:ln>
-            <a:noFill/>
-          </a:ln>
-        </p:spPr>
-      </p:pic>
     </p:spTree>
   </p:cSld>
   <p:clrMapOvr>
@@ -11288,7 +13237,7 @@
   <p:cSld>
     <p:spTree>
       <p:nvGrpSpPr>
-        <p:cNvPr id="212" name="Shape 212"/>
+        <p:cNvPr id="222" name="Shape 222"/>
         <p:cNvGrpSpPr/>
         <p:nvPr/>
       </p:nvGrpSpPr>
@@ -11302,7 +13251,7 @@
       </p:grpSpPr>
       <p:sp>
         <p:nvSpPr>
-          <p:cNvPr id="213" name="Google Shape;213;p38"/>
+          <p:cNvPr id="223" name="Google Shape;223;p38"/>
           <p:cNvSpPr txBox="1"/>
           <p:nvPr>
             <p:ph type="title"/>
@@ -11334,11 +13283,11 @@
             </a:pPr>
             <a:r>
               <a:rPr lang="ja"/>
-              <a:t>M7:</a:t>
-            </a:r>
-            <a:r>
-              <a:rPr lang="ja"/>
-              <a:t>第３層</a:t>
+              <a:t>M7：</a:t>
+            </a:r>
+            <a:r>
+              <a:rPr lang="ja"/>
+              <a:t>形態診断</a:t>
             </a:r>
             <a:endParaRPr/>
           </a:p>
@@ -11346,7 +13295,7 @@
       </p:sp>
       <p:sp>
         <p:nvSpPr>
-          <p:cNvPr id="214" name="Google Shape;214;p38"/>
+          <p:cNvPr id="224" name="Google Shape;224;p38"/>
           <p:cNvSpPr txBox="1"/>
           <p:nvPr>
             <p:ph idx="1" type="body"/>
@@ -11372,12 +13321,512 @@
                 <a:spcPts val="0"/>
               </a:spcBef>
               <a:spcAft>
+                <a:spcPts val="0"/>
+              </a:spcAft>
+              <a:buNone/>
+            </a:pPr>
+            <a:r>
+              <a:rPr lang="ja"/>
+              <a:t>・なにをする工程か</a:t>
+            </a:r>
+            <a:br>
+              <a:rPr lang="ja"/>
+            </a:br>
+            <a:r>
+              <a:rPr lang="ja"/>
+              <a:t>⇒「向かない」とだけ返すのではなく、原因と直し方を返す。</a:t>
+            </a:r>
+            <a:br>
+              <a:rPr lang="ja"/>
+            </a:br>
+            <a:r>
+              <a:rPr lang="ja"/>
+              <a:t>　生成 AI は使わず、閾値の判定と決まった文面で返す</a:t>
+            </a:r>
+            <a:r>
+              <a:rPr lang="ja"/>
+              <a:t>。</a:t>
+            </a:r>
+            <a:br>
+              <a:rPr lang="ja"/>
+            </a:br>
+            <a:r>
+              <a:rPr lang="ja"/>
+              <a:t>　（学習を回すまでもなく失敗するとわかっているものを弾くパターンもある）</a:t>
+            </a:r>
+            <a:endParaRPr/>
+          </a:p>
+          <a:p>
+            <a:pPr indent="0" lvl="0" marL="0" rtl="0" algn="l">
+              <a:spcBef>
                 <a:spcPts val="1200"/>
+              </a:spcBef>
+              <a:spcAft>
+                <a:spcPts val="1200"/>
+              </a:spcAft>
+              <a:buNone/>
+            </a:pPr>
+            <a:r>
+              <a:rPr lang="ja"/>
+              <a:t>・入出力</a:t>
+            </a:r>
+            <a:br>
+              <a:rPr lang="ja"/>
+            </a:br>
+            <a:r>
+              <a:rPr lang="ja"/>
+              <a:t>入力：</a:t>
+            </a:r>
+            <a:r>
+              <a:rPr lang="ja"/>
+              <a:t>XML（第 1 層）</a:t>
+            </a:r>
+            <a:br>
+              <a:rPr lang="ja"/>
+            </a:br>
+            <a:r>
+              <a:rPr lang="ja"/>
+              <a:t>	　学習後のチェックポイント（第 2 層）</a:t>
+            </a:r>
+            <a:br>
+              <a:rPr lang="ja"/>
+            </a:br>
+            <a:r>
+              <a:rPr lang="ja"/>
+              <a:t>	　方策を 1 エピソード動かした軌跡（第 3 層）</a:t>
+            </a:r>
+            <a:br>
+              <a:rPr lang="ja"/>
+            </a:br>
+            <a:r>
+              <a:rPr lang="ja"/>
+              <a:t>出力：棄却か通過か・倍率の助言・指摘の文</a:t>
+            </a:r>
+            <a:endParaRPr/>
+          </a:p>
+        </p:txBody>
+      </p:sp>
+    </p:spTree>
+  </p:cSld>
+  <p:clrMapOvr>
+    <a:masterClrMapping/>
+  </p:clrMapOvr>
+</p:sld>
+</file>
+
+<file path=ppt/slides/slide27.xml><?xml version="1.0" encoding="utf-8"?>
+<p:sld xmlns:a="http://schemas.openxmlformats.org/drawingml/2006/main" xmlns:r="http://schemas.openxmlformats.org/officeDocument/2006/relationships" xmlns:mc="http://schemas.openxmlformats.org/markup-compatibility/2006" xmlns:mv="urn:schemas-microsoft-com:mac:vml" xmlns:p="http://schemas.openxmlformats.org/presentationml/2006/main" xmlns:c="http://schemas.openxmlformats.org/drawingml/2006/chart" xmlns:dgm="http://schemas.openxmlformats.org/drawingml/2006/diagram" xmlns:o="urn:schemas-microsoft-com:office:office" xmlns:v="urn:schemas-microsoft-com:vml" xmlns:pvml="urn:schemas-microsoft-com:office:powerpoint" xmlns:com="http://schemas.openxmlformats.org/drawingml/2006/compatibility" xmlns:p14="http://schemas.microsoft.com/office/powerpoint/2010/main" xmlns:p15="http://schemas.microsoft.com/office/powerpoint/2012/main" xmlns:ahyp="http://schemas.microsoft.com/office/drawing/2018/hyperlinkcolor">
+  <p:cSld>
+    <p:spTree>
+      <p:nvGrpSpPr>
+        <p:cNvPr id="228" name="Shape 228"/>
+        <p:cNvGrpSpPr/>
+        <p:nvPr/>
+      </p:nvGrpSpPr>
+      <p:grpSpPr>
+        <a:xfrm>
+          <a:off x="0" y="0"/>
+          <a:ext cx="0" cy="0"/>
+          <a:chOff x="0" y="0"/>
+          <a:chExt cx="0" cy="0"/>
+        </a:xfrm>
+      </p:grpSpPr>
+      <p:sp>
+        <p:nvSpPr>
+          <p:cNvPr id="229" name="Google Shape;229;p39"/>
+          <p:cNvSpPr txBox="1"/>
+          <p:nvPr>
+            <p:ph type="title"/>
+          </p:nvPr>
+        </p:nvSpPr>
+        <p:spPr>
+          <a:xfrm>
+            <a:off x="311700" y="445025"/>
+            <a:ext cx="8520600" cy="572700"/>
+          </a:xfrm>
+          <a:prstGeom prst="rect">
+            <a:avLst/>
+          </a:prstGeom>
+        </p:spPr>
+        <p:txBody>
+          <a:bodyPr anchorCtr="0" anchor="t" bIns="91425" lIns="91425" spcFirstLastPara="1" rIns="91425" wrap="square" tIns="91425">
+            <a:normAutofit fontScale="90000"/>
+          </a:bodyPr>
+          <a:lstStyle/>
+          <a:p>
+            <a:pPr indent="0" lvl="0" marL="0" rtl="0" algn="l">
+              <a:spcBef>
+                <a:spcPts val="0"/>
+              </a:spcBef>
+              <a:spcAft>
+                <a:spcPts val="0"/>
+              </a:spcAft>
+              <a:buNone/>
+            </a:pPr>
+            <a:r>
+              <a:rPr lang="ja"/>
+              <a:t>M7：フ</a:t>
+            </a:r>
+            <a:r>
+              <a:rPr lang="ja"/>
+              <a:t>ローの説明</a:t>
+            </a:r>
+            <a:endParaRPr/>
+          </a:p>
+          <a:p>
+            <a:pPr indent="0" lvl="0" marL="0" rtl="0" algn="l">
+              <a:spcBef>
+                <a:spcPts val="0"/>
+              </a:spcBef>
+              <a:spcAft>
+                <a:spcPts val="0"/>
               </a:spcAft>
               <a:buNone/>
             </a:pPr>
             <a:r>
               <a:t/>
+            </a:r>
+            <a:endParaRPr/>
+          </a:p>
+        </p:txBody>
+      </p:sp>
+      <p:sp>
+        <p:nvSpPr>
+          <p:cNvPr id="230" name="Google Shape;230;p39"/>
+          <p:cNvSpPr txBox="1"/>
+          <p:nvPr>
+            <p:ph idx="1" type="body"/>
+          </p:nvPr>
+        </p:nvSpPr>
+        <p:spPr>
+          <a:xfrm>
+            <a:off x="311700" y="1152475"/>
+            <a:ext cx="8520600" cy="3416400"/>
+          </a:xfrm>
+          <a:prstGeom prst="rect">
+            <a:avLst/>
+          </a:prstGeom>
+        </p:spPr>
+        <p:txBody>
+          <a:bodyPr anchorCtr="0" anchor="t" bIns="91425" lIns="91425" spcFirstLastPara="1" rIns="91425" wrap="square" tIns="91425">
+            <a:normAutofit/>
+          </a:bodyPr>
+          <a:lstStyle/>
+          <a:p>
+            <a:pPr indent="0" lvl="0" marL="0" rtl="0" algn="l">
+              <a:spcBef>
+                <a:spcPts val="0"/>
+              </a:spcBef>
+              <a:spcAft>
+                <a:spcPts val="0"/>
+              </a:spcAft>
+              <a:buNone/>
+            </a:pPr>
+            <a:r>
+              <a:rPr lang="ja"/>
+              <a:t>①</a:t>
+            </a:r>
+            <a:r>
+              <a:rPr lang="ja"/>
+              <a:t>第 1 層（学習前・約 1 秒）: 幾何だけで届くかを判定する。届かなければ棄却し「腕を N 倍に」と返す</a:t>
+            </a:r>
+            <a:r>
+              <a:rPr lang="ja" sz="1300"/>
+              <a:t>（切り上げ・余裕なし）</a:t>
+            </a:r>
+            <a:endParaRPr sz="1300"/>
+          </a:p>
+          <a:p>
+            <a:pPr indent="0" lvl="0" marL="0" rtl="0" algn="l">
+              <a:spcBef>
+                <a:spcPts val="1200"/>
+              </a:spcBef>
+              <a:spcAft>
+                <a:spcPts val="0"/>
+              </a:spcAft>
+              <a:buNone/>
+            </a:pPr>
+            <a:r>
+              <a:rPr lang="ja"/>
+              <a:t>②棄却されたら、N 倍した XML を自動で作ってもう一度判定する</a:t>
+            </a:r>
+            <a:endParaRPr/>
+          </a:p>
+          <a:p>
+            <a:pPr indent="0" lvl="0" marL="0" rtl="0" algn="l">
+              <a:spcBef>
+                <a:spcPts val="1200"/>
+              </a:spcBef>
+              <a:spcAft>
+                <a:spcPts val="0"/>
+              </a:spcAft>
+              <a:buNone/>
+            </a:pPr>
+            <a:r>
+              <a:rPr lang="ja"/>
+              <a:t>③</a:t>
+            </a:r>
+            <a:r>
+              <a:rPr lang="ja"/>
+              <a:t>第 2 層（学習後）: ギア比・太さが探索範囲の端に張り付いていないかを見る</a:t>
+            </a:r>
+            <a:endParaRPr/>
+          </a:p>
+          <a:p>
+            <a:pPr indent="0" lvl="0" marL="0" rtl="0" algn="l">
+              <a:spcBef>
+                <a:spcPts val="1200"/>
+              </a:spcBef>
+              <a:spcAft>
+                <a:spcPts val="0"/>
+              </a:spcAft>
+              <a:buNone/>
+            </a:pPr>
+            <a:r>
+              <a:rPr lang="ja"/>
+              <a:t>④</a:t>
+            </a:r>
+            <a:r>
+              <a:rPr lang="ja"/>
+              <a:t>第 3 層（学習後）: 1 エピソード動かし、戦略（一撃で飛ばす・押す・静止など）と、使っていない関節を報告する</a:t>
+            </a:r>
+            <a:endParaRPr/>
+          </a:p>
+          <a:p>
+            <a:pPr indent="0" lvl="0" marL="0" rtl="0" algn="l">
+              <a:spcBef>
+                <a:spcPts val="1200"/>
+              </a:spcBef>
+              <a:spcAft>
+                <a:spcPts val="1200"/>
+              </a:spcAft>
+              <a:buNone/>
+            </a:pPr>
+            <a:r>
+              <a:rPr lang="ja"/>
+              <a:t>⑤</a:t>
+            </a:r>
+            <a:r>
+              <a:rPr lang="ja"/>
+              <a:t>「この形ではできない」と断定するのは第 1 層だけ。第 2・3 層は報告にとどめる</a:t>
+            </a:r>
+            <a:endParaRPr/>
+          </a:p>
+        </p:txBody>
+      </p:sp>
+    </p:spTree>
+  </p:cSld>
+  <p:clrMapOvr>
+    <a:masterClrMapping/>
+  </p:clrMapOvr>
+</p:sld>
+</file>
+
+<file path=ppt/slides/slide28.xml><?xml version="1.0" encoding="utf-8"?>
+<p:sld xmlns:a="http://schemas.openxmlformats.org/drawingml/2006/main" xmlns:r="http://schemas.openxmlformats.org/officeDocument/2006/relationships" xmlns:mc="http://schemas.openxmlformats.org/markup-compatibility/2006" xmlns:mv="urn:schemas-microsoft-com:mac:vml" xmlns:p="http://schemas.openxmlformats.org/presentationml/2006/main" xmlns:c="http://schemas.openxmlformats.org/drawingml/2006/chart" xmlns:dgm="http://schemas.openxmlformats.org/drawingml/2006/diagram" xmlns:o="urn:schemas-microsoft-com:office:office" xmlns:v="urn:schemas-microsoft-com:vml" xmlns:pvml="urn:schemas-microsoft-com:office:powerpoint" xmlns:com="http://schemas.openxmlformats.org/drawingml/2006/compatibility" xmlns:p14="http://schemas.microsoft.com/office/powerpoint/2010/main" xmlns:p15="http://schemas.microsoft.com/office/powerpoint/2012/main" xmlns:ahyp="http://schemas.microsoft.com/office/drawing/2018/hyperlinkcolor">
+  <p:cSld>
+    <p:spTree>
+      <p:nvGrpSpPr>
+        <p:cNvPr id="234" name="Shape 234"/>
+        <p:cNvGrpSpPr/>
+        <p:nvPr/>
+      </p:nvGrpSpPr>
+      <p:grpSpPr>
+        <a:xfrm>
+          <a:off x="0" y="0"/>
+          <a:ext cx="0" cy="0"/>
+          <a:chOff x="0" y="0"/>
+          <a:chExt cx="0" cy="0"/>
+        </a:xfrm>
+      </p:grpSpPr>
+      <p:sp>
+        <p:nvSpPr>
+          <p:cNvPr id="235" name="Google Shape;235;p40"/>
+          <p:cNvSpPr txBox="1"/>
+          <p:nvPr>
+            <p:ph type="title"/>
+          </p:nvPr>
+        </p:nvSpPr>
+        <p:spPr>
+          <a:xfrm>
+            <a:off x="311700" y="445025"/>
+            <a:ext cx="8520600" cy="572700"/>
+          </a:xfrm>
+          <a:prstGeom prst="rect">
+            <a:avLst/>
+          </a:prstGeom>
+        </p:spPr>
+        <p:txBody>
+          <a:bodyPr anchorCtr="0" anchor="t" bIns="91425" lIns="91425" spcFirstLastPara="1" rIns="91425" wrap="square" tIns="91425">
+            <a:normAutofit fontScale="90000"/>
+          </a:bodyPr>
+          <a:lstStyle/>
+          <a:p>
+            <a:pPr indent="0" lvl="0" marL="0" rtl="0" algn="l">
+              <a:spcBef>
+                <a:spcPts val="0"/>
+              </a:spcBef>
+              <a:spcAft>
+                <a:spcPts val="0"/>
+              </a:spcAft>
+              <a:buNone/>
+            </a:pPr>
+            <a:r>
+              <a:rPr lang="ja"/>
+              <a:t>M7：検証</a:t>
+            </a:r>
+            <a:r>
+              <a:rPr lang="ja"/>
+              <a:t>して確認したこと</a:t>
+            </a:r>
+            <a:endParaRPr/>
+          </a:p>
+        </p:txBody>
+      </p:sp>
+      <p:sp>
+        <p:nvSpPr>
+          <p:cNvPr id="236" name="Google Shape;236;p40"/>
+          <p:cNvSpPr txBox="1"/>
+          <p:nvPr>
+            <p:ph idx="1" type="body"/>
+          </p:nvPr>
+        </p:nvSpPr>
+        <p:spPr>
+          <a:xfrm>
+            <a:off x="311700" y="1152475"/>
+            <a:ext cx="8520600" cy="3416400"/>
+          </a:xfrm>
+          <a:prstGeom prst="rect">
+            <a:avLst/>
+          </a:prstGeom>
+        </p:spPr>
+        <p:txBody>
+          <a:bodyPr anchorCtr="0" anchor="t" bIns="91425" lIns="91425" spcFirstLastPara="1" rIns="91425" wrap="square" tIns="91425">
+            <a:normAutofit fontScale="77500" lnSpcReduction="10000"/>
+          </a:bodyPr>
+          <a:lstStyle/>
+          <a:p>
+            <a:pPr indent="0" lvl="0" marL="0" rtl="0" algn="l">
+              <a:spcBef>
+                <a:spcPts val="0"/>
+              </a:spcBef>
+              <a:spcAft>
+                <a:spcPts val="0"/>
+              </a:spcAft>
+              <a:buNone/>
+            </a:pPr>
+            <a:r>
+              <a:rPr lang="ja"/>
+              <a:t>・</a:t>
+            </a:r>
+            <a:r>
+              <a:rPr lang="ja"/>
+              <a:t>短い腕のロボットを用いて、M7で達成不可能とでたものは実際にタスク順位が最下位だった</a:t>
+            </a:r>
+            <a:endParaRPr/>
+          </a:p>
+          <a:p>
+            <a:pPr indent="0" lvl="0" marL="0" rtl="0" algn="l">
+              <a:spcBef>
+                <a:spcPts val="1200"/>
+              </a:spcBef>
+              <a:spcAft>
+                <a:spcPts val="0"/>
+              </a:spcAft>
+              <a:buNone/>
+            </a:pPr>
+            <a:r>
+              <a:rPr lang="ja"/>
+              <a:t>・Reachタスクにおいて、第 1 層の助言（1.99 倍に伸ばせ）に従うと、</a:t>
+            </a:r>
+            <a:br>
+              <a:rPr lang="ja"/>
+            </a:br>
+            <a:r>
+              <a:rPr lang="ja"/>
+              <a:t>　−396.92 → 平均−0.30 に改善した(数値は目標位置までの距離mm)</a:t>
+            </a:r>
+            <a:endParaRPr/>
+          </a:p>
+          <a:p>
+            <a:pPr indent="0" lvl="0" marL="0" rtl="0" algn="l">
+              <a:spcBef>
+                <a:spcPts val="1200"/>
+              </a:spcBef>
+              <a:spcAft>
+                <a:spcPts val="0"/>
+              </a:spcAft>
+              <a:buNone/>
+            </a:pPr>
+            <a:r>
+              <a:rPr lang="ja"/>
+              <a:t>・第 3 層の助言どおりに関節をfixしても成績は落ちない。むしろ上がったと</a:t>
+            </a:r>
+            <a:r>
+              <a:rPr lang="ja"/>
+              <a:t>確かめた</a:t>
+            </a:r>
+            <a:r>
+              <a:rPr lang="ja"/>
+              <a:t>(reach * 2seed)</a:t>
+            </a:r>
+            <a:br>
+              <a:rPr lang="ja"/>
+            </a:br>
+            <a:r>
+              <a:rPr lang="ja"/>
+              <a:t>　⇒つまり</a:t>
+            </a:r>
+            <a:r>
+              <a:rPr b="1" lang="ja">
+                <a:solidFill>
+                  <a:srgbClr val="FF0000"/>
+                </a:solidFill>
+              </a:rPr>
+              <a:t>第三層を実装したことで効率的な設計を提案できた(例が1つだけ)</a:t>
+            </a:r>
+            <a:endParaRPr b="1">
+              <a:solidFill>
+                <a:srgbClr val="FF0000"/>
+              </a:solidFill>
+            </a:endParaRPr>
+          </a:p>
+          <a:p>
+            <a:pPr indent="0" lvl="0" marL="0" rtl="0" algn="l">
+              <a:spcBef>
+                <a:spcPts val="1200"/>
+              </a:spcBef>
+              <a:spcAft>
+                <a:spcPts val="0"/>
+              </a:spcAft>
+              <a:buNone/>
+            </a:pPr>
+            <a:r>
+              <a:rPr lang="ja"/>
+              <a:t>⚠ 第 2 層の判定だけでは、良い方にも悪い方にも誤る。閾値は較正していない</a:t>
+            </a:r>
+            <a:br>
+              <a:rPr lang="ja"/>
+            </a:br>
+            <a:r>
+              <a:rPr lang="ja"/>
+              <a:t>⇒まあ正解は探索範囲の外にあるかもしれないね〜程度、アジャストな提案ができるようにはなっていない</a:t>
+            </a:r>
+            <a:endParaRPr/>
+          </a:p>
+          <a:p>
+            <a:pPr indent="0" lvl="0" marL="0" rtl="0" algn="l">
+              <a:spcBef>
+                <a:spcPts val="1200"/>
+              </a:spcBef>
+              <a:spcAft>
+                <a:spcPts val="1200"/>
+              </a:spcAft>
+              <a:buNone/>
+            </a:pPr>
+            <a:r>
+              <a:rPr lang="ja"/>
+              <a:t>⚠ パイプラインが出した不適合な形を、助言で直して学習で達成まで持っていった通しの例はまだ無い⇒これからやる予定かもしれない...（スケジュール的に無理そうだったら、自動スケールの軽微な修正はできました！だけにする）</a:t>
             </a:r>
             <a:endParaRPr/>
           </a:p>
@@ -11385,7 +13834,7 @@
       </p:sp>
       <p:pic>
         <p:nvPicPr>
-          <p:cNvPr id="215" name="Google Shape;215;p38"/>
+          <p:cNvPr id="237" name="Google Shape;237;p40" title="diagnosis_validation.png"/>
           <p:cNvPicPr preferRelativeResize="0"/>
           <p:nvPr/>
         </p:nvPicPr>
@@ -11399,8 +13848,144 @@
         </p:blipFill>
         <p:spPr>
           <a:xfrm>
-            <a:off x="0" y="1614041"/>
-            <a:ext cx="9144003" cy="1915419"/>
+            <a:off x="-2663900" y="3304201"/>
+            <a:ext cx="2553951" cy="1264675"/>
+          </a:xfrm>
+          <a:prstGeom prst="rect">
+            <a:avLst/>
+          </a:prstGeom>
+          <a:noFill/>
+          <a:ln>
+            <a:noFill/>
+          </a:ln>
+        </p:spPr>
+      </p:pic>
+    </p:spTree>
+  </p:cSld>
+  <p:clrMapOvr>
+    <a:masterClrMapping/>
+  </p:clrMapOvr>
+</p:sld>
+</file>
+
+<file path=ppt/slides/slide29.xml><?xml version="1.0" encoding="utf-8"?>
+<p:sld xmlns:a="http://schemas.openxmlformats.org/drawingml/2006/main" xmlns:r="http://schemas.openxmlformats.org/officeDocument/2006/relationships" xmlns:mc="http://schemas.openxmlformats.org/markup-compatibility/2006" xmlns:mv="urn:schemas-microsoft-com:mac:vml" xmlns:p="http://schemas.openxmlformats.org/presentationml/2006/main" xmlns:c="http://schemas.openxmlformats.org/drawingml/2006/chart" xmlns:dgm="http://schemas.openxmlformats.org/drawingml/2006/diagram" xmlns:o="urn:schemas-microsoft-com:office:office" xmlns:v="urn:schemas-microsoft-com:vml" xmlns:pvml="urn:schemas-microsoft-com:office:powerpoint" xmlns:com="http://schemas.openxmlformats.org/drawingml/2006/compatibility" xmlns:p14="http://schemas.microsoft.com/office/powerpoint/2010/main" xmlns:p15="http://schemas.microsoft.com/office/powerpoint/2012/main" xmlns:ahyp="http://schemas.microsoft.com/office/drawing/2018/hyperlinkcolor">
+  <p:cSld>
+    <p:spTree>
+      <p:nvGrpSpPr>
+        <p:cNvPr id="241" name="Shape 241"/>
+        <p:cNvGrpSpPr/>
+        <p:nvPr/>
+      </p:nvGrpSpPr>
+      <p:grpSpPr>
+        <a:xfrm>
+          <a:off x="0" y="0"/>
+          <a:ext cx="0" cy="0"/>
+          <a:chOff x="0" y="0"/>
+          <a:chExt cx="0" cy="0"/>
+        </a:xfrm>
+      </p:grpSpPr>
+      <p:sp>
+        <p:nvSpPr>
+          <p:cNvPr id="242" name="Google Shape;242;p41"/>
+          <p:cNvSpPr txBox="1"/>
+          <p:nvPr>
+            <p:ph type="title"/>
+          </p:nvPr>
+        </p:nvSpPr>
+        <p:spPr>
+          <a:xfrm>
+            <a:off x="311700" y="445025"/>
+            <a:ext cx="8520600" cy="572700"/>
+          </a:xfrm>
+          <a:prstGeom prst="rect">
+            <a:avLst/>
+          </a:prstGeom>
+        </p:spPr>
+        <p:txBody>
+          <a:bodyPr anchorCtr="0" anchor="t" bIns="91425" lIns="91425" spcFirstLastPara="1" rIns="91425" wrap="square" tIns="91425">
+            <a:normAutofit fontScale="90000"/>
+          </a:bodyPr>
+          <a:lstStyle/>
+          <a:p>
+            <a:pPr indent="0" lvl="0" marL="0" rtl="0" algn="l">
+              <a:spcBef>
+                <a:spcPts val="0"/>
+              </a:spcBef>
+              <a:spcAft>
+                <a:spcPts val="0"/>
+              </a:spcAft>
+              <a:buNone/>
+            </a:pPr>
+            <a:r>
+              <a:rPr lang="ja"/>
+              <a:t>M7:</a:t>
+            </a:r>
+            <a:r>
+              <a:rPr lang="ja"/>
+              <a:t>の棄却の判定閾値とアドバイス表</a:t>
+            </a:r>
+            <a:endParaRPr/>
+          </a:p>
+        </p:txBody>
+      </p:sp>
+      <p:sp>
+        <p:nvSpPr>
+          <p:cNvPr id="243" name="Google Shape;243;p41"/>
+          <p:cNvSpPr txBox="1"/>
+          <p:nvPr>
+            <p:ph idx="1" type="body"/>
+          </p:nvPr>
+        </p:nvSpPr>
+        <p:spPr>
+          <a:xfrm>
+            <a:off x="311700" y="1152475"/>
+            <a:ext cx="8520600" cy="3416400"/>
+          </a:xfrm>
+          <a:prstGeom prst="rect">
+            <a:avLst/>
+          </a:prstGeom>
+        </p:spPr>
+        <p:txBody>
+          <a:bodyPr anchorCtr="0" anchor="t" bIns="91425" lIns="91425" spcFirstLastPara="1" rIns="91425" wrap="square" tIns="91425">
+            <a:normAutofit/>
+          </a:bodyPr>
+          <a:lstStyle/>
+          <a:p>
+            <a:pPr indent="0" lvl="0" marL="0" rtl="0" algn="l">
+              <a:spcBef>
+                <a:spcPts val="0"/>
+              </a:spcBef>
+              <a:spcAft>
+                <a:spcPts val="1200"/>
+              </a:spcAft>
+              <a:buNone/>
+            </a:pPr>
+            <a:r>
+              <a:t/>
+            </a:r>
+            <a:endParaRPr/>
+          </a:p>
+        </p:txBody>
+      </p:sp>
+      <p:pic>
+        <p:nvPicPr>
+          <p:cNvPr id="244" name="Google Shape;244;p41"/>
+          <p:cNvPicPr preferRelativeResize="0"/>
+          <p:nvPr/>
+        </p:nvPicPr>
+        <p:blipFill>
+          <a:blip r:embed="rId3">
+            <a:alphaModFix/>
+          </a:blip>
+          <a:stretch>
+            <a:fillRect/>
+          </a:stretch>
+        </p:blipFill>
+        <p:spPr>
+          <a:xfrm>
+            <a:off x="0" y="1456430"/>
+            <a:ext cx="9144003" cy="3170040"/>
           </a:xfrm>
           <a:prstGeom prst="rect">
             <a:avLst/>
@@ -11466,16 +14051,10 @@
               <a:spcAft>
                 <a:spcPts val="0"/>
               </a:spcAft>
-              <a:buClr>
-                <a:schemeClr val="dk1"/>
-              </a:buClr>
-              <a:buSzPct val="39286"/>
-              <a:buFont typeface="Arial"/>
-              <a:buNone/>
-            </a:pPr>
-            <a:r>
-              <a:rPr lang="ja"/>
-              <a:t>M1：プロンプト</a:t>
+              <a:buNone/>
+            </a:pPr>
+            <a:r>
+              <a:t/>
             </a:r>
             <a:endParaRPr/>
           </a:p>
@@ -11514,81 +14093,15 @@
               <a:buNone/>
             </a:pPr>
             <a:r>
-              <a:rPr lang="ja"/>
-              <a:t>プロンプトのルール</a:t>
-            </a:r>
-            <a:br>
-              <a:rPr lang="ja"/>
-            </a:br>
-            <a:r>
-              <a:rPr b="1" lang="ja">
-                <a:solidFill>
-                  <a:srgbClr val="FF0000"/>
-                </a:solidFill>
-              </a:rPr>
-              <a:t>①関節ごとに純マゼンタの球を一個ずつ描かせる</a:t>
-            </a:r>
-            <a:br>
-              <a:rPr b="1" lang="ja">
-                <a:solidFill>
-                  <a:srgbClr val="FF0000"/>
-                </a:solidFill>
-              </a:rPr>
-            </a:br>
-            <a:r>
-              <a:rPr b="1" lang="ja">
-                <a:solidFill>
-                  <a:srgbClr val="FF0000"/>
-                </a:solidFill>
-              </a:rPr>
-              <a:t>②</a:t>
-            </a:r>
-            <a:r>
-              <a:rPr b="1" lang="ja">
-                <a:solidFill>
-                  <a:srgbClr val="FF0000"/>
-                </a:solidFill>
-              </a:rPr>
-              <a:t>スケッチのリンク長の比を保たせる</a:t>
-            </a:r>
-            <a:br>
-              <a:rPr lang="ja"/>
-            </a:br>
-            <a:r>
-              <a:rPr lang="ja"/>
-              <a:t>③各リンクを単色で塗り分ける</a:t>
-            </a:r>
-            <a:br>
-              <a:rPr lang="ja"/>
-            </a:br>
-            <a:r>
-              <a:rPr lang="ja"/>
-              <a:t>④関節の場所を言葉で列挙し(台座と上腕の間など)、球の個数を自己点検させる</a:t>
-            </a:r>
-            <a:br>
-              <a:rPr lang="ja"/>
-            </a:br>
-            <a:r>
-              <a:rPr lang="ja"/>
-              <a:t>⑤腕がユーザスケッチで寝ている場合でも立てて描かせる</a:t>
-            </a:r>
-            <a:br>
-              <a:rPr lang="ja"/>
-            </a:br>
-            <a:r>
-              <a:rPr lang="ja"/>
-              <a:t>⑥画像内に寸法や文字などを入れない</a:t>
-            </a:r>
-            <a:br>
-              <a:rPr lang="ja"/>
-            </a:br>
+              <a:t/>
+            </a:r>
             <a:endParaRPr/>
           </a:p>
         </p:txBody>
       </p:sp>
       <p:pic>
         <p:nvPicPr>
-          <p:cNvPr id="69" name="Google Shape;69;p15"/>
+          <p:cNvPr id="69" name="Google Shape;69;p15" title="システム図.drawio.png"/>
           <p:cNvPicPr preferRelativeResize="0"/>
           <p:nvPr/>
         </p:nvPicPr>
@@ -11602,8 +14115,416 @@
         </p:blipFill>
         <p:spPr>
           <a:xfrm>
-            <a:off x="5857325" y="3236300"/>
-            <a:ext cx="2847475" cy="1671350"/>
+            <a:off x="0" y="1376450"/>
+            <a:ext cx="9144000" cy="3414050"/>
+          </a:xfrm>
+          <a:prstGeom prst="rect">
+            <a:avLst/>
+          </a:prstGeom>
+          <a:noFill/>
+          <a:ln>
+            <a:noFill/>
+          </a:ln>
+        </p:spPr>
+      </p:pic>
+    </p:spTree>
+  </p:cSld>
+  <p:clrMapOvr>
+    <a:masterClrMapping/>
+  </p:clrMapOvr>
+</p:sld>
+</file>
+
+<file path=ppt/slides/slide30.xml><?xml version="1.0" encoding="utf-8"?>
+<p:sld xmlns:a="http://schemas.openxmlformats.org/drawingml/2006/main" xmlns:r="http://schemas.openxmlformats.org/officeDocument/2006/relationships" xmlns:mc="http://schemas.openxmlformats.org/markup-compatibility/2006" xmlns:mv="urn:schemas-microsoft-com:mac:vml" xmlns:p="http://schemas.openxmlformats.org/presentationml/2006/main" xmlns:c="http://schemas.openxmlformats.org/drawingml/2006/chart" xmlns:dgm="http://schemas.openxmlformats.org/drawingml/2006/diagram" xmlns:o="urn:schemas-microsoft-com:office:office" xmlns:v="urn:schemas-microsoft-com:vml" xmlns:pvml="urn:schemas-microsoft-com:office:powerpoint" xmlns:com="http://schemas.openxmlformats.org/drawingml/2006/compatibility" xmlns:p14="http://schemas.microsoft.com/office/powerpoint/2010/main" xmlns:p15="http://schemas.microsoft.com/office/powerpoint/2012/main" xmlns:ahyp="http://schemas.microsoft.com/office/drawing/2018/hyperlinkcolor">
+  <p:cSld>
+    <p:spTree>
+      <p:nvGrpSpPr>
+        <p:cNvPr id="248" name="Shape 248"/>
+        <p:cNvGrpSpPr/>
+        <p:nvPr/>
+      </p:nvGrpSpPr>
+      <p:grpSpPr>
+        <a:xfrm>
+          <a:off x="0" y="0"/>
+          <a:ext cx="0" cy="0"/>
+          <a:chOff x="0" y="0"/>
+          <a:chExt cx="0" cy="0"/>
+        </a:xfrm>
+      </p:grpSpPr>
+      <p:sp>
+        <p:nvSpPr>
+          <p:cNvPr id="249" name="Google Shape;249;p42"/>
+          <p:cNvSpPr txBox="1"/>
+          <p:nvPr>
+            <p:ph type="title"/>
+          </p:nvPr>
+        </p:nvSpPr>
+        <p:spPr>
+          <a:xfrm>
+            <a:off x="311700" y="445025"/>
+            <a:ext cx="8520600" cy="572700"/>
+          </a:xfrm>
+          <a:prstGeom prst="rect">
+            <a:avLst/>
+          </a:prstGeom>
+        </p:spPr>
+        <p:txBody>
+          <a:bodyPr anchorCtr="0" anchor="t" bIns="91425" lIns="91425" spcFirstLastPara="1" rIns="91425" wrap="square" tIns="91425">
+            <a:normAutofit fontScale="90000"/>
+          </a:bodyPr>
+          <a:lstStyle/>
+          <a:p>
+            <a:pPr indent="0" lvl="0" marL="0" rtl="0" algn="l">
+              <a:spcBef>
+                <a:spcPts val="0"/>
+              </a:spcBef>
+              <a:spcAft>
+                <a:spcPts val="0"/>
+              </a:spcAft>
+              <a:buNone/>
+            </a:pPr>
+            <a:r>
+              <a:rPr lang="ja"/>
+              <a:t>M7</a:t>
+            </a:r>
+            <a:r>
+              <a:rPr lang="ja"/>
+              <a:t>：閉ループの概要</a:t>
+            </a:r>
+            <a:endParaRPr/>
+          </a:p>
+        </p:txBody>
+      </p:sp>
+      <p:sp>
+        <p:nvSpPr>
+          <p:cNvPr id="250" name="Google Shape;250;p42"/>
+          <p:cNvSpPr txBox="1"/>
+          <p:nvPr>
+            <p:ph idx="1" type="body"/>
+          </p:nvPr>
+        </p:nvSpPr>
+        <p:spPr>
+          <a:xfrm>
+            <a:off x="311700" y="1152475"/>
+            <a:ext cx="8520600" cy="3416400"/>
+          </a:xfrm>
+          <a:prstGeom prst="rect">
+            <a:avLst/>
+          </a:prstGeom>
+        </p:spPr>
+        <p:txBody>
+          <a:bodyPr anchorCtr="0" anchor="t" bIns="91425" lIns="91425" spcFirstLastPara="1" rIns="91425" wrap="square" tIns="91425">
+            <a:normAutofit/>
+          </a:bodyPr>
+          <a:lstStyle/>
+          <a:p>
+            <a:pPr indent="0" lvl="0" marL="0" rtl="0" algn="l">
+              <a:spcBef>
+                <a:spcPts val="0"/>
+              </a:spcBef>
+              <a:spcAft>
+                <a:spcPts val="1200"/>
+              </a:spcAft>
+              <a:buNone/>
+            </a:pPr>
+            <a:r>
+              <a:t/>
+            </a:r>
+            <a:endParaRPr/>
+          </a:p>
+        </p:txBody>
+      </p:sp>
+      <p:pic>
+        <p:nvPicPr>
+          <p:cNvPr id="251" name="Google Shape;251;p42"/>
+          <p:cNvPicPr preferRelativeResize="0"/>
+          <p:nvPr/>
+        </p:nvPicPr>
+        <p:blipFill>
+          <a:blip r:embed="rId3">
+            <a:alphaModFix/>
+          </a:blip>
+          <a:stretch>
+            <a:fillRect/>
+          </a:stretch>
+        </p:blipFill>
+        <p:spPr>
+          <a:xfrm>
+            <a:off x="0" y="1855143"/>
+            <a:ext cx="9144003" cy="1433215"/>
+          </a:xfrm>
+          <a:prstGeom prst="rect">
+            <a:avLst/>
+          </a:prstGeom>
+          <a:noFill/>
+          <a:ln>
+            <a:noFill/>
+          </a:ln>
+        </p:spPr>
+      </p:pic>
+    </p:spTree>
+  </p:cSld>
+  <p:clrMapOvr>
+    <a:masterClrMapping/>
+  </p:clrMapOvr>
+</p:sld>
+</file>
+
+<file path=ppt/slides/slide31.xml><?xml version="1.0" encoding="utf-8"?>
+<p:sld xmlns:a="http://schemas.openxmlformats.org/drawingml/2006/main" xmlns:r="http://schemas.openxmlformats.org/officeDocument/2006/relationships" xmlns:mc="http://schemas.openxmlformats.org/markup-compatibility/2006" xmlns:mv="urn:schemas-microsoft-com:mac:vml" xmlns:p="http://schemas.openxmlformats.org/presentationml/2006/main" xmlns:c="http://schemas.openxmlformats.org/drawingml/2006/chart" xmlns:dgm="http://schemas.openxmlformats.org/drawingml/2006/diagram" xmlns:o="urn:schemas-microsoft-com:office:office" xmlns:v="urn:schemas-microsoft-com:vml" xmlns:pvml="urn:schemas-microsoft-com:office:powerpoint" xmlns:com="http://schemas.openxmlformats.org/drawingml/2006/compatibility" xmlns:p14="http://schemas.microsoft.com/office/powerpoint/2010/main" xmlns:p15="http://schemas.microsoft.com/office/powerpoint/2012/main" xmlns:ahyp="http://schemas.microsoft.com/office/drawing/2018/hyperlinkcolor">
+  <p:cSld>
+    <p:spTree>
+      <p:nvGrpSpPr>
+        <p:cNvPr id="255" name="Shape 255"/>
+        <p:cNvGrpSpPr/>
+        <p:nvPr/>
+      </p:nvGrpSpPr>
+      <p:grpSpPr>
+        <a:xfrm>
+          <a:off x="0" y="0"/>
+          <a:ext cx="0" cy="0"/>
+          <a:chOff x="0" y="0"/>
+          <a:chExt cx="0" cy="0"/>
+        </a:xfrm>
+      </p:grpSpPr>
+      <p:sp>
+        <p:nvSpPr>
+          <p:cNvPr id="256" name="Google Shape;256;p43"/>
+          <p:cNvSpPr txBox="1"/>
+          <p:nvPr>
+            <p:ph type="title"/>
+          </p:nvPr>
+        </p:nvSpPr>
+        <p:spPr>
+          <a:xfrm>
+            <a:off x="311700" y="445025"/>
+            <a:ext cx="8520600" cy="572700"/>
+          </a:xfrm>
+          <a:prstGeom prst="rect">
+            <a:avLst/>
+          </a:prstGeom>
+        </p:spPr>
+        <p:txBody>
+          <a:bodyPr anchorCtr="0" anchor="t" bIns="91425" lIns="91425" spcFirstLastPara="1" rIns="91425" wrap="square" tIns="91425">
+            <a:normAutofit fontScale="90000"/>
+          </a:bodyPr>
+          <a:lstStyle/>
+          <a:p>
+            <a:pPr indent="0" lvl="0" marL="0" rtl="0" algn="l">
+              <a:spcBef>
+                <a:spcPts val="0"/>
+              </a:spcBef>
+              <a:spcAft>
+                <a:spcPts val="0"/>
+              </a:spcAft>
+              <a:buNone/>
+            </a:pPr>
+            <a:r>
+              <a:rPr lang="ja"/>
+              <a:t>M7</a:t>
+            </a:r>
+            <a:r>
+              <a:rPr lang="ja"/>
+              <a:t>：第二層学習後の形</a:t>
+            </a:r>
+            <a:endParaRPr/>
+          </a:p>
+        </p:txBody>
+      </p:sp>
+      <p:sp>
+        <p:nvSpPr>
+          <p:cNvPr id="257" name="Google Shape;257;p43"/>
+          <p:cNvSpPr txBox="1"/>
+          <p:nvPr>
+            <p:ph idx="1" type="body"/>
+          </p:nvPr>
+        </p:nvSpPr>
+        <p:spPr>
+          <a:xfrm>
+            <a:off x="311700" y="1152475"/>
+            <a:ext cx="8520600" cy="3416400"/>
+          </a:xfrm>
+          <a:prstGeom prst="rect">
+            <a:avLst/>
+          </a:prstGeom>
+        </p:spPr>
+        <p:txBody>
+          <a:bodyPr anchorCtr="0" anchor="t" bIns="91425" lIns="91425" spcFirstLastPara="1" rIns="91425" wrap="square" tIns="91425">
+            <a:normAutofit/>
+          </a:bodyPr>
+          <a:lstStyle/>
+          <a:p>
+            <a:pPr indent="0" lvl="0" marL="0" rtl="0" algn="l">
+              <a:spcBef>
+                <a:spcPts val="0"/>
+              </a:spcBef>
+              <a:spcAft>
+                <a:spcPts val="1200"/>
+              </a:spcAft>
+              <a:buNone/>
+            </a:pPr>
+            <a:r>
+              <a:t/>
+            </a:r>
+            <a:endParaRPr/>
+          </a:p>
+        </p:txBody>
+      </p:sp>
+      <p:pic>
+        <p:nvPicPr>
+          <p:cNvPr id="258" name="Google Shape;258;p43"/>
+          <p:cNvPicPr preferRelativeResize="0"/>
+          <p:nvPr/>
+        </p:nvPicPr>
+        <p:blipFill>
+          <a:blip r:embed="rId3">
+            <a:alphaModFix/>
+          </a:blip>
+          <a:stretch>
+            <a:fillRect/>
+          </a:stretch>
+        </p:blipFill>
+        <p:spPr>
+          <a:xfrm>
+            <a:off x="0" y="1569393"/>
+            <a:ext cx="9144003" cy="2004715"/>
+          </a:xfrm>
+          <a:prstGeom prst="rect">
+            <a:avLst/>
+          </a:prstGeom>
+          <a:noFill/>
+          <a:ln>
+            <a:noFill/>
+          </a:ln>
+        </p:spPr>
+      </p:pic>
+    </p:spTree>
+  </p:cSld>
+  <p:clrMapOvr>
+    <a:masterClrMapping/>
+  </p:clrMapOvr>
+</p:sld>
+</file>
+
+<file path=ppt/slides/slide32.xml><?xml version="1.0" encoding="utf-8"?>
+<p:sld xmlns:a="http://schemas.openxmlformats.org/drawingml/2006/main" xmlns:r="http://schemas.openxmlformats.org/officeDocument/2006/relationships" xmlns:mc="http://schemas.openxmlformats.org/markup-compatibility/2006" xmlns:mv="urn:schemas-microsoft-com:mac:vml" xmlns:p="http://schemas.openxmlformats.org/presentationml/2006/main" xmlns:c="http://schemas.openxmlformats.org/drawingml/2006/chart" xmlns:dgm="http://schemas.openxmlformats.org/drawingml/2006/diagram" xmlns:o="urn:schemas-microsoft-com:office:office" xmlns:v="urn:schemas-microsoft-com:vml" xmlns:pvml="urn:schemas-microsoft-com:office:powerpoint" xmlns:com="http://schemas.openxmlformats.org/drawingml/2006/compatibility" xmlns:p14="http://schemas.microsoft.com/office/powerpoint/2010/main" xmlns:p15="http://schemas.microsoft.com/office/powerpoint/2012/main" xmlns:ahyp="http://schemas.microsoft.com/office/drawing/2018/hyperlinkcolor">
+  <p:cSld>
+    <p:spTree>
+      <p:nvGrpSpPr>
+        <p:cNvPr id="262" name="Shape 262"/>
+        <p:cNvGrpSpPr/>
+        <p:nvPr/>
+      </p:nvGrpSpPr>
+      <p:grpSpPr>
+        <a:xfrm>
+          <a:off x="0" y="0"/>
+          <a:ext cx="0" cy="0"/>
+          <a:chOff x="0" y="0"/>
+          <a:chExt cx="0" cy="0"/>
+        </a:xfrm>
+      </p:grpSpPr>
+      <p:sp>
+        <p:nvSpPr>
+          <p:cNvPr id="263" name="Google Shape;263;p44"/>
+          <p:cNvSpPr txBox="1"/>
+          <p:nvPr>
+            <p:ph type="title"/>
+          </p:nvPr>
+        </p:nvSpPr>
+        <p:spPr>
+          <a:xfrm>
+            <a:off x="311700" y="445025"/>
+            <a:ext cx="8520600" cy="572700"/>
+          </a:xfrm>
+          <a:prstGeom prst="rect">
+            <a:avLst/>
+          </a:prstGeom>
+        </p:spPr>
+        <p:txBody>
+          <a:bodyPr anchorCtr="0" anchor="t" bIns="91425" lIns="91425" spcFirstLastPara="1" rIns="91425" wrap="square" tIns="91425">
+            <a:normAutofit fontScale="90000"/>
+          </a:bodyPr>
+          <a:lstStyle/>
+          <a:p>
+            <a:pPr indent="0" lvl="0" marL="0" rtl="0" algn="l">
+              <a:spcBef>
+                <a:spcPts val="0"/>
+              </a:spcBef>
+              <a:spcAft>
+                <a:spcPts val="0"/>
+              </a:spcAft>
+              <a:buNone/>
+            </a:pPr>
+            <a:r>
+              <a:rPr lang="ja"/>
+              <a:t>M7:</a:t>
+            </a:r>
+            <a:r>
+              <a:rPr lang="ja"/>
+              <a:t>第３層</a:t>
+            </a:r>
+            <a:endParaRPr/>
+          </a:p>
+        </p:txBody>
+      </p:sp>
+      <p:sp>
+        <p:nvSpPr>
+          <p:cNvPr id="264" name="Google Shape;264;p44"/>
+          <p:cNvSpPr txBox="1"/>
+          <p:nvPr>
+            <p:ph idx="1" type="body"/>
+          </p:nvPr>
+        </p:nvSpPr>
+        <p:spPr>
+          <a:xfrm>
+            <a:off x="311700" y="1152475"/>
+            <a:ext cx="8520600" cy="3416400"/>
+          </a:xfrm>
+          <a:prstGeom prst="rect">
+            <a:avLst/>
+          </a:prstGeom>
+        </p:spPr>
+        <p:txBody>
+          <a:bodyPr anchorCtr="0" anchor="t" bIns="91425" lIns="91425" spcFirstLastPara="1" rIns="91425" wrap="square" tIns="91425">
+            <a:normAutofit/>
+          </a:bodyPr>
+          <a:lstStyle/>
+          <a:p>
+            <a:pPr indent="0" lvl="0" marL="0" rtl="0" algn="l">
+              <a:spcBef>
+                <a:spcPts val="0"/>
+              </a:spcBef>
+              <a:spcAft>
+                <a:spcPts val="1200"/>
+              </a:spcAft>
+              <a:buNone/>
+            </a:pPr>
+            <a:r>
+              <a:t/>
+            </a:r>
+            <a:endParaRPr/>
+          </a:p>
+        </p:txBody>
+      </p:sp>
+      <p:pic>
+        <p:nvPicPr>
+          <p:cNvPr id="265" name="Google Shape;265;p44"/>
+          <p:cNvPicPr preferRelativeResize="0"/>
+          <p:nvPr/>
+        </p:nvPicPr>
+        <p:blipFill>
+          <a:blip r:embed="rId3">
+            <a:alphaModFix/>
+          </a:blip>
+          <a:stretch>
+            <a:fillRect/>
+          </a:stretch>
+        </p:blipFill>
+        <p:spPr>
+          <a:xfrm>
+            <a:off x="0" y="1614041"/>
+            <a:ext cx="9144003" cy="1915419"/>
           </a:xfrm>
           <a:prstGeom prst="rect">
             <a:avLst/>
@@ -11669,16 +14590,15 @@
               <a:spcAft>
                 <a:spcPts val="0"/>
               </a:spcAft>
-              <a:buClr>
-                <a:schemeClr val="dk1"/>
-              </a:buClr>
-              <a:buSzPct val="39286"/>
-              <a:buFont typeface="Arial"/>
-              <a:buNone/>
-            </a:pPr>
-            <a:r>
-              <a:rPr lang="ja"/>
-              <a:t>M1：検証して確認したこと</a:t>
+              <a:buNone/>
+            </a:pPr>
+            <a:r>
+              <a:rPr lang="ja"/>
+              <a:t>M1</a:t>
+            </a:r>
+            <a:r>
+              <a:rPr lang="ja"/>
+              <a:t>：画像整形(Gemini API)</a:t>
             </a:r>
             <a:endParaRPr/>
           </a:p>
@@ -11718,7 +14638,21 @@
             </a:pPr>
             <a:r>
               <a:rPr lang="ja"/>
-              <a:t>・手描き5例全てでマーカー(関節のマゼンタ球)が3個でた</a:t>
+              <a:t>・なにをする工程か</a:t>
+            </a:r>
+            <a:br>
+              <a:rPr lang="ja"/>
+            </a:br>
+            <a:r>
+              <a:rPr lang="ja"/>
+              <a:t>⇒手描きスケッチを、後の3D化とセグメンテーションで扱いやすい</a:t>
+            </a:r>
+            <a:br>
+              <a:rPr lang="ja"/>
+            </a:br>
+            <a:r>
+              <a:rPr lang="ja"/>
+              <a:t>「CAD風スケッチ」の画像に描き直す</a:t>
             </a:r>
             <a:endParaRPr/>
           </a:p>
@@ -11734,23 +14668,54 @@
             </a:pPr>
             <a:r>
               <a:rPr lang="ja"/>
-              <a:t>・Geminiの温度</a:t>
-            </a:r>
-            <a:r>
-              <a:rPr lang="ja" sz="1600"/>
-              <a:t>(モデルが出力するトークンのランダムさを決定する数値)</a:t>
-            </a:r>
-            <a:r>
-              <a:rPr lang="ja"/>
-              <a:t>が0でも出力は毎回変わる。同じ入力でリンク比が 1.05〜1.21 倍の範囲で揺れる</a:t>
+              <a:t>・入出力</a:t>
             </a:r>
             <a:br>
               <a:rPr lang="ja"/>
             </a:br>
+            <a:r>
+              <a:rPr lang="ja"/>
+              <a:t>入力：手描きスケッチ(png)+固定プロンプト</a:t>
+            </a:r>
+            <a:br>
+              <a:rPr lang="ja"/>
+            </a:br>
+            <a:r>
+              <a:rPr lang="ja"/>
+              <a:t>出力：整形済み画像(png)</a:t>
+            </a:r>
             <a:endParaRPr/>
           </a:p>
         </p:txBody>
       </p:sp>
+      <p:pic>
+        <p:nvPicPr>
+          <p:cNvPr id="76" name="Google Shape;76;p16"/>
+          <p:cNvPicPr preferRelativeResize="0"/>
+          <p:nvPr/>
+        </p:nvPicPr>
+        <p:blipFill>
+          <a:blip r:embed="rId3">
+            <a:alphaModFix/>
+          </a:blip>
+          <a:stretch>
+            <a:fillRect/>
+          </a:stretch>
+        </p:blipFill>
+        <p:spPr>
+          <a:xfrm>
+            <a:off x="5250101" y="2632300"/>
+            <a:ext cx="3626799" cy="2128775"/>
+          </a:xfrm>
+          <a:prstGeom prst="rect">
+            <a:avLst/>
+          </a:prstGeom>
+          <a:noFill/>
+          <a:ln>
+            <a:noFill/>
+          </a:ln>
+        </p:spPr>
+      </p:pic>
     </p:spTree>
   </p:cSld>
   <p:clrMapOvr>
@@ -11764,7 +14729,7 @@
   <p:cSld>
     <p:spTree>
       <p:nvGrpSpPr>
-        <p:cNvPr id="79" name="Shape 79"/>
+        <p:cNvPr id="80" name="Shape 80"/>
         <p:cNvGrpSpPr/>
         <p:nvPr/>
       </p:nvGrpSpPr>
@@ -11778,7 +14743,7 @@
       </p:grpSpPr>
       <p:sp>
         <p:nvSpPr>
-          <p:cNvPr id="80" name="Google Shape;80;p17"/>
+          <p:cNvPr id="81" name="Google Shape;81;p17"/>
           <p:cNvSpPr txBox="1"/>
           <p:nvPr>
             <p:ph type="title"/>
@@ -11806,19 +14771,16 @@
               <a:spcAft>
                 <a:spcPts val="0"/>
               </a:spcAft>
-              <a:buNone/>
-            </a:pPr>
-            <a:r>
-              <a:rPr lang="ja"/>
-              <a:t>M2：3D</a:t>
-            </a:r>
-            <a:r>
-              <a:rPr lang="ja"/>
-              <a:t>形状生成</a:t>
-            </a:r>
-            <a:r>
-              <a:rPr lang="ja"/>
-              <a:t>(Tripo3D API)</a:t>
+              <a:buClr>
+                <a:schemeClr val="dk1"/>
+              </a:buClr>
+              <a:buSzPct val="39286"/>
+              <a:buFont typeface="Arial"/>
+              <a:buNone/>
+            </a:pPr>
+            <a:r>
+              <a:rPr lang="ja"/>
+              <a:t>M1：プロンプト</a:t>
             </a:r>
             <a:endParaRPr/>
           </a:p>
@@ -11826,7 +14788,7 @@
       </p:sp>
       <p:sp>
         <p:nvSpPr>
-          <p:cNvPr id="81" name="Google Shape;81;p17"/>
+          <p:cNvPr id="82" name="Google Shape;82;p17"/>
           <p:cNvSpPr txBox="1"/>
           <p:nvPr>
             <p:ph idx="1" type="body"/>
@@ -11852,74 +14814,86 @@
                 <a:spcPts val="0"/>
               </a:spcBef>
               <a:spcAft>
-                <a:spcPts val="0"/>
-              </a:spcAft>
-              <a:buNone/>
-            </a:pPr>
-            <a:r>
-              <a:rPr lang="ja"/>
-              <a:t>・なにをする工程か</a:t>
+                <a:spcPts val="1200"/>
+              </a:spcAft>
+              <a:buNone/>
+            </a:pPr>
+            <a:r>
+              <a:rPr lang="ja"/>
+              <a:t>プロンプトのルール</a:t>
             </a:r>
             <a:br>
               <a:rPr lang="ja"/>
             </a:br>
             <a:r>
-              <a:rPr lang="ja"/>
-              <a:t>⇒</a:t>
-            </a:r>
-            <a:r>
-              <a:rPr lang="ja"/>
-              <a:t>整形済み画像から 3D メッシュを作る（既存のサービスをそのまま使う）</a:t>
-            </a:r>
-            <a:endParaRPr/>
-          </a:p>
-          <a:p>
-            <a:pPr indent="0" lvl="0" marL="0" rtl="0" algn="l">
-              <a:spcBef>
-                <a:spcPts val="1200"/>
-              </a:spcBef>
-              <a:spcAft>
-                <a:spcPts val="1200"/>
-              </a:spcAft>
-              <a:buNone/>
-            </a:pPr>
-            <a:r>
-              <a:rPr lang="ja"/>
-              <a:t>・入出力</a:t>
+              <a:rPr b="1" lang="ja">
+                <a:solidFill>
+                  <a:srgbClr val="FF0000"/>
+                </a:solidFill>
+              </a:rPr>
+              <a:t>①関節ごとに純マゼンタの球を一個ずつ描かせる</a:t>
             </a:r>
             <a:br>
-              <a:rPr lang="ja"/>
+              <a:rPr b="1" lang="ja">
+                <a:solidFill>
+                  <a:srgbClr val="FF0000"/>
+                </a:solidFill>
+              </a:rPr>
             </a:br>
             <a:r>
-              <a:rPr lang="ja"/>
-              <a:t>入力：</a:t>
-            </a:r>
-            <a:r>
-              <a:rPr lang="ja"/>
-              <a:t>整形済みスケッチ</a:t>
-            </a:r>
-            <a:r>
-              <a:rPr lang="ja"/>
-              <a:t>(png)</a:t>
+              <a:rPr b="1" lang="ja">
+                <a:solidFill>
+                  <a:srgbClr val="FF0000"/>
+                </a:solidFill>
+              </a:rPr>
+              <a:t>②</a:t>
+            </a:r>
+            <a:r>
+              <a:rPr b="1" lang="ja">
+                <a:solidFill>
+                  <a:srgbClr val="FF0000"/>
+                </a:solidFill>
+              </a:rPr>
+              <a:t>スケッチのリンク長の比を保たせる</a:t>
             </a:r>
             <a:br>
               <a:rPr lang="ja"/>
             </a:br>
             <a:r>
               <a:rPr lang="ja"/>
-              <a:t>出力：3D</a:t>
-            </a:r>
-            <a:r>
-              <a:rPr lang="ja"/>
-              <a:t>モデル(glb,色付き)</a:t>
-            </a:r>
+              <a:t>③各リンクを単色で塗り分ける</a:t>
+            </a:r>
+            <a:br>
+              <a:rPr lang="ja"/>
+            </a:br>
+            <a:r>
+              <a:rPr lang="ja"/>
+              <a:t>④関節の場所を言葉で列挙し(台座と上腕の間など)、球の個数を自己点検させる</a:t>
+            </a:r>
+            <a:br>
+              <a:rPr lang="ja"/>
+            </a:br>
+            <a:r>
+              <a:rPr lang="ja"/>
+              <a:t>⑤腕がユーザスケッチで寝ている場合でも立てて描かせる</a:t>
+            </a:r>
+            <a:br>
+              <a:rPr lang="ja"/>
+            </a:br>
+            <a:r>
+              <a:rPr lang="ja"/>
+              <a:t>⑥画像内に寸法や文字などを入れない</a:t>
+            </a:r>
+            <a:br>
+              <a:rPr lang="ja"/>
+            </a:br>
             <a:endParaRPr/>
           </a:p>
         </p:txBody>
       </p:sp>
       <p:pic>
         <p:nvPicPr>
-          <p:cNvPr id="82" name="Google Shape;82;p17"/>
+          <p:cNvPr id="83" name="Google Shape;83;p17"/>
           <p:cNvPicPr preferRelativeResize="0"/>
           <p:nvPr/>
         </p:nvPicPr>
@@ -11933,8 +14907,8 @@
         </p:blipFill>
         <p:spPr>
           <a:xfrm>
-            <a:off x="5159101" y="2441100"/>
-            <a:ext cx="2920050" cy="2313624"/>
+            <a:off x="5857325" y="3236300"/>
+            <a:ext cx="2847475" cy="1671350"/>
           </a:xfrm>
           <a:prstGeom prst="rect">
             <a:avLst/>
@@ -11958,7 +14932,7 @@
   <p:cSld>
     <p:spTree>
       <p:nvGrpSpPr>
-        <p:cNvPr id="86" name="Shape 86"/>
+        <p:cNvPr id="87" name="Shape 87"/>
         <p:cNvGrpSpPr/>
         <p:nvPr/>
       </p:nvGrpSpPr>
@@ -11972,7 +14946,7 @@
       </p:grpSpPr>
       <p:sp>
         <p:nvSpPr>
-          <p:cNvPr id="87" name="Google Shape;87;p18"/>
+          <p:cNvPr id="88" name="Google Shape;88;p18"/>
           <p:cNvSpPr txBox="1"/>
           <p:nvPr>
             <p:ph type="title"/>
@@ -12009,30 +14983,15 @@
             </a:pPr>
             <a:r>
               <a:rPr lang="ja"/>
-              <a:t>M2：フローの説明</a:t>
+              <a:t>M1：検証して確認したこと</a:t>
             </a:r>
             <a:endParaRPr/>
           </a:p>
-          <a:p>
-            <a:pPr indent="0" lvl="0" marL="0" rtl="0" algn="l">
-              <a:spcBef>
-                <a:spcPts val="0"/>
-              </a:spcBef>
-              <a:spcAft>
-                <a:spcPts val="0"/>
-              </a:spcAft>
-              <a:buNone/>
-            </a:pPr>
-            <a:r>
-              <a:t/>
-            </a:r>
-            <a:endParaRPr/>
-          </a:p>
         </p:txBody>
       </p:sp>
       <p:sp>
         <p:nvSpPr>
-          <p:cNvPr id="88" name="Google Shape;88;p18"/>
+          <p:cNvPr id="89" name="Google Shape;89;p18"/>
           <p:cNvSpPr txBox="1"/>
           <p:nvPr>
             <p:ph idx="1" type="body"/>
@@ -12064,7 +15023,7 @@
             </a:pPr>
             <a:r>
               <a:rPr lang="ja"/>
-              <a:t>①整形済み画像を Tripo3D に渡す（seed を固定）</a:t>
+              <a:t>・手描き5例全てでマーカー(関節のマゼンタ球)が3個でた</a:t>
             </a:r>
             <a:endParaRPr/>
           </a:p>
@@ -12074,77 +15033,29 @@
                 <a:spcPts val="1200"/>
               </a:spcBef>
               <a:spcAft>
-                <a:spcPts val="0"/>
-              </a:spcAft>
-              <a:buNone/>
-            </a:pPr>
-            <a:r>
-              <a:rPr lang="ja"/>
-              <a:t>②色付きの glb を受け取る</a:t>
-            </a:r>
+                <a:spcPts val="1200"/>
+              </a:spcAft>
+              <a:buNone/>
+            </a:pPr>
+            <a:r>
+              <a:rPr lang="ja"/>
+              <a:t>・Geminiの温度</a:t>
+            </a:r>
+            <a:r>
+              <a:rPr lang="ja" sz="1600"/>
+              <a:t>(モデルが出力するトークンのランダムさを決定する数値)</a:t>
+            </a:r>
+            <a:r>
+              <a:rPr lang="ja"/>
+              <a:t>が0でも出力は毎回変わる。同じ入力でリンク比が 1.05〜1.21 倍の範囲で揺れる</a:t>
+            </a:r>
+            <a:br>
+              <a:rPr lang="ja"/>
+            </a:br>
             <a:endParaRPr/>
           </a:p>
-          <a:p>
-            <a:pPr indent="0" lvl="0" marL="0" rtl="0" algn="l">
-              <a:spcBef>
-                <a:spcPts val="1200"/>
-              </a:spcBef>
-              <a:spcAft>
-                <a:spcPts val="0"/>
-              </a:spcAft>
-              <a:buNone/>
-            </a:pPr>
-            <a:r>
-              <a:rPr lang="ja"/>
-              <a:t>③大きさはサービス側が自動で「最も長い辺 ＝ 1 m」にそろえる</a:t>
-            </a:r>
-            <a:endParaRPr/>
-          </a:p>
-          <a:p>
-            <a:pPr indent="0" lvl="0" marL="0" rtl="0" algn="l">
-              <a:spcBef>
-                <a:spcPts val="1200"/>
-              </a:spcBef>
-              <a:spcAft>
-                <a:spcPts val="1200"/>
-              </a:spcAft>
-              <a:buNone/>
-            </a:pPr>
-            <a:r>
-              <a:t/>
-            </a:r>
-            <a:endParaRPr/>
-          </a:p>
         </p:txBody>
       </p:sp>
-      <p:pic>
-        <p:nvPicPr>
-          <p:cNvPr id="89" name="Google Shape;89;p18"/>
-          <p:cNvPicPr preferRelativeResize="0"/>
-          <p:nvPr/>
-        </p:nvPicPr>
-        <p:blipFill>
-          <a:blip r:embed="rId3">
-            <a:alphaModFix/>
-          </a:blip>
-          <a:stretch>
-            <a:fillRect/>
-          </a:stretch>
-        </p:blipFill>
-        <p:spPr>
-          <a:xfrm>
-            <a:off x="5203701" y="2606800"/>
-            <a:ext cx="2920050" cy="2313624"/>
-          </a:xfrm>
-          <a:prstGeom prst="rect">
-            <a:avLst/>
-          </a:prstGeom>
-          <a:noFill/>
-          <a:ln>
-            <a:noFill/>
-          </a:ln>
-        </p:spPr>
-      </p:pic>
     </p:spTree>
   </p:cSld>
   <p:clrMapOvr>
@@ -12204,11 +15115,15 @@
             </a:pPr>
             <a:r>
               <a:rPr lang="ja"/>
-              <a:t>M2：</a:t>
-            </a:r>
-            <a:r>
-              <a:rPr lang="ja"/>
-              <a:t>検証して確認したこと</a:t>
+              <a:t>M2：3D</a:t>
+            </a:r>
+            <a:r>
+              <a:rPr lang="ja"/>
+              <a:t>形状生成</a:t>
+            </a:r>
+            <a:r>
+              <a:rPr lang="ja"/>
+              <a:t>(Tripo3D API)</a:t>
             </a:r>
             <a:endParaRPr/>
           </a:p>
@@ -12242,42 +15157,99 @@
                 <a:spcPts val="0"/>
               </a:spcBef>
               <a:spcAft>
+                <a:spcPts val="0"/>
+              </a:spcAft>
+              <a:buNone/>
+            </a:pPr>
+            <a:r>
+              <a:rPr lang="ja"/>
+              <a:t>・なにをする工程か</a:t>
+            </a:r>
+            <a:br>
+              <a:rPr lang="ja"/>
+            </a:br>
+            <a:r>
+              <a:rPr lang="ja"/>
+              <a:t>⇒</a:t>
+            </a:r>
+            <a:r>
+              <a:rPr lang="ja"/>
+              <a:t>整形済み画像から 3D メッシュを作る（既存のサービスをそのまま使う）</a:t>
+            </a:r>
+            <a:endParaRPr/>
+          </a:p>
+          <a:p>
+            <a:pPr indent="0" lvl="0" marL="0" rtl="0" algn="l">
+              <a:spcBef>
                 <a:spcPts val="1200"/>
-              </a:spcAft>
-              <a:buNone/>
-            </a:pPr>
-            <a:r>
-              <a:rPr lang="ja"/>
-              <a:t>・Tripo3Dはseed値を固定すると、入力が同じ画像だと同じ3Dを生成する</a:t>
+              </a:spcBef>
+              <a:spcAft>
+                <a:spcPts val="1200"/>
+              </a:spcAft>
+              <a:buNone/>
+            </a:pPr>
+            <a:r>
+              <a:rPr lang="ja"/>
+              <a:t>・入出力</a:t>
             </a:r>
             <a:br>
               <a:rPr lang="ja"/>
             </a:br>
             <a:r>
               <a:rPr lang="ja"/>
-              <a:t>・</a:t>
-            </a:r>
-            <a:r>
-              <a:rPr lang="ja"/>
-              <a:t>真横から描いた絵は4/4で成功したが、同じものを斜めから描いたものだと0/2</a:t>
+              <a:t>入力：</a:t>
+            </a:r>
+            <a:r>
+              <a:rPr lang="ja"/>
+              <a:t>整形済みスケッチ</a:t>
+            </a:r>
+            <a:r>
+              <a:rPr lang="ja"/>
+              <a:t>(png)</a:t>
             </a:r>
             <a:br>
               <a:rPr lang="ja"/>
             </a:br>
             <a:r>
               <a:rPr lang="ja"/>
-              <a:t>⇒ここでいう成功失敗はなに？モデルの失敗？元の比が保たれていない？geminiの段階では良かったの？</a:t>
-            </a:r>
-            <a:br>
-              <a:rPr lang="ja"/>
-            </a:br>
-            <a:br>
-              <a:rPr lang="ja"/>
-            </a:br>
+              <a:t>出力：3D</a:t>
+            </a:r>
+            <a:r>
+              <a:rPr lang="ja"/>
+              <a:t>モデル(glb,色付き)</a:t>
+            </a:r>
             <a:endParaRPr/>
           </a:p>
         </p:txBody>
       </p:sp>
+      <p:pic>
+        <p:nvPicPr>
+          <p:cNvPr id="96" name="Google Shape;96;p19"/>
+          <p:cNvPicPr preferRelativeResize="0"/>
+          <p:nvPr/>
+        </p:nvPicPr>
+        <p:blipFill>
+          <a:blip r:embed="rId3">
+            <a:alphaModFix/>
+          </a:blip>
+          <a:stretch>
+            <a:fillRect/>
+          </a:stretch>
+        </p:blipFill>
+        <p:spPr>
+          <a:xfrm>
+            <a:off x="5159101" y="2441100"/>
+            <a:ext cx="2920050" cy="2313624"/>
+          </a:xfrm>
+          <a:prstGeom prst="rect">
+            <a:avLst/>
+          </a:prstGeom>
+          <a:noFill/>
+          <a:ln>
+            <a:noFill/>
+          </a:ln>
+        </p:spPr>
+      </p:pic>
     </p:spTree>
   </p:cSld>
   <p:clrMapOvr>
@@ -12291,7 +15263,7 @@
   <p:cSld>
     <p:spTree>
       <p:nvGrpSpPr>
-        <p:cNvPr id="99" name="Shape 99"/>
+        <p:cNvPr id="100" name="Shape 100"/>
         <p:cNvGrpSpPr/>
         <p:nvPr/>
       </p:nvGrpSpPr>
@@ -12305,7 +15277,7 @@
       </p:grpSpPr>
       <p:sp>
         <p:nvSpPr>
-          <p:cNvPr id="100" name="Google Shape;100;p20"/>
+          <p:cNvPr id="101" name="Google Shape;101;p20"/>
           <p:cNvSpPr txBox="1"/>
           <p:nvPr>
             <p:ph type="title"/>
@@ -12333,23 +15305,39 @@
               <a:spcAft>
                 <a:spcPts val="0"/>
               </a:spcAft>
-              <a:buNone/>
-            </a:pPr>
-            <a:r>
-              <a:rPr lang="ja"/>
-              <a:t>M3</a:t>
-            </a:r>
-            <a:r>
-              <a:rPr lang="ja"/>
-              <a:t>：関節検出・リンク分割</a:t>
+              <a:buClr>
+                <a:schemeClr val="dk1"/>
+              </a:buClr>
+              <a:buSzPct val="39286"/>
+              <a:buFont typeface="Arial"/>
+              <a:buNone/>
+            </a:pPr>
+            <a:r>
+              <a:rPr lang="ja"/>
+              <a:t>M2：フローの説明</a:t>
             </a:r>
             <a:endParaRPr/>
           </a:p>
+          <a:p>
+            <a:pPr indent="0" lvl="0" marL="0" rtl="0" algn="l">
+              <a:spcBef>
+                <a:spcPts val="0"/>
+              </a:spcBef>
+              <a:spcAft>
+                <a:spcPts val="0"/>
+              </a:spcAft>
+              <a:buNone/>
+            </a:pPr>
+            <a:r>
+              <a:t/>
+            </a:r>
+            <a:endParaRPr/>
+          </a:p>
         </p:txBody>
       </p:sp>
       <p:sp>
         <p:nvSpPr>
-          <p:cNvPr id="101" name="Google Shape;101;p20"/>
+          <p:cNvPr id="102" name="Google Shape;102;p20"/>
           <p:cNvSpPr txBox="1"/>
           <p:nvPr>
             <p:ph idx="1" type="body"/>
@@ -12381,25 +15369,7 @@
             </a:pPr>
             <a:r>
               <a:rPr lang="ja"/>
-              <a:t>・なにをする工程か</a:t>
-            </a:r>
-            <a:br>
-              <a:rPr lang="ja"/>
-            </a:br>
-            <a:r>
-              <a:rPr lang="ja"/>
-              <a:t>⇒</a:t>
-            </a:r>
-            <a:r>
-              <a:rPr lang="ja"/>
-              <a:t>3D モデルからマゼンタの球を見つけて関節の位置を決め、</a:t>
-            </a:r>
-            <a:br>
-              <a:rPr lang="ja"/>
-            </a:br>
-            <a:r>
-              <a:rPr lang="ja"/>
-              <a:t>　メッシュをリンクごとに切り分ける</a:t>
+              <a:t>①整形済み画像を Tripo3D に渡す（seed を固定）</a:t>
             </a:r>
             <a:endParaRPr/>
           </a:p>
@@ -12415,7 +15385,7 @@
             </a:pPr>
             <a:r>
               <a:rPr lang="ja"/>
-              <a:t>入出力</a:t>
+              <a:t>②色付きの glb を受け取る</a:t>
             </a:r>
             <a:endParaRPr/>
           </a:p>
@@ -12425,35 +15395,28 @@
                 <a:spcPts val="1200"/>
               </a:spcBef>
               <a:spcAft>
+                <a:spcPts val="0"/>
+              </a:spcAft>
+              <a:buNone/>
+            </a:pPr>
+            <a:r>
+              <a:rPr lang="ja"/>
+              <a:t>③大きさはサービス側が自動で「最も長い辺 ＝ 1 m」にそろえる</a:t>
+            </a:r>
+            <a:endParaRPr/>
+          </a:p>
+          <a:p>
+            <a:pPr indent="0" lvl="0" marL="0" rtl="0" algn="l">
+              <a:spcBef>
                 <a:spcPts val="1200"/>
-              </a:spcAft>
-              <a:buNone/>
-            </a:pPr>
-            <a:r>
-              <a:rPr lang="ja"/>
-              <a:t>・入出力</a:t>
-            </a:r>
-            <a:br>
-              <a:rPr lang="ja"/>
-            </a:br>
-            <a:r>
-              <a:rPr lang="ja"/>
-              <a:t>入力：3D</a:t>
-            </a:r>
-            <a:r>
-              <a:rPr lang="ja"/>
-              <a:t>形状(glb)</a:t>
-            </a:r>
-            <a:br>
-              <a:rPr lang="ja"/>
-            </a:br>
-            <a:r>
-              <a:rPr lang="ja"/>
-              <a:t>出力：</a:t>
-            </a:r>
-            <a:r>
-              <a:rPr lang="ja"/>
-              <a:t>リンクごとのSTL,関節の座標</a:t>
+              </a:spcBef>
+              <a:spcAft>
+                <a:spcPts val="1200"/>
+              </a:spcAft>
+              <a:buNone/>
+            </a:pPr>
+            <a:r>
+              <a:t/>
             </a:r>
             <a:endParaRPr/>
           </a:p>
@@ -12461,7 +15424,7 @@
       </p:sp>
       <p:pic>
         <p:nvPicPr>
-          <p:cNvPr id="102" name="Google Shape;102;p20"/>
+          <p:cNvPr id="103" name="Google Shape;103;p20"/>
           <p:cNvPicPr preferRelativeResize="0"/>
           <p:nvPr/>
         </p:nvPicPr>
@@ -12475,8 +15438,8 @@
         </p:blipFill>
         <p:spPr>
           <a:xfrm>
-            <a:off x="5250101" y="2632300"/>
-            <a:ext cx="3626799" cy="2128775"/>
+            <a:off x="5203701" y="2606800"/>
+            <a:ext cx="2920050" cy="2313624"/>
           </a:xfrm>
           <a:prstGeom prst="rect">
             <a:avLst/>
@@ -12500,7 +15463,7 @@
   <p:cSld>
     <p:spTree>
       <p:nvGrpSpPr>
-        <p:cNvPr id="106" name="Shape 106"/>
+        <p:cNvPr id="107" name="Shape 107"/>
         <p:cNvGrpSpPr/>
         <p:nvPr/>
       </p:nvGrpSpPr>
@@ -12514,7 +15477,7 @@
       </p:grpSpPr>
       <p:sp>
         <p:nvSpPr>
-          <p:cNvPr id="107" name="Google Shape;107;p21"/>
+          <p:cNvPr id="108" name="Google Shape;108;p21"/>
           <p:cNvSpPr txBox="1"/>
           <p:nvPr>
             <p:ph type="title"/>
@@ -12546,30 +15509,19 @@
             </a:pPr>
             <a:r>
               <a:rPr lang="ja"/>
-              <a:t>M3：フローの説明</a:t>
+              <a:t>M2:</a:t>
+            </a:r>
+            <a:r>
+              <a:rPr lang="ja"/>
+              <a:t>フローの説明</a:t>
             </a:r>
             <a:endParaRPr/>
           </a:p>
-          <a:p>
-            <a:pPr indent="0" lvl="0" marL="0" rtl="0" algn="l">
-              <a:spcBef>
-                <a:spcPts val="0"/>
-              </a:spcBef>
-              <a:spcAft>
-                <a:spcPts val="0"/>
-              </a:spcAft>
-              <a:buNone/>
-            </a:pPr>
-            <a:r>
-              <a:t/>
-            </a:r>
-            <a:endParaRPr/>
-          </a:p>
         </p:txBody>
       </p:sp>
       <p:sp>
         <p:nvSpPr>
-          <p:cNvPr id="108" name="Google Shape;108;p21"/>
+          <p:cNvPr id="109" name="Google Shape;109;p21"/>
           <p:cNvSpPr txBox="1"/>
           <p:nvPr>
             <p:ph idx="1" type="body"/>
@@ -12595,109 +15547,45 @@
                 <a:spcPts val="0"/>
               </a:spcBef>
               <a:spcAft>
-                <a:spcPts val="0"/>
-              </a:spcAft>
-              <a:buNone/>
-            </a:pPr>
-            <a:r>
-              <a:rPr lang="ja"/>
-              <a:t>①</a:t>
-            </a:r>
-            <a:r>
-              <a:rPr lang="ja"/>
-              <a:t>テクスチャの色を頂点に移す</a:t>
+                <a:spcPts val="1200"/>
+              </a:spcAft>
+              <a:buNone/>
+            </a:pPr>
+            <a:r>
+              <a:t/>
             </a:r>
             <a:endParaRPr/>
           </a:p>
-          <a:p>
-            <a:pPr indent="0" lvl="0" marL="0" rtl="0" algn="l">
-              <a:spcBef>
-                <a:spcPts val="1200"/>
-              </a:spcBef>
-              <a:spcAft>
-                <a:spcPts val="0"/>
-              </a:spcAft>
-              <a:buNone/>
-            </a:pPr>
-            <a:r>
-              <a:rPr lang="ja"/>
-              <a:t>②</a:t>
-            </a:r>
-            <a:r>
-              <a:rPr lang="ja"/>
-              <a:t>マゼンタに近い色の頂点を抜き出す</a:t>
-            </a:r>
-            <a:endParaRPr/>
-          </a:p>
-          <a:p>
-            <a:pPr indent="0" lvl="0" marL="0" rtl="0" algn="l">
-              <a:spcBef>
-                <a:spcPts val="1200"/>
-              </a:spcBef>
-              <a:spcAft>
-                <a:spcPts val="0"/>
-              </a:spcAft>
-              <a:buNone/>
-            </a:pPr>
-            <a:r>
-              <a:rPr lang="ja"/>
-              <a:t>③</a:t>
-            </a:r>
-            <a:r>
-              <a:rPr lang="ja"/>
-              <a:t>抜き出した頂点を3次元でまとまりに分け、各まとまりの重心を関節とする</a:t>
-            </a:r>
-            <a:endParaRPr/>
-          </a:p>
-          <a:p>
-            <a:pPr indent="0" lvl="0" marL="0" rtl="0" algn="l">
-              <a:spcBef>
-                <a:spcPts val="1200"/>
-              </a:spcBef>
-              <a:spcAft>
-                <a:spcPts val="0"/>
-              </a:spcAft>
-              <a:buNone/>
-            </a:pPr>
-            <a:r>
-              <a:rPr lang="ja"/>
-              <a:t>④関節の高さ(Z)でメッシュを切る。</a:t>
-            </a:r>
-            <a:endParaRPr/>
-          </a:p>
-          <a:p>
-            <a:pPr indent="0" lvl="0" marL="0" rtl="0" algn="l">
-              <a:spcBef>
-                <a:spcPts val="1200"/>
-              </a:spcBef>
-              <a:spcAft>
-                <a:spcPts val="0"/>
-              </a:spcAft>
-              <a:buNone/>
-            </a:pPr>
-            <a:r>
-              <a:rPr lang="ja"/>
-              <a:t>⑤各リンクを自分の座標に移してSTLで出力する。</a:t>
-            </a:r>
-            <a:endParaRPr/>
-          </a:p>
-          <a:p>
-            <a:pPr indent="0" lvl="0" marL="0" rtl="0" algn="l">
-              <a:spcBef>
-                <a:spcPts val="1200"/>
-              </a:spcBef>
-              <a:spcAft>
-                <a:spcPts val="1200"/>
-              </a:spcAft>
-              <a:buNone/>
-            </a:pPr>
-            <a:r>
-              <a:t/>
-            </a:r>
-            <a:endParaRPr/>
-          </a:p>
         </p:txBody>
       </p:sp>
+      <p:pic>
+        <p:nvPicPr>
+          <p:cNvPr id="110" name="Google Shape;110;p21" title="pipeline_m2_pose.png"/>
+          <p:cNvPicPr preferRelativeResize="0"/>
+          <p:nvPr/>
+        </p:nvPicPr>
+        <p:blipFill>
+          <a:blip r:embed="rId3">
+            <a:alphaModFix/>
+          </a:blip>
+          <a:stretch>
+            <a:fillRect/>
+          </a:stretch>
+        </p:blipFill>
+        <p:spPr>
+          <a:xfrm>
+            <a:off x="1484970" y="1152475"/>
+            <a:ext cx="6056829" cy="3960224"/>
+          </a:xfrm>
+          <a:prstGeom prst="rect">
+            <a:avLst/>
+          </a:prstGeom>
+          <a:noFill/>
+          <a:ln>
+            <a:noFill/>
+          </a:ln>
+        </p:spPr>
+      </p:pic>
     </p:spTree>
   </p:cSld>
   <p:clrMapOvr>
